--- a/presentation_puls_events_EN.pptx
+++ b/presentation_puls_events_EN.pptx
@@ -5,24 +5,24 @@
     <p:sldMasterId id="2147483648" r:id="rId1"/>
   </p:sldMasterIdLst>
   <p:notesMasterIdLst>
-    <p:notesMasterId r:id="rId15"/>
+    <p:notesMasterId r:id="rId17"/>
   </p:notesMasterIdLst>
   <p:sldIdLst>
     <p:sldId id="256" r:id="rId2"/>
-    <p:sldId id="271" r:id="rId20"/>
     <p:sldId id="257" r:id="rId3"/>
     <p:sldId id="258" r:id="rId4"/>
     <p:sldId id="259" r:id="rId5"/>
-    <p:sldId id="260" r:id="rId14"/>
-    <p:sldId id="272" r:id="rId21"/>
-    <p:sldId id="261" r:id="rId6"/>
-    <p:sldId id="262" r:id="rId7"/>
-    <p:sldId id="263" r:id="rId8"/>
-    <p:sldId id="264" r:id="rId9"/>
-    <p:sldId id="265" r:id="rId10"/>
-    <p:sldId id="266" r:id="rId11"/>
-    <p:sldId id="267" r:id="rId12"/>
-    <p:sldId id="268" r:id="rId13"/>
+    <p:sldId id="260" r:id="rId6"/>
+    <p:sldId id="272" r:id="rId7"/>
+    <p:sldId id="261" r:id="rId8"/>
+    <p:sldId id="262" r:id="rId9"/>
+    <p:sldId id="263" r:id="rId10"/>
+    <p:sldId id="264" r:id="rId11"/>
+    <p:sldId id="265" r:id="rId12"/>
+    <p:sldId id="266" r:id="rId13"/>
+    <p:sldId id="267" r:id="rId14"/>
+    <p:sldId id="268" r:id="rId15"/>
+    <p:sldId id="271" r:id="rId16"/>
   </p:sldIdLst>
   <p:sldSz cx="9144000" cy="5143500" type="screen16x9"/>
   <p:notesSz cx="5143500" cy="9144000"/>
@@ -384,7 +384,7 @@
           <a:p>
             <a:r>
               <a:rPr lang="en-US" dirty="0"/>
-              <a:t>Emphasise that the path to production is well defined. No architectural overhaul required: only infrastructure investment.</a:t>
+              <a:t>30 questions covering all realistic cases. RAGAS metrics objectively measure quality. Mention the rate limit constraint on the free Mistral tier.</a:t>
             </a:r>
           </a:p>
         </p:txBody>
@@ -406,7 +406,7 @@
           <a:p>
             <a:fld id="{F7021451-1387-4CA6-816F-3879F97B5CBC}" type="slidenum">
               <a:rPr lang="en-US"/>
-              <a:t>10</a:t>
+              <a:t>11</a:t>
             </a:fld>
             <a:endParaRPr lang="en-US"/>
           </a:p>
@@ -471,7 +471,7 @@
           <a:p>
             <a:r>
               <a:rPr lang="en-US" dirty="0"/>
-              <a:t>These are the exact questions Jeremy will ask during the 10-minute discussion. Prepare to answer confidently without reading from the slide.</a:t>
+              <a:t>Emphasise that the path to production is well defined. No architectural overhaul required: only infrastructure investment.</a:t>
             </a:r>
           </a:p>
         </p:txBody>
@@ -493,7 +493,7 @@
           <a:p>
             <a:fld id="{F7021451-1387-4CA6-816F-3879F97B5CBC}" type="slidenum">
               <a:rPr lang="en-US"/>
-              <a:t>11</a:t>
+              <a:t>12</a:t>
             </a:fld>
             <a:endParaRPr lang="en-US"/>
           </a:p>
@@ -558,7 +558,7 @@
           <a:p>
             <a:r>
               <a:rPr lang="en-US" dirty="0"/>
-              <a:t>Conclusion slide. Return to the five validated points. Close with the clear recommendation to proceed to production.</a:t>
+              <a:t>These are the exact questions Jeremy will ask during the 10-minute discussion. Prepare to answer confidently without reading from the slide.</a:t>
             </a:r>
           </a:p>
         </p:txBody>
@@ -580,7 +580,7 @@
           <a:p>
             <a:fld id="{F7021451-1387-4CA6-816F-3879F97B5CBC}" type="slidenum">
               <a:rPr lang="en-US"/>
-              <a:t>12</a:t>
+              <a:t>13</a:t>
             </a:fld>
             <a:endParaRPr lang="en-US"/>
           </a:p>
@@ -645,7 +645,7 @@
           <a:p>
             <a:r>
               <a:rPr lang="en-US" dirty="0"/>
-              <a:t>Justify each choice. For FAISS: IndexFlatL2 is exact and sufficient at this scale. For chunking: descriptions are too short to split.</a:t>
+              <a:t>Conclusion slide. Return to the five validated points. Close with the clear recommendation to proceed to production.</a:t>
             </a:r>
           </a:p>
         </p:txBody>
@@ -667,7 +667,7 @@
           <a:p>
             <a:fld id="{F7021451-1387-4CA6-816F-3879F97B5CBC}" type="slidenum">
               <a:rPr lang="en-US"/>
-              <a:t>13</a:t>
+              <a:t>14</a:t>
             </a:fld>
             <a:endParaRPr lang="en-US"/>
           </a:p>
@@ -676,7 +676,7 @@
     </p:spTree>
     <p:extLst>
       <p:ext uri="{BB962C8B-B14F-4D97-AF65-F5344CB8AC3E}">
-        <p14:creationId xmlns:p14="http://schemas.microsoft.com/office/powerpoint/2010/main" val="2851269158"/>
+        <p14:creationId xmlns:p14="http://schemas.microsoft.com/office/powerpoint/2010/main" val="1024086991"/>
       </p:ext>
     </p:extLst>
   </p:cSld>
@@ -993,7 +993,7 @@
           <a:p>
             <a:r>
               <a:rPr lang="en-US" dirty="0"/>
-              <a:t>Emphasise the self-contained pattern: each bash script writes the Python file AND executes it. Highlight skip logic: if the artefact already exists, the step is skipped.</a:t>
+              <a:t>Justify each choice. For FAISS: IndexFlatL2 is exact and sufficient at this scale. For chunking: descriptions are too short to split.</a:t>
             </a:r>
           </a:p>
         </p:txBody>
@@ -1024,7 +1024,7 @@
     </p:spTree>
     <p:extLst>
       <p:ext uri="{BB962C8B-B14F-4D97-AF65-F5344CB8AC3E}">
-        <p14:creationId xmlns:p14="http://schemas.microsoft.com/office/powerpoint/2010/main" val="1024086991"/>
+        <p14:creationId xmlns:p14="http://schemas.microsoft.com/office/powerpoint/2010/main" val="2851269158"/>
       </p:ext>
     </p:extLst>
   </p:cSld>
@@ -1080,7 +1080,7 @@
           <a:p>
             <a:r>
               <a:rPr lang="en-US" dirty="0"/>
-              <a:t>L2 distances validate semantic search. Emphasise case 4: out-of-scope query correctly refused without hallucination.</a:t>
+              <a:t>Emphasise the self-contained pattern: each bash script writes the Python file AND executes it. Highlight skip logic: if the artefact already exists, the step is skipped.</a:t>
             </a:r>
           </a:p>
         </p:txBody>
@@ -1102,7 +1102,7 @@
           <a:p>
             <a:fld id="{F7021451-1387-4CA6-816F-3879F97B5CBC}" type="slidenum">
               <a:rPr lang="en-US"/>
-              <a:t>6</a:t>
+              <a:t>7</a:t>
             </a:fld>
             <a:endParaRPr lang="en-US"/>
           </a:p>
@@ -1167,7 +1167,7 @@
           <a:p>
             <a:r>
               <a:rPr lang="en-US" dirty="0"/>
-              <a:t>LIVE DEMO. Run: bash pipeline.sh --skip-run then bash 04_run.sh. Open localhost:8501. Test: 1) classical concert 2) best restaurant (out of scope) 3) what to do this weekend.</a:t>
+              <a:t>L2 distances validate semantic search. Emphasise case 4: out-of-scope query correctly refused without hallucination.</a:t>
             </a:r>
           </a:p>
         </p:txBody>
@@ -1189,7 +1189,7 @@
           <a:p>
             <a:fld id="{F7021451-1387-4CA6-816F-3879F97B5CBC}" type="slidenum">
               <a:rPr lang="en-US"/>
-              <a:t>7</a:t>
+              <a:t>8</a:t>
             </a:fld>
             <a:endParaRPr lang="en-US"/>
           </a:p>
@@ -1254,7 +1254,7 @@
           <a:p>
             <a:r>
               <a:rPr lang="en-US" dirty="0"/>
-              <a:t>Highlight the date parsing bug discovery (milliseconds vs ISO). This bug would have silently corrupted the date filter in production. The tests caught it.</a:t>
+              <a:t>LIVE DEMO. Run: bash pipeline.sh --skip-run then bash 04_run.sh. Open localhost:8501. Test: 1) classical concert 2) best restaurant (out of scope) 3) what to do this weekend.</a:t>
             </a:r>
           </a:p>
         </p:txBody>
@@ -1276,7 +1276,7 @@
           <a:p>
             <a:fld id="{F7021451-1387-4CA6-816F-3879F97B5CBC}" type="slidenum">
               <a:rPr lang="en-US"/>
-              <a:t>8</a:t>
+              <a:t>9</a:t>
             </a:fld>
             <a:endParaRPr lang="en-US"/>
           </a:p>
@@ -1341,7 +1341,7 @@
           <a:p>
             <a:r>
               <a:rPr lang="en-US" dirty="0"/>
-              <a:t>30 questions covering all realistic cases. RAGAS metrics objectively measure quality. Mention the rate limit constraint on the free Mistral tier.</a:t>
+              <a:t>Highlight the date parsing bug discovery (milliseconds vs ISO). This bug would have silently corrupted the date filter in production. The tests caught it.</a:t>
             </a:r>
           </a:p>
         </p:txBody>
@@ -1363,7 +1363,7 @@
           <a:p>
             <a:fld id="{F7021451-1387-4CA6-816F-3879F97B5CBC}" type="slidenum">
               <a:rPr lang="en-US"/>
-              <a:t>9</a:t>
+              <a:t>10</a:t>
             </a:fld>
             <a:endParaRPr lang="en-US"/>
           </a:p>
@@ -2078,6 +2078,2445 @@
 
 <file path=ppt/slides/slide10.xml><?xml version="1.0" encoding="utf-8"?>
 <p:sld xmlns:a="http://schemas.openxmlformats.org/drawingml/2006/main" xmlns:r="http://schemas.openxmlformats.org/officeDocument/2006/relationships" xmlns:p="http://schemas.openxmlformats.org/presentationml/2006/main">
+  <p:cSld name="Slide 9">
+    <p:bg>
+      <p:bgPr>
+        <a:solidFill>
+          <a:srgbClr val="FFFFFF"/>
+        </a:solidFill>
+        <a:effectLst/>
+      </p:bgPr>
+    </p:bg>
+    <p:spTree>
+      <p:nvGrpSpPr>
+        <p:cNvPr id="1" name=""/>
+        <p:cNvGrpSpPr/>
+        <p:nvPr/>
+      </p:nvGrpSpPr>
+      <p:grpSpPr>
+        <a:xfrm>
+          <a:off x="0" y="0"/>
+          <a:ext cx="0" cy="0"/>
+          <a:chOff x="0" y="0"/>
+          <a:chExt cx="0" cy="0"/>
+        </a:xfrm>
+      </p:grpSpPr>
+      <p:sp>
+        <p:nvSpPr>
+          <p:cNvPr id="2" name="Shape 0"/>
+          <p:cNvSpPr/>
+          <p:nvPr/>
+        </p:nvSpPr>
+        <p:spPr>
+          <a:xfrm>
+            <a:off x="0" y="0"/>
+            <a:ext cx="9144000" cy="914400"/>
+          </a:xfrm>
+          <a:prstGeom prst="rect">
+            <a:avLst/>
+          </a:prstGeom>
+          <a:solidFill>
+            <a:srgbClr val="1F4E79"/>
+          </a:solidFill>
+          <a:ln/>
+        </p:spPr>
+      </p:sp>
+      <p:sp>
+        <p:nvSpPr>
+          <p:cNvPr id="3" name="Text 1"/>
+          <p:cNvSpPr/>
+          <p:nvPr/>
+        </p:nvSpPr>
+        <p:spPr>
+          <a:xfrm>
+            <a:off x="365760" y="0"/>
+            <a:ext cx="8412480" cy="914400"/>
+          </a:xfrm>
+          <a:prstGeom prst="rect">
+            <a:avLst/>
+          </a:prstGeom>
+          <a:noFill/>
+          <a:ln/>
+        </p:spPr>
+        <p:txBody>
+          <a:bodyPr wrap="square" rtlCol="0" anchor="ctr"/>
+          <a:lstStyle/>
+          <a:p>
+            <a:pPr marL="0" indent="0">
+              <a:buNone/>
+            </a:pPr>
+            <a:r>
+              <a:rPr lang="en-US" sz="2200" b="1" dirty="0">
+                <a:solidFill>
+                  <a:srgbClr val="FFFFFF"/>
+                </a:solidFill>
+              </a:rPr>
+              <a:t>UNIT TESTS  |  25 / 25 PASSED</a:t>
+            </a:r>
+            <a:endParaRPr lang="en-US" sz="2200" dirty="0"/>
+          </a:p>
+        </p:txBody>
+      </p:sp>
+      <p:sp>
+        <p:nvSpPr>
+          <p:cNvPr id="4" name="Shape 2"/>
+          <p:cNvSpPr/>
+          <p:nvPr/>
+        </p:nvSpPr>
+        <p:spPr>
+          <a:xfrm>
+            <a:off x="274320" y="1051560"/>
+            <a:ext cx="8595360" cy="685800"/>
+          </a:xfrm>
+          <a:prstGeom prst="roundRect">
+            <a:avLst>
+              <a:gd name="adj" fmla="val 10667"/>
+            </a:avLst>
+          </a:prstGeom>
+          <a:solidFill>
+            <a:srgbClr val="F2F6FA"/>
+          </a:solidFill>
+          <a:ln/>
+        </p:spPr>
+      </p:sp>
+      <p:sp>
+        <p:nvSpPr>
+          <p:cNvPr id="5" name="Shape 3"/>
+          <p:cNvSpPr/>
+          <p:nvPr/>
+        </p:nvSpPr>
+        <p:spPr>
+          <a:xfrm>
+            <a:off x="384048" y="1143000"/>
+            <a:ext cx="457200" cy="502920"/>
+          </a:xfrm>
+          <a:prstGeom prst="roundRect">
+            <a:avLst>
+              <a:gd name="adj" fmla="val 12000"/>
+            </a:avLst>
+          </a:prstGeom>
+          <a:solidFill>
+            <a:srgbClr val="1F4E79"/>
+          </a:solidFill>
+          <a:ln/>
+        </p:spPr>
+      </p:sp>
+      <p:sp>
+        <p:nvSpPr>
+          <p:cNvPr id="6" name="Text 4"/>
+          <p:cNvSpPr/>
+          <p:nvPr/>
+        </p:nvSpPr>
+        <p:spPr>
+          <a:xfrm>
+            <a:off x="384048" y="1143000"/>
+            <a:ext cx="457200" cy="502920"/>
+          </a:xfrm>
+          <a:prstGeom prst="rect">
+            <a:avLst/>
+          </a:prstGeom>
+          <a:noFill/>
+          <a:ln/>
+        </p:spPr>
+        <p:txBody>
+          <a:bodyPr wrap="square" lIns="0" tIns="0" rIns="0" bIns="0" rtlCol="0" anchor="ctr"/>
+          <a:lstStyle/>
+          <a:p>
+            <a:pPr marL="0" indent="0" algn="ctr">
+              <a:buNone/>
+            </a:pPr>
+            <a:r>
+              <a:rPr lang="en-US" sz="1400" b="1" dirty="0">
+                <a:solidFill>
+                  <a:srgbClr val="FFFFFF"/>
+                </a:solidFill>
+              </a:rPr>
+              <a:t>6</a:t>
+            </a:r>
+            <a:endParaRPr lang="en-US" sz="1400" dirty="0"/>
+          </a:p>
+        </p:txBody>
+      </p:sp>
+      <p:sp>
+        <p:nvSpPr>
+          <p:cNvPr id="7" name="Text 5"/>
+          <p:cNvSpPr/>
+          <p:nvPr/>
+        </p:nvSpPr>
+        <p:spPr>
+          <a:xfrm>
+            <a:off x="932688" y="1124712"/>
+            <a:ext cx="2743200" cy="320040"/>
+          </a:xfrm>
+          <a:prstGeom prst="rect">
+            <a:avLst/>
+          </a:prstGeom>
+          <a:noFill/>
+          <a:ln/>
+        </p:spPr>
+        <p:txBody>
+          <a:bodyPr wrap="square" rtlCol="0" anchor="ctr"/>
+          <a:lstStyle/>
+          <a:p>
+            <a:pPr marL="0" indent="0">
+              <a:buNone/>
+            </a:pPr>
+            <a:r>
+              <a:rPr lang="en-US" sz="1200" b="1" dirty="0">
+                <a:solidFill>
+                  <a:srgbClr val="1F4E79"/>
+                </a:solidFill>
+              </a:rPr>
+              <a:t>TestRawData</a:t>
+            </a:r>
+            <a:endParaRPr lang="en-US" sz="1200" dirty="0"/>
+          </a:p>
+        </p:txBody>
+      </p:sp>
+      <p:sp>
+        <p:nvSpPr>
+          <p:cNvPr id="8" name="Text 6"/>
+          <p:cNvSpPr/>
+          <p:nvPr/>
+        </p:nvSpPr>
+        <p:spPr>
+          <a:xfrm>
+            <a:off x="932688" y="1435608"/>
+            <a:ext cx="7315200" cy="256032"/>
+          </a:xfrm>
+          <a:prstGeom prst="rect">
+            <a:avLst/>
+          </a:prstGeom>
+          <a:noFill/>
+          <a:ln/>
+        </p:spPr>
+        <p:txBody>
+          <a:bodyPr wrap="square" rtlCol="0" anchor="ctr"/>
+          <a:lstStyle/>
+          <a:p>
+            <a:pPr marL="0" indent="0">
+              <a:buNone/>
+            </a:pPr>
+            <a:r>
+              <a:rPr lang="en-US" sz="1000" dirty="0">
+                <a:solidFill>
+                  <a:srgbClr val="5D6D7E"/>
+                </a:solidFill>
+              </a:rPr>
+              <a:t>File present, not empty, titles and descriptions non-null, dates present</a:t>
+            </a:r>
+            <a:endParaRPr lang="en-US" sz="1000" dirty="0"/>
+          </a:p>
+        </p:txBody>
+      </p:sp>
+      <p:sp>
+        <p:nvSpPr>
+          <p:cNvPr id="9" name="Text 7"/>
+          <p:cNvSpPr/>
+          <p:nvPr/>
+        </p:nvSpPr>
+        <p:spPr>
+          <a:xfrm>
+            <a:off x="8046720" y="1216152"/>
+            <a:ext cx="777240" cy="320040"/>
+          </a:xfrm>
+          <a:prstGeom prst="rect">
+            <a:avLst/>
+          </a:prstGeom>
+          <a:solidFill>
+            <a:srgbClr val="028090"/>
+          </a:solidFill>
+          <a:ln/>
+        </p:spPr>
+        <p:txBody>
+          <a:bodyPr wrap="square" lIns="38100" tIns="38100" rIns="38100" bIns="38100" rtlCol="0" anchor="ctr"/>
+          <a:lstStyle/>
+          <a:p>
+            <a:pPr marL="0" indent="0" algn="ctr">
+              <a:buNone/>
+            </a:pPr>
+            <a:r>
+              <a:rPr lang="en-US" sz="1000" b="1" dirty="0">
+                <a:solidFill>
+                  <a:srgbClr val="FFFFFF"/>
+                </a:solidFill>
+              </a:rPr>
+              <a:t>PASSED</a:t>
+            </a:r>
+            <a:endParaRPr lang="en-US" sz="1000" dirty="0"/>
+          </a:p>
+        </p:txBody>
+      </p:sp>
+      <p:sp>
+        <p:nvSpPr>
+          <p:cNvPr id="10" name="Shape 8"/>
+          <p:cNvSpPr/>
+          <p:nvPr/>
+        </p:nvSpPr>
+        <p:spPr>
+          <a:xfrm>
+            <a:off x="274320" y="1837944"/>
+            <a:ext cx="8595360" cy="685800"/>
+          </a:xfrm>
+          <a:prstGeom prst="roundRect">
+            <a:avLst>
+              <a:gd name="adj" fmla="val 10667"/>
+            </a:avLst>
+          </a:prstGeom>
+          <a:solidFill>
+            <a:srgbClr val="F2F6FA"/>
+          </a:solidFill>
+          <a:ln/>
+        </p:spPr>
+      </p:sp>
+      <p:sp>
+        <p:nvSpPr>
+          <p:cNvPr id="11" name="Shape 9"/>
+          <p:cNvSpPr/>
+          <p:nvPr/>
+        </p:nvSpPr>
+        <p:spPr>
+          <a:xfrm>
+            <a:off x="384048" y="1929384"/>
+            <a:ext cx="457200" cy="502920"/>
+          </a:xfrm>
+          <a:prstGeom prst="roundRect">
+            <a:avLst>
+              <a:gd name="adj" fmla="val 12000"/>
+            </a:avLst>
+          </a:prstGeom>
+          <a:solidFill>
+            <a:srgbClr val="2E75B6"/>
+          </a:solidFill>
+          <a:ln/>
+        </p:spPr>
+      </p:sp>
+      <p:sp>
+        <p:nvSpPr>
+          <p:cNvPr id="12" name="Text 10"/>
+          <p:cNvSpPr/>
+          <p:nvPr/>
+        </p:nvSpPr>
+        <p:spPr>
+          <a:xfrm>
+            <a:off x="384048" y="1929384"/>
+            <a:ext cx="457200" cy="502920"/>
+          </a:xfrm>
+          <a:prstGeom prst="rect">
+            <a:avLst/>
+          </a:prstGeom>
+          <a:noFill/>
+          <a:ln/>
+        </p:spPr>
+        <p:txBody>
+          <a:bodyPr wrap="square" lIns="0" tIns="0" rIns="0" bIns="0" rtlCol="0" anchor="ctr"/>
+          <a:lstStyle/>
+          <a:p>
+            <a:pPr marL="0" indent="0" algn="ctr">
+              <a:buNone/>
+            </a:pPr>
+            <a:r>
+              <a:rPr lang="en-US" sz="1400" b="1" dirty="0">
+                <a:solidFill>
+                  <a:srgbClr val="FFFFFF"/>
+                </a:solidFill>
+              </a:rPr>
+              <a:t>3</a:t>
+            </a:r>
+            <a:endParaRPr lang="en-US" sz="1400" dirty="0"/>
+          </a:p>
+        </p:txBody>
+      </p:sp>
+      <p:sp>
+        <p:nvSpPr>
+          <p:cNvPr id="13" name="Text 11"/>
+          <p:cNvSpPr/>
+          <p:nvPr/>
+        </p:nvSpPr>
+        <p:spPr>
+          <a:xfrm>
+            <a:off x="932688" y="1911096"/>
+            <a:ext cx="2743200" cy="320040"/>
+          </a:xfrm>
+          <a:prstGeom prst="rect">
+            <a:avLst/>
+          </a:prstGeom>
+          <a:noFill/>
+          <a:ln/>
+        </p:spPr>
+        <p:txBody>
+          <a:bodyPr wrap="square" rtlCol="0" anchor="ctr"/>
+          <a:lstStyle/>
+          <a:p>
+            <a:pPr marL="0" indent="0">
+              <a:buNone/>
+            </a:pPr>
+            <a:r>
+              <a:rPr lang="en-US" sz="1200" b="1" dirty="0">
+                <a:solidFill>
+                  <a:srgbClr val="1F4E79"/>
+                </a:solidFill>
+              </a:rPr>
+              <a:t>TestDateFilter</a:t>
+            </a:r>
+            <a:endParaRPr lang="en-US" sz="1200" dirty="0"/>
+          </a:p>
+        </p:txBody>
+      </p:sp>
+      <p:sp>
+        <p:nvSpPr>
+          <p:cNvPr id="14" name="Text 12"/>
+          <p:cNvSpPr/>
+          <p:nvPr/>
+        </p:nvSpPr>
+        <p:spPr>
+          <a:xfrm>
+            <a:off x="932688" y="2221992"/>
+            <a:ext cx="7315200" cy="256032"/>
+          </a:xfrm>
+          <a:prstGeom prst="rect">
+            <a:avLst/>
+          </a:prstGeom>
+          <a:noFill/>
+          <a:ln/>
+        </p:spPr>
+        <p:txBody>
+          <a:bodyPr wrap="square" rtlCol="0" anchor="ctr"/>
+          <a:lstStyle/>
+          <a:p>
+            <a:pPr marL="0" indent="0">
+              <a:buNone/>
+            </a:pPr>
+            <a:r>
+              <a:rPr lang="en-US" sz="1000" dirty="0">
+                <a:solidFill>
+                  <a:srgbClr val="5D6D7E"/>
+                </a:solidFill>
+              </a:rPr>
+              <a:t>All events within 12 months, none more than 2 years in future, date range &gt; 30 days</a:t>
+            </a:r>
+            <a:endParaRPr lang="en-US" sz="1000" dirty="0"/>
+          </a:p>
+        </p:txBody>
+      </p:sp>
+      <p:sp>
+        <p:nvSpPr>
+          <p:cNvPr id="15" name="Text 13"/>
+          <p:cNvSpPr/>
+          <p:nvPr/>
+        </p:nvSpPr>
+        <p:spPr>
+          <a:xfrm>
+            <a:off x="8046720" y="2002536"/>
+            <a:ext cx="777240" cy="320040"/>
+          </a:xfrm>
+          <a:prstGeom prst="rect">
+            <a:avLst/>
+          </a:prstGeom>
+          <a:solidFill>
+            <a:srgbClr val="028090"/>
+          </a:solidFill>
+          <a:ln/>
+        </p:spPr>
+        <p:txBody>
+          <a:bodyPr wrap="square" lIns="38100" tIns="38100" rIns="38100" bIns="38100" rtlCol="0" anchor="ctr"/>
+          <a:lstStyle/>
+          <a:p>
+            <a:pPr marL="0" indent="0" algn="ctr">
+              <a:buNone/>
+            </a:pPr>
+            <a:r>
+              <a:rPr lang="en-US" sz="1000" b="1" dirty="0">
+                <a:solidFill>
+                  <a:srgbClr val="FFFFFF"/>
+                </a:solidFill>
+              </a:rPr>
+              <a:t>PASSED</a:t>
+            </a:r>
+            <a:endParaRPr lang="en-US" sz="1000" dirty="0"/>
+          </a:p>
+        </p:txBody>
+      </p:sp>
+      <p:sp>
+        <p:nvSpPr>
+          <p:cNvPr id="16" name="Shape 14"/>
+          <p:cNvSpPr/>
+          <p:nvPr/>
+        </p:nvSpPr>
+        <p:spPr>
+          <a:xfrm>
+            <a:off x="274320" y="2624328"/>
+            <a:ext cx="8595360" cy="685800"/>
+          </a:xfrm>
+          <a:prstGeom prst="roundRect">
+            <a:avLst>
+              <a:gd name="adj" fmla="val 10667"/>
+            </a:avLst>
+          </a:prstGeom>
+          <a:solidFill>
+            <a:srgbClr val="F2F6FA"/>
+          </a:solidFill>
+          <a:ln/>
+        </p:spPr>
+      </p:sp>
+      <p:sp>
+        <p:nvSpPr>
+          <p:cNvPr id="17" name="Shape 15"/>
+          <p:cNvSpPr/>
+          <p:nvPr/>
+        </p:nvSpPr>
+        <p:spPr>
+          <a:xfrm>
+            <a:off x="384048" y="2715768"/>
+            <a:ext cx="457200" cy="502920"/>
+          </a:xfrm>
+          <a:prstGeom prst="roundRect">
+            <a:avLst>
+              <a:gd name="adj" fmla="val 12000"/>
+            </a:avLst>
+          </a:prstGeom>
+          <a:solidFill>
+            <a:srgbClr val="028090"/>
+          </a:solidFill>
+          <a:ln/>
+        </p:spPr>
+      </p:sp>
+      <p:sp>
+        <p:nvSpPr>
+          <p:cNvPr id="18" name="Text 16"/>
+          <p:cNvSpPr/>
+          <p:nvPr/>
+        </p:nvSpPr>
+        <p:spPr>
+          <a:xfrm>
+            <a:off x="384048" y="2715768"/>
+            <a:ext cx="457200" cy="502920"/>
+          </a:xfrm>
+          <a:prstGeom prst="rect">
+            <a:avLst/>
+          </a:prstGeom>
+          <a:noFill/>
+          <a:ln/>
+        </p:spPr>
+        <p:txBody>
+          <a:bodyPr wrap="square" lIns="0" tIns="0" rIns="0" bIns="0" rtlCol="0" anchor="ctr"/>
+          <a:lstStyle/>
+          <a:p>
+            <a:pPr marL="0" indent="0" algn="ctr">
+              <a:buNone/>
+            </a:pPr>
+            <a:r>
+              <a:rPr lang="en-US" sz="1400" b="1" dirty="0">
+                <a:solidFill>
+                  <a:srgbClr val="FFFFFF"/>
+                </a:solidFill>
+              </a:rPr>
+              <a:t>3</a:t>
+            </a:r>
+            <a:endParaRPr lang="en-US" sz="1400" dirty="0"/>
+          </a:p>
+        </p:txBody>
+      </p:sp>
+      <p:sp>
+        <p:nvSpPr>
+          <p:cNvPr id="19" name="Text 17"/>
+          <p:cNvSpPr/>
+          <p:nvPr/>
+        </p:nvSpPr>
+        <p:spPr>
+          <a:xfrm>
+            <a:off x="932688" y="2697480"/>
+            <a:ext cx="2743200" cy="320040"/>
+          </a:xfrm>
+          <a:prstGeom prst="rect">
+            <a:avLst/>
+          </a:prstGeom>
+          <a:noFill/>
+          <a:ln/>
+        </p:spPr>
+        <p:txBody>
+          <a:bodyPr wrap="square" rtlCol="0" anchor="ctr"/>
+          <a:lstStyle/>
+          <a:p>
+            <a:pPr marL="0" indent="0">
+              <a:buNone/>
+            </a:pPr>
+            <a:r>
+              <a:rPr lang="en-US" sz="1200" b="1" dirty="0">
+                <a:solidFill>
+                  <a:srgbClr val="1F4E79"/>
+                </a:solidFill>
+              </a:rPr>
+              <a:t>TestLocationFilter</a:t>
+            </a:r>
+            <a:endParaRPr lang="en-US" sz="1200" dirty="0"/>
+          </a:p>
+        </p:txBody>
+      </p:sp>
+      <p:sp>
+        <p:nvSpPr>
+          <p:cNvPr id="20" name="Text 18"/>
+          <p:cNvSpPr/>
+          <p:nvPr/>
+        </p:nvSpPr>
+        <p:spPr>
+          <a:xfrm>
+            <a:off x="932688" y="3008376"/>
+            <a:ext cx="7315200" cy="256032"/>
+          </a:xfrm>
+          <a:prstGeom prst="rect">
+            <a:avLst/>
+          </a:prstGeom>
+          <a:noFill/>
+          <a:ln/>
+        </p:spPr>
+        <p:txBody>
+          <a:bodyPr wrap="square" rtlCol="0" anchor="ctr"/>
+          <a:lstStyle/>
+          <a:p>
+            <a:pPr marL="0" indent="0">
+              <a:buNone/>
+            </a:pPr>
+            <a:r>
+              <a:rPr lang="en-US" sz="1000" dirty="0">
+                <a:solidFill>
+                  <a:srgbClr val="5D6D7E"/>
+                </a:solidFill>
+              </a:rPr>
+              <a:t>Over 90% of events in Paris, city field non-null, no residual postal codes</a:t>
+            </a:r>
+            <a:endParaRPr lang="en-US" sz="1000" dirty="0"/>
+          </a:p>
+        </p:txBody>
+      </p:sp>
+      <p:sp>
+        <p:nvSpPr>
+          <p:cNvPr id="21" name="Text 19"/>
+          <p:cNvSpPr/>
+          <p:nvPr/>
+        </p:nvSpPr>
+        <p:spPr>
+          <a:xfrm>
+            <a:off x="8046720" y="2788920"/>
+            <a:ext cx="777240" cy="320040"/>
+          </a:xfrm>
+          <a:prstGeom prst="rect">
+            <a:avLst/>
+          </a:prstGeom>
+          <a:solidFill>
+            <a:srgbClr val="028090"/>
+          </a:solidFill>
+          <a:ln/>
+        </p:spPr>
+        <p:txBody>
+          <a:bodyPr wrap="square" lIns="38100" tIns="38100" rIns="38100" bIns="38100" rtlCol="0" anchor="ctr"/>
+          <a:lstStyle/>
+          <a:p>
+            <a:pPr marL="0" indent="0" algn="ctr">
+              <a:buNone/>
+            </a:pPr>
+            <a:r>
+              <a:rPr lang="en-US" sz="1000" b="1" dirty="0">
+                <a:solidFill>
+                  <a:srgbClr val="FFFFFF"/>
+                </a:solidFill>
+              </a:rPr>
+              <a:t>PASSED</a:t>
+            </a:r>
+            <a:endParaRPr lang="en-US" sz="1000" dirty="0"/>
+          </a:p>
+        </p:txBody>
+      </p:sp>
+      <p:sp>
+        <p:nvSpPr>
+          <p:cNvPr id="22" name="Shape 20"/>
+          <p:cNvSpPr/>
+          <p:nvPr/>
+        </p:nvSpPr>
+        <p:spPr>
+          <a:xfrm>
+            <a:off x="274320" y="3410712"/>
+            <a:ext cx="8595360" cy="685800"/>
+          </a:xfrm>
+          <a:prstGeom prst="roundRect">
+            <a:avLst>
+              <a:gd name="adj" fmla="val 10667"/>
+            </a:avLst>
+          </a:prstGeom>
+          <a:solidFill>
+            <a:srgbClr val="F2F6FA"/>
+          </a:solidFill>
+          <a:ln/>
+        </p:spPr>
+      </p:sp>
+      <p:sp>
+        <p:nvSpPr>
+          <p:cNvPr id="23" name="Shape 21"/>
+          <p:cNvSpPr/>
+          <p:nvPr/>
+        </p:nvSpPr>
+        <p:spPr>
+          <a:xfrm>
+            <a:off x="384048" y="3502152"/>
+            <a:ext cx="457200" cy="502920"/>
+          </a:xfrm>
+          <a:prstGeom prst="roundRect">
+            <a:avLst>
+              <a:gd name="adj" fmla="val 12000"/>
+            </a:avLst>
+          </a:prstGeom>
+          <a:solidFill>
+            <a:srgbClr val="1F4E79"/>
+          </a:solidFill>
+          <a:ln/>
+        </p:spPr>
+      </p:sp>
+      <p:sp>
+        <p:nvSpPr>
+          <p:cNvPr id="24" name="Text 22"/>
+          <p:cNvSpPr/>
+          <p:nvPr/>
+        </p:nvSpPr>
+        <p:spPr>
+          <a:xfrm>
+            <a:off x="384048" y="3502152"/>
+            <a:ext cx="457200" cy="502920"/>
+          </a:xfrm>
+          <a:prstGeom prst="rect">
+            <a:avLst/>
+          </a:prstGeom>
+          <a:noFill/>
+          <a:ln/>
+        </p:spPr>
+        <p:txBody>
+          <a:bodyPr wrap="square" lIns="0" tIns="0" rIns="0" bIns="0" rtlCol="0" anchor="ctr"/>
+          <a:lstStyle/>
+          <a:p>
+            <a:pPr marL="0" indent="0" algn="ctr">
+              <a:buNone/>
+            </a:pPr>
+            <a:r>
+              <a:rPr lang="en-US" sz="1400" b="1" dirty="0">
+                <a:solidFill>
+                  <a:srgbClr val="FFFFFF"/>
+                </a:solidFill>
+              </a:rPr>
+              <a:t>10</a:t>
+            </a:r>
+            <a:endParaRPr lang="en-US" sz="1400" dirty="0"/>
+          </a:p>
+        </p:txBody>
+      </p:sp>
+      <p:sp>
+        <p:nvSpPr>
+          <p:cNvPr id="25" name="Text 23"/>
+          <p:cNvSpPr/>
+          <p:nvPr/>
+        </p:nvSpPr>
+        <p:spPr>
+          <a:xfrm>
+            <a:off x="932688" y="3483864"/>
+            <a:ext cx="2743200" cy="320040"/>
+          </a:xfrm>
+          <a:prstGeom prst="rect">
+            <a:avLst/>
+          </a:prstGeom>
+          <a:noFill/>
+          <a:ln/>
+        </p:spPr>
+        <p:txBody>
+          <a:bodyPr wrap="square" rtlCol="0" anchor="ctr"/>
+          <a:lstStyle/>
+          <a:p>
+            <a:pPr marL="0" indent="0">
+              <a:buNone/>
+            </a:pPr>
+            <a:r>
+              <a:rPr lang="en-US" sz="1200" b="1" dirty="0">
+                <a:solidFill>
+                  <a:srgbClr val="1F4E79"/>
+                </a:solidFill>
+              </a:rPr>
+              <a:t>TestVectorDatabase</a:t>
+            </a:r>
+            <a:endParaRPr lang="en-US" sz="1200" dirty="0"/>
+          </a:p>
+        </p:txBody>
+      </p:sp>
+      <p:sp>
+        <p:nvSpPr>
+          <p:cNvPr id="26" name="Text 24"/>
+          <p:cNvSpPr/>
+          <p:nvPr/>
+        </p:nvSpPr>
+        <p:spPr>
+          <a:xfrm>
+            <a:off x="932688" y="3794760"/>
+            <a:ext cx="7315200" cy="256032"/>
+          </a:xfrm>
+          <a:prstGeom prst="rect">
+            <a:avLst/>
+          </a:prstGeom>
+          <a:noFill/>
+          <a:ln/>
+        </p:spPr>
+        <p:txBody>
+          <a:bodyPr wrap="square" rtlCol="0" anchor="ctr"/>
+          <a:lstStyle/>
+          <a:p>
+            <a:pPr marL="0" indent="0">
+              <a:buNone/>
+            </a:pPr>
+            <a:r>
+              <a:rPr lang="en-US" sz="1000" dirty="0">
+                <a:solidFill>
+                  <a:srgbClr val="5D6D7E"/>
+                </a:solidFill>
+              </a:rPr>
+              <a:t>Dimension 1,024, non-empty index, index/metadata sync, float32 dtype, valid search</a:t>
+            </a:r>
+            <a:endParaRPr lang="en-US" sz="1000" dirty="0"/>
+          </a:p>
+        </p:txBody>
+      </p:sp>
+      <p:sp>
+        <p:nvSpPr>
+          <p:cNvPr id="27" name="Text 25"/>
+          <p:cNvSpPr/>
+          <p:nvPr/>
+        </p:nvSpPr>
+        <p:spPr>
+          <a:xfrm>
+            <a:off x="8046720" y="3575304"/>
+            <a:ext cx="777240" cy="320040"/>
+          </a:xfrm>
+          <a:prstGeom prst="rect">
+            <a:avLst/>
+          </a:prstGeom>
+          <a:solidFill>
+            <a:srgbClr val="028090"/>
+          </a:solidFill>
+          <a:ln/>
+        </p:spPr>
+        <p:txBody>
+          <a:bodyPr wrap="square" lIns="38100" tIns="38100" rIns="38100" bIns="38100" rtlCol="0" anchor="ctr"/>
+          <a:lstStyle/>
+          <a:p>
+            <a:pPr marL="0" indent="0" algn="ctr">
+              <a:buNone/>
+            </a:pPr>
+            <a:r>
+              <a:rPr lang="en-US" sz="1000" b="1" dirty="0">
+                <a:solidFill>
+                  <a:srgbClr val="FFFFFF"/>
+                </a:solidFill>
+              </a:rPr>
+              <a:t>PASSED</a:t>
+            </a:r>
+            <a:endParaRPr lang="en-US" sz="1000" dirty="0"/>
+          </a:p>
+        </p:txBody>
+      </p:sp>
+      <p:sp>
+        <p:nvSpPr>
+          <p:cNvPr id="28" name="Shape 26"/>
+          <p:cNvSpPr/>
+          <p:nvPr/>
+        </p:nvSpPr>
+        <p:spPr>
+          <a:xfrm>
+            <a:off x="274320" y="4197096"/>
+            <a:ext cx="8595360" cy="685800"/>
+          </a:xfrm>
+          <a:prstGeom prst="roundRect">
+            <a:avLst>
+              <a:gd name="adj" fmla="val 10667"/>
+            </a:avLst>
+          </a:prstGeom>
+          <a:solidFill>
+            <a:srgbClr val="F2F6FA"/>
+          </a:solidFill>
+          <a:ln/>
+        </p:spPr>
+      </p:sp>
+      <p:sp>
+        <p:nvSpPr>
+          <p:cNvPr id="29" name="Shape 27"/>
+          <p:cNvSpPr/>
+          <p:nvPr/>
+        </p:nvSpPr>
+        <p:spPr>
+          <a:xfrm>
+            <a:off x="384048" y="4288536"/>
+            <a:ext cx="457200" cy="502920"/>
+          </a:xfrm>
+          <a:prstGeom prst="roundRect">
+            <a:avLst>
+              <a:gd name="adj" fmla="val 12000"/>
+            </a:avLst>
+          </a:prstGeom>
+          <a:solidFill>
+            <a:srgbClr val="2E75B6"/>
+          </a:solidFill>
+          <a:ln/>
+        </p:spPr>
+      </p:sp>
+      <p:sp>
+        <p:nvSpPr>
+          <p:cNvPr id="30" name="Text 28"/>
+          <p:cNvSpPr/>
+          <p:nvPr/>
+        </p:nvSpPr>
+        <p:spPr>
+          <a:xfrm>
+            <a:off x="384048" y="4288536"/>
+            <a:ext cx="457200" cy="502920"/>
+          </a:xfrm>
+          <a:prstGeom prst="rect">
+            <a:avLst/>
+          </a:prstGeom>
+          <a:noFill/>
+          <a:ln/>
+        </p:spPr>
+        <p:txBody>
+          <a:bodyPr wrap="square" lIns="0" tIns="0" rIns="0" bIns="0" rtlCol="0" anchor="ctr"/>
+          <a:lstStyle/>
+          <a:p>
+            <a:pPr marL="0" indent="0" algn="ctr">
+              <a:buNone/>
+            </a:pPr>
+            <a:r>
+              <a:rPr lang="en-US" sz="1400" b="1" dirty="0">
+                <a:solidFill>
+                  <a:srgbClr val="FFFFFF"/>
+                </a:solidFill>
+              </a:rPr>
+              <a:t>3</a:t>
+            </a:r>
+            <a:endParaRPr lang="en-US" sz="1400" dirty="0"/>
+          </a:p>
+        </p:txBody>
+      </p:sp>
+      <p:sp>
+        <p:nvSpPr>
+          <p:cNvPr id="31" name="Text 29"/>
+          <p:cNvSpPr/>
+          <p:nvPr/>
+        </p:nvSpPr>
+        <p:spPr>
+          <a:xfrm>
+            <a:off x="932688" y="4270248"/>
+            <a:ext cx="2743200" cy="320040"/>
+          </a:xfrm>
+          <a:prstGeom prst="rect">
+            <a:avLst/>
+          </a:prstGeom>
+          <a:noFill/>
+          <a:ln/>
+        </p:spPr>
+        <p:txBody>
+          <a:bodyPr wrap="square" rtlCol="0" anchor="ctr"/>
+          <a:lstStyle/>
+          <a:p>
+            <a:pPr marL="0" indent="0">
+              <a:buNone/>
+            </a:pPr>
+            <a:r>
+              <a:rPr lang="en-US" sz="1200" b="1" dirty="0">
+                <a:solidFill>
+                  <a:srgbClr val="1F4E79"/>
+                </a:solidFill>
+              </a:rPr>
+              <a:t>TestChunkQuality</a:t>
+            </a:r>
+            <a:endParaRPr lang="en-US" sz="1200" dirty="0"/>
+          </a:p>
+        </p:txBody>
+      </p:sp>
+      <p:sp>
+        <p:nvSpPr>
+          <p:cNvPr id="32" name="Text 30"/>
+          <p:cNvSpPr/>
+          <p:nvPr/>
+        </p:nvSpPr>
+        <p:spPr>
+          <a:xfrm>
+            <a:off x="932688" y="4581144"/>
+            <a:ext cx="7315200" cy="256032"/>
+          </a:xfrm>
+          <a:prstGeom prst="rect">
+            <a:avLst/>
+          </a:prstGeom>
+          <a:noFill/>
+          <a:ln/>
+        </p:spPr>
+        <p:txBody>
+          <a:bodyPr wrap="square" rtlCol="0" anchor="ctr"/>
+          <a:lstStyle/>
+          <a:p>
+            <a:pPr marL="0" indent="0">
+              <a:buNone/>
+            </a:pPr>
+            <a:r>
+              <a:rPr lang="en-US" sz="1000" dirty="0">
+                <a:solidFill>
+                  <a:srgbClr val="5D6D7E"/>
+                </a:solidFill>
+              </a:rPr>
+              <a:t>Non-empty chunk text, event marker present, URL non-empty</a:t>
+            </a:r>
+            <a:endParaRPr lang="en-US" sz="1000" dirty="0"/>
+          </a:p>
+        </p:txBody>
+      </p:sp>
+      <p:sp>
+        <p:nvSpPr>
+          <p:cNvPr id="33" name="Text 31"/>
+          <p:cNvSpPr/>
+          <p:nvPr/>
+        </p:nvSpPr>
+        <p:spPr>
+          <a:xfrm>
+            <a:off x="8046720" y="4361688"/>
+            <a:ext cx="777240" cy="320040"/>
+          </a:xfrm>
+          <a:prstGeom prst="rect">
+            <a:avLst/>
+          </a:prstGeom>
+          <a:solidFill>
+            <a:srgbClr val="028090"/>
+          </a:solidFill>
+          <a:ln/>
+        </p:spPr>
+        <p:txBody>
+          <a:bodyPr wrap="square" lIns="38100" tIns="38100" rIns="38100" bIns="38100" rtlCol="0" anchor="ctr"/>
+          <a:lstStyle/>
+          <a:p>
+            <a:pPr marL="0" indent="0" algn="ctr">
+              <a:buNone/>
+            </a:pPr>
+            <a:r>
+              <a:rPr lang="en-US" sz="1000" b="1" dirty="0">
+                <a:solidFill>
+                  <a:srgbClr val="FFFFFF"/>
+                </a:solidFill>
+              </a:rPr>
+              <a:t>PASSED</a:t>
+            </a:r>
+            <a:endParaRPr lang="en-US" sz="1000" dirty="0"/>
+          </a:p>
+        </p:txBody>
+      </p:sp>
+    </p:spTree>
+  </p:cSld>
+  <p:clrMapOvr>
+    <a:masterClrMapping/>
+  </p:clrMapOvr>
+</p:sld>
+</file>
+
+<file path=ppt/slides/slide11.xml><?xml version="1.0" encoding="utf-8"?>
+<p:sld xmlns:a="http://schemas.openxmlformats.org/drawingml/2006/main" xmlns:r="http://schemas.openxmlformats.org/officeDocument/2006/relationships" xmlns:p="http://schemas.openxmlformats.org/presentationml/2006/main">
+  <p:cSld name="Slide 10">
+    <p:bg>
+      <p:bgPr>
+        <a:solidFill>
+          <a:srgbClr val="FFFFFF"/>
+        </a:solidFill>
+        <a:effectLst/>
+      </p:bgPr>
+    </p:bg>
+    <p:spTree>
+      <p:nvGrpSpPr>
+        <p:cNvPr id="1" name=""/>
+        <p:cNvGrpSpPr/>
+        <p:nvPr/>
+      </p:nvGrpSpPr>
+      <p:grpSpPr>
+        <a:xfrm>
+          <a:off x="0" y="0"/>
+          <a:ext cx="0" cy="0"/>
+          <a:chOff x="0" y="0"/>
+          <a:chExt cx="0" cy="0"/>
+        </a:xfrm>
+      </p:grpSpPr>
+      <p:sp>
+        <p:nvSpPr>
+          <p:cNvPr id="2" name="Shape 0"/>
+          <p:cNvSpPr/>
+          <p:nvPr/>
+        </p:nvSpPr>
+        <p:spPr>
+          <a:xfrm>
+            <a:off x="0" y="0"/>
+            <a:ext cx="9144000" cy="914400"/>
+          </a:xfrm>
+          <a:prstGeom prst="rect">
+            <a:avLst/>
+          </a:prstGeom>
+          <a:solidFill>
+            <a:srgbClr val="1F4E79"/>
+          </a:solidFill>
+          <a:ln/>
+        </p:spPr>
+      </p:sp>
+      <p:sp>
+        <p:nvSpPr>
+          <p:cNvPr id="3" name="Text 1"/>
+          <p:cNvSpPr/>
+          <p:nvPr/>
+        </p:nvSpPr>
+        <p:spPr>
+          <a:xfrm>
+            <a:off x="365760" y="0"/>
+            <a:ext cx="8412480" cy="914400"/>
+          </a:xfrm>
+          <a:prstGeom prst="rect">
+            <a:avLst/>
+          </a:prstGeom>
+          <a:noFill/>
+          <a:ln/>
+        </p:spPr>
+        <p:txBody>
+          <a:bodyPr wrap="square" rtlCol="0" anchor="ctr"/>
+          <a:lstStyle/>
+          <a:p>
+            <a:pPr marL="0" indent="0">
+              <a:buNone/>
+            </a:pPr>
+            <a:r>
+              <a:rPr lang="en-US" sz="2200" b="1" dirty="0">
+                <a:solidFill>
+                  <a:srgbClr val="FFFFFF"/>
+                </a:solidFill>
+              </a:rPr>
+              <a:t>EVALUATION  |  ANNOTATED TEST DATASET</a:t>
+            </a:r>
+            <a:endParaRPr lang="en-US" sz="2200" dirty="0"/>
+          </a:p>
+        </p:txBody>
+      </p:sp>
+      <p:sp>
+        <p:nvSpPr>
+          <p:cNvPr id="4" name="Shape 2"/>
+          <p:cNvSpPr/>
+          <p:nvPr/>
+        </p:nvSpPr>
+        <p:spPr>
+          <a:xfrm>
+            <a:off x="274320" y="1051560"/>
+            <a:ext cx="2697480" cy="914400"/>
+          </a:xfrm>
+          <a:prstGeom prst="roundRect">
+            <a:avLst>
+              <a:gd name="adj" fmla="val 10000"/>
+            </a:avLst>
+          </a:prstGeom>
+          <a:solidFill>
+            <a:srgbClr val="F2F6FA"/>
+          </a:solidFill>
+          <a:ln/>
+          <a:effectLst>
+            <a:outerShdw blurRad="101600" dist="38100" dir="2700000" algn="bl" rotWithShape="0">
+              <a:srgbClr val="000000">
+                <a:alpha val="12000"/>
+              </a:srgbClr>
+            </a:outerShdw>
+          </a:effectLst>
+        </p:spPr>
+      </p:sp>
+      <p:sp>
+        <p:nvSpPr>
+          <p:cNvPr id="5" name="Shape 3"/>
+          <p:cNvSpPr/>
+          <p:nvPr/>
+        </p:nvSpPr>
+        <p:spPr>
+          <a:xfrm>
+            <a:off x="384048" y="1216152"/>
+            <a:ext cx="548640" cy="548640"/>
+          </a:xfrm>
+          <a:prstGeom prst="ellipse">
+            <a:avLst/>
+          </a:prstGeom>
+          <a:solidFill>
+            <a:srgbClr val="1F4E79"/>
+          </a:solidFill>
+          <a:ln/>
+        </p:spPr>
+      </p:sp>
+      <p:sp>
+        <p:nvSpPr>
+          <p:cNvPr id="6" name="Text 4"/>
+          <p:cNvSpPr/>
+          <p:nvPr/>
+        </p:nvSpPr>
+        <p:spPr>
+          <a:xfrm>
+            <a:off x="384048" y="1216152"/>
+            <a:ext cx="548640" cy="548640"/>
+          </a:xfrm>
+          <a:prstGeom prst="rect">
+            <a:avLst/>
+          </a:prstGeom>
+          <a:noFill/>
+          <a:ln/>
+        </p:spPr>
+        <p:txBody>
+          <a:bodyPr wrap="square" lIns="0" tIns="0" rIns="0" bIns="0" rtlCol="0" anchor="ctr"/>
+          <a:lstStyle/>
+          <a:p>
+            <a:pPr marL="0" indent="0" algn="ctr">
+              <a:buNone/>
+            </a:pPr>
+            <a:r>
+              <a:rPr lang="en-US" sz="1800" b="1" dirty="0">
+                <a:solidFill>
+                  <a:srgbClr val="FFFFFF"/>
+                </a:solidFill>
+              </a:rPr>
+              <a:t>6</a:t>
+            </a:r>
+            <a:endParaRPr lang="en-US" sz="1800" dirty="0"/>
+          </a:p>
+        </p:txBody>
+      </p:sp>
+      <p:sp>
+        <p:nvSpPr>
+          <p:cNvPr id="7" name="Text 5"/>
+          <p:cNvSpPr/>
+          <p:nvPr/>
+        </p:nvSpPr>
+        <p:spPr>
+          <a:xfrm>
+            <a:off x="1024128" y="1280160"/>
+            <a:ext cx="1828800" cy="457200"/>
+          </a:xfrm>
+          <a:prstGeom prst="rect">
+            <a:avLst/>
+          </a:prstGeom>
+          <a:noFill/>
+          <a:ln/>
+        </p:spPr>
+        <p:txBody>
+          <a:bodyPr wrap="square" rtlCol="0" anchor="ctr"/>
+          <a:lstStyle/>
+          <a:p>
+            <a:pPr marL="0" indent="0">
+              <a:buNone/>
+            </a:pPr>
+            <a:r>
+              <a:rPr lang="en-US" sz="1100" dirty="0">
+                <a:solidFill>
+                  <a:srgbClr val="1F4E79"/>
+                </a:solidFill>
+              </a:rPr>
+              <a:t>Specific events</a:t>
+            </a:r>
+            <a:endParaRPr lang="en-US" sz="1100" dirty="0"/>
+          </a:p>
+        </p:txBody>
+      </p:sp>
+      <p:sp>
+        <p:nvSpPr>
+          <p:cNvPr id="8" name="Shape 6"/>
+          <p:cNvSpPr/>
+          <p:nvPr/>
+        </p:nvSpPr>
+        <p:spPr>
+          <a:xfrm>
+            <a:off x="3154680" y="1051560"/>
+            <a:ext cx="2697480" cy="914400"/>
+          </a:xfrm>
+          <a:prstGeom prst="roundRect">
+            <a:avLst>
+              <a:gd name="adj" fmla="val 10000"/>
+            </a:avLst>
+          </a:prstGeom>
+          <a:solidFill>
+            <a:srgbClr val="F2F6FA"/>
+          </a:solidFill>
+          <a:ln/>
+          <a:effectLst>
+            <a:outerShdw blurRad="101600" dist="38100" dir="2700000" algn="bl" rotWithShape="0">
+              <a:srgbClr val="000000">
+                <a:alpha val="12000"/>
+              </a:srgbClr>
+            </a:outerShdw>
+          </a:effectLst>
+        </p:spPr>
+      </p:sp>
+      <p:sp>
+        <p:nvSpPr>
+          <p:cNvPr id="9" name="Shape 7"/>
+          <p:cNvSpPr/>
+          <p:nvPr/>
+        </p:nvSpPr>
+        <p:spPr>
+          <a:xfrm>
+            <a:off x="3264408" y="1216152"/>
+            <a:ext cx="548640" cy="548640"/>
+          </a:xfrm>
+          <a:prstGeom prst="ellipse">
+            <a:avLst/>
+          </a:prstGeom>
+          <a:solidFill>
+            <a:srgbClr val="2E75B6"/>
+          </a:solidFill>
+          <a:ln/>
+        </p:spPr>
+      </p:sp>
+      <p:sp>
+        <p:nvSpPr>
+          <p:cNvPr id="10" name="Text 8"/>
+          <p:cNvSpPr/>
+          <p:nvPr/>
+        </p:nvSpPr>
+        <p:spPr>
+          <a:xfrm>
+            <a:off x="3264408" y="1216152"/>
+            <a:ext cx="548640" cy="548640"/>
+          </a:xfrm>
+          <a:prstGeom prst="rect">
+            <a:avLst/>
+          </a:prstGeom>
+          <a:noFill/>
+          <a:ln/>
+        </p:spPr>
+        <p:txBody>
+          <a:bodyPr wrap="square" lIns="0" tIns="0" rIns="0" bIns="0" rtlCol="0" anchor="ctr"/>
+          <a:lstStyle/>
+          <a:p>
+            <a:pPr marL="0" indent="0" algn="ctr">
+              <a:buNone/>
+            </a:pPr>
+            <a:r>
+              <a:rPr lang="en-US" sz="1800" b="1" dirty="0">
+                <a:solidFill>
+                  <a:srgbClr val="FFFFFF"/>
+                </a:solidFill>
+              </a:rPr>
+              <a:t>5</a:t>
+            </a:r>
+            <a:endParaRPr lang="en-US" sz="1800" dirty="0"/>
+          </a:p>
+        </p:txBody>
+      </p:sp>
+      <p:sp>
+        <p:nvSpPr>
+          <p:cNvPr id="11" name="Text 9"/>
+          <p:cNvSpPr/>
+          <p:nvPr/>
+        </p:nvSpPr>
+        <p:spPr>
+          <a:xfrm>
+            <a:off x="3904488" y="1280160"/>
+            <a:ext cx="1828800" cy="457200"/>
+          </a:xfrm>
+          <a:prstGeom prst="rect">
+            <a:avLst/>
+          </a:prstGeom>
+          <a:noFill/>
+          <a:ln/>
+        </p:spPr>
+        <p:txBody>
+          <a:bodyPr wrap="square" rtlCol="0" anchor="ctr"/>
+          <a:lstStyle/>
+          <a:p>
+            <a:pPr marL="0" indent="0">
+              <a:buNone/>
+            </a:pPr>
+            <a:r>
+              <a:rPr lang="en-US" sz="1100" dirty="0">
+                <a:solidFill>
+                  <a:srgbClr val="1F4E79"/>
+                </a:solidFill>
+              </a:rPr>
+              <a:t>Date-based queries</a:t>
+            </a:r>
+            <a:endParaRPr lang="en-US" sz="1100" dirty="0"/>
+          </a:p>
+        </p:txBody>
+      </p:sp>
+      <p:sp>
+        <p:nvSpPr>
+          <p:cNvPr id="12" name="Shape 10"/>
+          <p:cNvSpPr/>
+          <p:nvPr/>
+        </p:nvSpPr>
+        <p:spPr>
+          <a:xfrm>
+            <a:off x="6035040" y="1051560"/>
+            <a:ext cx="2697480" cy="914400"/>
+          </a:xfrm>
+          <a:prstGeom prst="roundRect">
+            <a:avLst>
+              <a:gd name="adj" fmla="val 10000"/>
+            </a:avLst>
+          </a:prstGeom>
+          <a:solidFill>
+            <a:srgbClr val="F2F6FA"/>
+          </a:solidFill>
+          <a:ln/>
+          <a:effectLst>
+            <a:outerShdw blurRad="101600" dist="38100" dir="2700000" algn="bl" rotWithShape="0">
+              <a:srgbClr val="000000">
+                <a:alpha val="12000"/>
+              </a:srgbClr>
+            </a:outerShdw>
+          </a:effectLst>
+        </p:spPr>
+      </p:sp>
+      <p:sp>
+        <p:nvSpPr>
+          <p:cNvPr id="13" name="Shape 11"/>
+          <p:cNvSpPr/>
+          <p:nvPr/>
+        </p:nvSpPr>
+        <p:spPr>
+          <a:xfrm>
+            <a:off x="6144768" y="1216152"/>
+            <a:ext cx="548640" cy="548640"/>
+          </a:xfrm>
+          <a:prstGeom prst="ellipse">
+            <a:avLst/>
+          </a:prstGeom>
+          <a:solidFill>
+            <a:srgbClr val="028090"/>
+          </a:solidFill>
+          <a:ln/>
+        </p:spPr>
+      </p:sp>
+      <p:sp>
+        <p:nvSpPr>
+          <p:cNvPr id="14" name="Text 12"/>
+          <p:cNvSpPr/>
+          <p:nvPr/>
+        </p:nvSpPr>
+        <p:spPr>
+          <a:xfrm>
+            <a:off x="6144768" y="1216152"/>
+            <a:ext cx="548640" cy="548640"/>
+          </a:xfrm>
+          <a:prstGeom prst="rect">
+            <a:avLst/>
+          </a:prstGeom>
+          <a:noFill/>
+          <a:ln/>
+        </p:spPr>
+        <p:txBody>
+          <a:bodyPr wrap="square" lIns="0" tIns="0" rIns="0" bIns="0" rtlCol="0" anchor="ctr"/>
+          <a:lstStyle/>
+          <a:p>
+            <a:pPr marL="0" indent="0" algn="ctr">
+              <a:buNone/>
+            </a:pPr>
+            <a:r>
+              <a:rPr lang="en-US" sz="1800" b="1" dirty="0">
+                <a:solidFill>
+                  <a:srgbClr val="FFFFFF"/>
+                </a:solidFill>
+              </a:rPr>
+              <a:t>5</a:t>
+            </a:r>
+            <a:endParaRPr lang="en-US" sz="1800" dirty="0"/>
+          </a:p>
+        </p:txBody>
+      </p:sp>
+      <p:sp>
+        <p:nvSpPr>
+          <p:cNvPr id="15" name="Text 13"/>
+          <p:cNvSpPr/>
+          <p:nvPr/>
+        </p:nvSpPr>
+        <p:spPr>
+          <a:xfrm>
+            <a:off x="6784848" y="1280160"/>
+            <a:ext cx="1828800" cy="457200"/>
+          </a:xfrm>
+          <a:prstGeom prst="rect">
+            <a:avLst/>
+          </a:prstGeom>
+          <a:noFill/>
+          <a:ln/>
+        </p:spPr>
+        <p:txBody>
+          <a:bodyPr wrap="square" rtlCol="0" anchor="ctr"/>
+          <a:lstStyle/>
+          <a:p>
+            <a:pPr marL="0" indent="0">
+              <a:buNone/>
+            </a:pPr>
+            <a:r>
+              <a:rPr lang="en-US" sz="1100" dirty="0">
+                <a:solidFill>
+                  <a:srgbClr val="1F4E79"/>
+                </a:solidFill>
+              </a:rPr>
+              <a:t>Category queries</a:t>
+            </a:r>
+            <a:endParaRPr lang="en-US" sz="1100" dirty="0"/>
+          </a:p>
+        </p:txBody>
+      </p:sp>
+      <p:sp>
+        <p:nvSpPr>
+          <p:cNvPr id="16" name="Shape 14"/>
+          <p:cNvSpPr/>
+          <p:nvPr/>
+        </p:nvSpPr>
+        <p:spPr>
+          <a:xfrm>
+            <a:off x="274320" y="2103120"/>
+            <a:ext cx="2697480" cy="914400"/>
+          </a:xfrm>
+          <a:prstGeom prst="roundRect">
+            <a:avLst>
+              <a:gd name="adj" fmla="val 10000"/>
+            </a:avLst>
+          </a:prstGeom>
+          <a:solidFill>
+            <a:srgbClr val="F2F6FA"/>
+          </a:solidFill>
+          <a:ln/>
+          <a:effectLst>
+            <a:outerShdw blurRad="101600" dist="38100" dir="2700000" algn="bl" rotWithShape="0">
+              <a:srgbClr val="000000">
+                <a:alpha val="12000"/>
+              </a:srgbClr>
+            </a:outerShdw>
+          </a:effectLst>
+        </p:spPr>
+      </p:sp>
+      <p:sp>
+        <p:nvSpPr>
+          <p:cNvPr id="17" name="Shape 15"/>
+          <p:cNvSpPr/>
+          <p:nvPr/>
+        </p:nvSpPr>
+        <p:spPr>
+          <a:xfrm>
+            <a:off x="384048" y="2267712"/>
+            <a:ext cx="548640" cy="548640"/>
+          </a:xfrm>
+          <a:prstGeom prst="ellipse">
+            <a:avLst/>
+          </a:prstGeom>
+          <a:solidFill>
+            <a:srgbClr val="1F4E79"/>
+          </a:solidFill>
+          <a:ln/>
+        </p:spPr>
+      </p:sp>
+      <p:sp>
+        <p:nvSpPr>
+          <p:cNvPr id="18" name="Text 16"/>
+          <p:cNvSpPr/>
+          <p:nvPr/>
+        </p:nvSpPr>
+        <p:spPr>
+          <a:xfrm>
+            <a:off x="384048" y="2267712"/>
+            <a:ext cx="548640" cy="548640"/>
+          </a:xfrm>
+          <a:prstGeom prst="rect">
+            <a:avLst/>
+          </a:prstGeom>
+          <a:noFill/>
+          <a:ln/>
+        </p:spPr>
+        <p:txBody>
+          <a:bodyPr wrap="square" lIns="0" tIns="0" rIns="0" bIns="0" rtlCol="0" anchor="ctr"/>
+          <a:lstStyle/>
+          <a:p>
+            <a:pPr marL="0" indent="0" algn="ctr">
+              <a:buNone/>
+            </a:pPr>
+            <a:r>
+              <a:rPr lang="en-US" sz="1800" b="1" dirty="0">
+                <a:solidFill>
+                  <a:srgbClr val="FFFFFF"/>
+                </a:solidFill>
+              </a:rPr>
+              <a:t>4</a:t>
+            </a:r>
+            <a:endParaRPr lang="en-US" sz="1800" dirty="0"/>
+          </a:p>
+        </p:txBody>
+      </p:sp>
+      <p:sp>
+        <p:nvSpPr>
+          <p:cNvPr id="19" name="Text 17"/>
+          <p:cNvSpPr/>
+          <p:nvPr/>
+        </p:nvSpPr>
+        <p:spPr>
+          <a:xfrm>
+            <a:off x="1024128" y="2331720"/>
+            <a:ext cx="1828800" cy="457200"/>
+          </a:xfrm>
+          <a:prstGeom prst="rect">
+            <a:avLst/>
+          </a:prstGeom>
+          <a:noFill/>
+          <a:ln/>
+        </p:spPr>
+        <p:txBody>
+          <a:bodyPr wrap="square" rtlCol="0" anchor="ctr"/>
+          <a:lstStyle/>
+          <a:p>
+            <a:pPr marL="0" indent="0">
+              <a:buNone/>
+            </a:pPr>
+            <a:r>
+              <a:rPr lang="en-US" sz="1100" dirty="0">
+                <a:solidFill>
+                  <a:srgbClr val="1F4E79"/>
+                </a:solidFill>
+              </a:rPr>
+              <a:t>Venue-based queries</a:t>
+            </a:r>
+            <a:endParaRPr lang="en-US" sz="1100" dirty="0"/>
+          </a:p>
+        </p:txBody>
+      </p:sp>
+      <p:sp>
+        <p:nvSpPr>
+          <p:cNvPr id="20" name="Shape 18"/>
+          <p:cNvSpPr/>
+          <p:nvPr/>
+        </p:nvSpPr>
+        <p:spPr>
+          <a:xfrm>
+            <a:off x="3154680" y="2103120"/>
+            <a:ext cx="2697480" cy="914400"/>
+          </a:xfrm>
+          <a:prstGeom prst="roundRect">
+            <a:avLst>
+              <a:gd name="adj" fmla="val 10000"/>
+            </a:avLst>
+          </a:prstGeom>
+          <a:solidFill>
+            <a:srgbClr val="F2F6FA"/>
+          </a:solidFill>
+          <a:ln/>
+          <a:effectLst>
+            <a:outerShdw blurRad="101600" dist="38100" dir="2700000" algn="bl" rotWithShape="0">
+              <a:srgbClr val="000000">
+                <a:alpha val="12000"/>
+              </a:srgbClr>
+            </a:outerShdw>
+          </a:effectLst>
+        </p:spPr>
+      </p:sp>
+      <p:sp>
+        <p:nvSpPr>
+          <p:cNvPr id="21" name="Shape 19"/>
+          <p:cNvSpPr/>
+          <p:nvPr/>
+        </p:nvSpPr>
+        <p:spPr>
+          <a:xfrm>
+            <a:off x="3264408" y="2267712"/>
+            <a:ext cx="548640" cy="548640"/>
+          </a:xfrm>
+          <a:prstGeom prst="ellipse">
+            <a:avLst/>
+          </a:prstGeom>
+          <a:solidFill>
+            <a:srgbClr val="2E75B6"/>
+          </a:solidFill>
+          <a:ln/>
+        </p:spPr>
+      </p:sp>
+      <p:sp>
+        <p:nvSpPr>
+          <p:cNvPr id="22" name="Text 20"/>
+          <p:cNvSpPr/>
+          <p:nvPr/>
+        </p:nvSpPr>
+        <p:spPr>
+          <a:xfrm>
+            <a:off x="3264408" y="2267712"/>
+            <a:ext cx="548640" cy="548640"/>
+          </a:xfrm>
+          <a:prstGeom prst="rect">
+            <a:avLst/>
+          </a:prstGeom>
+          <a:noFill/>
+          <a:ln/>
+        </p:spPr>
+        <p:txBody>
+          <a:bodyPr wrap="square" lIns="0" tIns="0" rIns="0" bIns="0" rtlCol="0" anchor="ctr"/>
+          <a:lstStyle/>
+          <a:p>
+            <a:pPr marL="0" indent="0" algn="ctr">
+              <a:buNone/>
+            </a:pPr>
+            <a:r>
+              <a:rPr lang="en-US" sz="1800" b="1" dirty="0">
+                <a:solidFill>
+                  <a:srgbClr val="FFFFFF"/>
+                </a:solidFill>
+              </a:rPr>
+              <a:t>5</a:t>
+            </a:r>
+            <a:endParaRPr lang="en-US" sz="1800" dirty="0"/>
+          </a:p>
+        </p:txBody>
+      </p:sp>
+      <p:sp>
+        <p:nvSpPr>
+          <p:cNvPr id="23" name="Text 21"/>
+          <p:cNvSpPr/>
+          <p:nvPr/>
+        </p:nvSpPr>
+        <p:spPr>
+          <a:xfrm>
+            <a:off x="3904488" y="2331720"/>
+            <a:ext cx="1828800" cy="457200"/>
+          </a:xfrm>
+          <a:prstGeom prst="rect">
+            <a:avLst/>
+          </a:prstGeom>
+          <a:noFill/>
+          <a:ln/>
+        </p:spPr>
+        <p:txBody>
+          <a:bodyPr wrap="square" rtlCol="0" anchor="ctr"/>
+          <a:lstStyle/>
+          <a:p>
+            <a:pPr marL="0" indent="0">
+              <a:buNone/>
+            </a:pPr>
+            <a:r>
+              <a:rPr lang="en-US" sz="1100" dirty="0">
+                <a:solidFill>
+                  <a:srgbClr val="1F4E79"/>
+                </a:solidFill>
+              </a:rPr>
+              <a:t>Out of scope</a:t>
+            </a:r>
+            <a:endParaRPr lang="en-US" sz="1100" dirty="0"/>
+          </a:p>
+        </p:txBody>
+      </p:sp>
+      <p:sp>
+        <p:nvSpPr>
+          <p:cNvPr id="24" name="Shape 22"/>
+          <p:cNvSpPr/>
+          <p:nvPr/>
+        </p:nvSpPr>
+        <p:spPr>
+          <a:xfrm>
+            <a:off x="6035040" y="2103120"/>
+            <a:ext cx="2697480" cy="914400"/>
+          </a:xfrm>
+          <a:prstGeom prst="roundRect">
+            <a:avLst>
+              <a:gd name="adj" fmla="val 10000"/>
+            </a:avLst>
+          </a:prstGeom>
+          <a:solidFill>
+            <a:srgbClr val="F2F6FA"/>
+          </a:solidFill>
+          <a:ln/>
+          <a:effectLst>
+            <a:outerShdw blurRad="101600" dist="38100" dir="2700000" algn="bl" rotWithShape="0">
+              <a:srgbClr val="000000">
+                <a:alpha val="12000"/>
+              </a:srgbClr>
+            </a:outerShdw>
+          </a:effectLst>
+        </p:spPr>
+      </p:sp>
+      <p:sp>
+        <p:nvSpPr>
+          <p:cNvPr id="25" name="Shape 23"/>
+          <p:cNvSpPr/>
+          <p:nvPr/>
+        </p:nvSpPr>
+        <p:spPr>
+          <a:xfrm>
+            <a:off x="6144768" y="2267712"/>
+            <a:ext cx="548640" cy="548640"/>
+          </a:xfrm>
+          <a:prstGeom prst="ellipse">
+            <a:avLst/>
+          </a:prstGeom>
+          <a:solidFill>
+            <a:srgbClr val="028090"/>
+          </a:solidFill>
+          <a:ln/>
+        </p:spPr>
+      </p:sp>
+      <p:sp>
+        <p:nvSpPr>
+          <p:cNvPr id="26" name="Text 24"/>
+          <p:cNvSpPr/>
+          <p:nvPr/>
+        </p:nvSpPr>
+        <p:spPr>
+          <a:xfrm>
+            <a:off x="6144768" y="2267712"/>
+            <a:ext cx="548640" cy="548640"/>
+          </a:xfrm>
+          <a:prstGeom prst="rect">
+            <a:avLst/>
+          </a:prstGeom>
+          <a:noFill/>
+          <a:ln/>
+        </p:spPr>
+        <p:txBody>
+          <a:bodyPr wrap="square" lIns="0" tIns="0" rIns="0" bIns="0" rtlCol="0" anchor="ctr"/>
+          <a:lstStyle/>
+          <a:p>
+            <a:pPr marL="0" indent="0" algn="ctr">
+              <a:buNone/>
+            </a:pPr>
+            <a:r>
+              <a:rPr lang="en-US" sz="1800" b="1" dirty="0">
+                <a:solidFill>
+                  <a:srgbClr val="FFFFFF"/>
+                </a:solidFill>
+              </a:rPr>
+              <a:t>5</a:t>
+            </a:r>
+            <a:endParaRPr lang="en-US" sz="1800" dirty="0"/>
+          </a:p>
+        </p:txBody>
+      </p:sp>
+      <p:sp>
+        <p:nvSpPr>
+          <p:cNvPr id="27" name="Text 25"/>
+          <p:cNvSpPr/>
+          <p:nvPr/>
+        </p:nvSpPr>
+        <p:spPr>
+          <a:xfrm>
+            <a:off x="6784848" y="2331720"/>
+            <a:ext cx="1828800" cy="457200"/>
+          </a:xfrm>
+          <a:prstGeom prst="rect">
+            <a:avLst/>
+          </a:prstGeom>
+          <a:noFill/>
+          <a:ln/>
+        </p:spPr>
+        <p:txBody>
+          <a:bodyPr wrap="square" rtlCol="0" anchor="ctr"/>
+          <a:lstStyle/>
+          <a:p>
+            <a:pPr marL="0" indent="0">
+              <a:buNone/>
+            </a:pPr>
+            <a:r>
+              <a:rPr lang="en-US" sz="1100" dirty="0">
+                <a:solidFill>
+                  <a:srgbClr val="1F4E79"/>
+                </a:solidFill>
+              </a:rPr>
+              <a:t>No match</a:t>
+            </a:r>
+            <a:endParaRPr lang="en-US" sz="1100" dirty="0"/>
+          </a:p>
+        </p:txBody>
+      </p:sp>
+      <p:sp>
+        <p:nvSpPr>
+          <p:cNvPr id="28" name="Shape 26"/>
+          <p:cNvSpPr/>
+          <p:nvPr/>
+        </p:nvSpPr>
+        <p:spPr>
+          <a:xfrm>
+            <a:off x="274320" y="3246120"/>
+            <a:ext cx="8595360" cy="1691640"/>
+          </a:xfrm>
+          <a:prstGeom prst="roundRect">
+            <a:avLst>
+              <a:gd name="adj" fmla="val 5405"/>
+            </a:avLst>
+          </a:prstGeom>
+          <a:solidFill>
+            <a:srgbClr val="F2F6FA"/>
+          </a:solidFill>
+          <a:ln/>
+          <a:effectLst>
+            <a:outerShdw blurRad="101600" dist="38100" dir="2700000" algn="bl" rotWithShape="0">
+              <a:srgbClr val="000000">
+                <a:alpha val="12000"/>
+              </a:srgbClr>
+            </a:outerShdw>
+          </a:effectLst>
+        </p:spPr>
+      </p:sp>
+      <p:sp>
+        <p:nvSpPr>
+          <p:cNvPr id="29" name="Text 27"/>
+          <p:cNvSpPr/>
+          <p:nvPr/>
+        </p:nvSpPr>
+        <p:spPr>
+          <a:xfrm>
+            <a:off x="457200" y="3337560"/>
+            <a:ext cx="8229600" cy="320040"/>
+          </a:xfrm>
+          <a:prstGeom prst="rect">
+            <a:avLst/>
+          </a:prstGeom>
+          <a:noFill/>
+          <a:ln/>
+        </p:spPr>
+        <p:txBody>
+          <a:bodyPr wrap="square" rtlCol="0" anchor="ctr"/>
+          <a:lstStyle/>
+          <a:p>
+            <a:pPr marL="0" indent="0">
+              <a:buNone/>
+            </a:pPr>
+            <a:r>
+              <a:rPr lang="en-US" sz="1200" b="1" kern="0" spc="200" dirty="0">
+                <a:solidFill>
+                  <a:srgbClr val="1F4E79"/>
+                </a:solidFill>
+              </a:rPr>
+              <a:t>RAGAS METRICS</a:t>
+            </a:r>
+            <a:endParaRPr lang="en-US" sz="1200" dirty="0"/>
+          </a:p>
+        </p:txBody>
+      </p:sp>
+      <p:sp>
+        <p:nvSpPr>
+          <p:cNvPr id="30" name="Shape 28"/>
+          <p:cNvSpPr/>
+          <p:nvPr/>
+        </p:nvSpPr>
+        <p:spPr>
+          <a:xfrm>
+            <a:off x="457200" y="3703320"/>
+            <a:ext cx="1965960" cy="1097280"/>
+          </a:xfrm>
+          <a:prstGeom prst="roundRect">
+            <a:avLst>
+              <a:gd name="adj" fmla="val 6667"/>
+            </a:avLst>
+          </a:prstGeom>
+          <a:solidFill>
+            <a:srgbClr val="FFFFFF"/>
+          </a:solidFill>
+          <a:ln/>
+        </p:spPr>
+      </p:sp>
+      <p:sp>
+        <p:nvSpPr>
+          <p:cNvPr id="31" name="Text 29"/>
+          <p:cNvSpPr/>
+          <p:nvPr/>
+        </p:nvSpPr>
+        <p:spPr>
+          <a:xfrm>
+            <a:off x="457200" y="3749040"/>
+            <a:ext cx="1965960" cy="320040"/>
+          </a:xfrm>
+          <a:prstGeom prst="rect">
+            <a:avLst/>
+          </a:prstGeom>
+          <a:noFill/>
+          <a:ln/>
+        </p:spPr>
+        <p:txBody>
+          <a:bodyPr wrap="square" rtlCol="0" anchor="ctr"/>
+          <a:lstStyle/>
+          <a:p>
+            <a:pPr marL="0" indent="0" algn="ctr">
+              <a:buNone/>
+            </a:pPr>
+            <a:r>
+              <a:rPr lang="en-US" sz="1000" b="1" dirty="0">
+                <a:solidFill>
+                  <a:srgbClr val="2E75B6"/>
+                </a:solidFill>
+              </a:rPr>
+              <a:t>faithfulness</a:t>
+            </a:r>
+            <a:endParaRPr lang="en-US" sz="1000" dirty="0"/>
+          </a:p>
+        </p:txBody>
+      </p:sp>
+      <p:sp>
+        <p:nvSpPr>
+          <p:cNvPr id="32" name="Text 30"/>
+          <p:cNvSpPr/>
+          <p:nvPr/>
+        </p:nvSpPr>
+        <p:spPr>
+          <a:xfrm>
+            <a:off x="457200" y="4096512"/>
+            <a:ext cx="1965960" cy="411480"/>
+          </a:xfrm>
+          <a:prstGeom prst="rect">
+            <a:avLst/>
+          </a:prstGeom>
+          <a:noFill/>
+          <a:ln/>
+        </p:spPr>
+        <p:txBody>
+          <a:bodyPr wrap="square" rtlCol="0" anchor="ctr"/>
+          <a:lstStyle/>
+          <a:p>
+            <a:pPr marL="0" indent="0" algn="ctr">
+              <a:buNone/>
+            </a:pPr>
+            <a:r>
+              <a:rPr lang="en-US" sz="900" dirty="0">
+                <a:solidFill>
+                  <a:srgbClr val="5D6D7E"/>
+                </a:solidFill>
+              </a:rPr>
+              <a:t>Response grounded in context?</a:t>
+            </a:r>
+            <a:endParaRPr lang="en-US" sz="900" dirty="0"/>
+          </a:p>
+        </p:txBody>
+      </p:sp>
+      <p:sp>
+        <p:nvSpPr>
+          <p:cNvPr id="33" name="Text 31"/>
+          <p:cNvSpPr/>
+          <p:nvPr/>
+        </p:nvSpPr>
+        <p:spPr>
+          <a:xfrm>
+            <a:off x="457200" y="4544568"/>
+            <a:ext cx="1965960" cy="228600"/>
+          </a:xfrm>
+          <a:prstGeom prst="rect">
+            <a:avLst/>
+          </a:prstGeom>
+          <a:noFill/>
+          <a:ln/>
+        </p:spPr>
+        <p:txBody>
+          <a:bodyPr wrap="square" rtlCol="0" anchor="ctr"/>
+          <a:lstStyle/>
+          <a:p>
+            <a:pPr marL="0" indent="0" algn="ctr">
+              <a:buNone/>
+            </a:pPr>
+            <a:r>
+              <a:rPr lang="en-US" sz="1000" b="1" dirty="0">
+                <a:solidFill>
+                  <a:srgbClr val="028090"/>
+                </a:solidFill>
+              </a:rPr>
+              <a:t>&gt; 0.80</a:t>
+            </a:r>
+            <a:endParaRPr lang="en-US" sz="1000" dirty="0"/>
+          </a:p>
+        </p:txBody>
+      </p:sp>
+      <p:sp>
+        <p:nvSpPr>
+          <p:cNvPr id="34" name="Shape 32"/>
+          <p:cNvSpPr/>
+          <p:nvPr/>
+        </p:nvSpPr>
+        <p:spPr>
+          <a:xfrm>
+            <a:off x="2578608" y="3703320"/>
+            <a:ext cx="1965960" cy="1097280"/>
+          </a:xfrm>
+          <a:prstGeom prst="roundRect">
+            <a:avLst>
+              <a:gd name="adj" fmla="val 6667"/>
+            </a:avLst>
+          </a:prstGeom>
+          <a:solidFill>
+            <a:srgbClr val="FFFFFF"/>
+          </a:solidFill>
+          <a:ln/>
+        </p:spPr>
+      </p:sp>
+      <p:sp>
+        <p:nvSpPr>
+          <p:cNvPr id="35" name="Text 33"/>
+          <p:cNvSpPr/>
+          <p:nvPr/>
+        </p:nvSpPr>
+        <p:spPr>
+          <a:xfrm>
+            <a:off x="2578608" y="3749040"/>
+            <a:ext cx="1965960" cy="320040"/>
+          </a:xfrm>
+          <a:prstGeom prst="rect">
+            <a:avLst/>
+          </a:prstGeom>
+          <a:noFill/>
+          <a:ln/>
+        </p:spPr>
+        <p:txBody>
+          <a:bodyPr wrap="square" rtlCol="0" anchor="ctr"/>
+          <a:lstStyle/>
+          <a:p>
+            <a:pPr marL="0" indent="0" algn="ctr">
+              <a:buNone/>
+            </a:pPr>
+            <a:r>
+              <a:rPr lang="en-US" sz="1000" b="1" dirty="0">
+                <a:solidFill>
+                  <a:srgbClr val="2E75B6"/>
+                </a:solidFill>
+              </a:rPr>
+              <a:t>answer_relevancy</a:t>
+            </a:r>
+            <a:endParaRPr lang="en-US" sz="1000" dirty="0"/>
+          </a:p>
+        </p:txBody>
+      </p:sp>
+      <p:sp>
+        <p:nvSpPr>
+          <p:cNvPr id="36" name="Text 34"/>
+          <p:cNvSpPr/>
+          <p:nvPr/>
+        </p:nvSpPr>
+        <p:spPr>
+          <a:xfrm>
+            <a:off x="2578608" y="4096512"/>
+            <a:ext cx="1965960" cy="411480"/>
+          </a:xfrm>
+          <a:prstGeom prst="rect">
+            <a:avLst/>
+          </a:prstGeom>
+          <a:noFill/>
+          <a:ln/>
+        </p:spPr>
+        <p:txBody>
+          <a:bodyPr wrap="square" rtlCol="0" anchor="ctr"/>
+          <a:lstStyle/>
+          <a:p>
+            <a:pPr marL="0" indent="0" algn="ctr">
+              <a:buNone/>
+            </a:pPr>
+            <a:r>
+              <a:rPr lang="en-US" sz="900" dirty="0">
+                <a:solidFill>
+                  <a:srgbClr val="5D6D7E"/>
+                </a:solidFill>
+              </a:rPr>
+              <a:t>Response relevant to the question?</a:t>
+            </a:r>
+            <a:endParaRPr lang="en-US" sz="900" dirty="0"/>
+          </a:p>
+        </p:txBody>
+      </p:sp>
+      <p:sp>
+        <p:nvSpPr>
+          <p:cNvPr id="37" name="Text 35"/>
+          <p:cNvSpPr/>
+          <p:nvPr/>
+        </p:nvSpPr>
+        <p:spPr>
+          <a:xfrm>
+            <a:off x="2578608" y="4544568"/>
+            <a:ext cx="1965960" cy="228600"/>
+          </a:xfrm>
+          <a:prstGeom prst="rect">
+            <a:avLst/>
+          </a:prstGeom>
+          <a:noFill/>
+          <a:ln/>
+        </p:spPr>
+        <p:txBody>
+          <a:bodyPr wrap="square" rtlCol="0" anchor="ctr"/>
+          <a:lstStyle/>
+          <a:p>
+            <a:pPr marL="0" indent="0" algn="ctr">
+              <a:buNone/>
+            </a:pPr>
+            <a:r>
+              <a:rPr lang="en-US" sz="1000" b="1" dirty="0">
+                <a:solidFill>
+                  <a:srgbClr val="028090"/>
+                </a:solidFill>
+              </a:rPr>
+              <a:t>&gt; 0.75</a:t>
+            </a:r>
+            <a:endParaRPr lang="en-US" sz="1000" dirty="0"/>
+          </a:p>
+        </p:txBody>
+      </p:sp>
+      <p:sp>
+        <p:nvSpPr>
+          <p:cNvPr id="38" name="Shape 36"/>
+          <p:cNvSpPr/>
+          <p:nvPr/>
+        </p:nvSpPr>
+        <p:spPr>
+          <a:xfrm>
+            <a:off x="4700016" y="3703320"/>
+            <a:ext cx="1965960" cy="1097280"/>
+          </a:xfrm>
+          <a:prstGeom prst="roundRect">
+            <a:avLst>
+              <a:gd name="adj" fmla="val 6667"/>
+            </a:avLst>
+          </a:prstGeom>
+          <a:solidFill>
+            <a:srgbClr val="FFFFFF"/>
+          </a:solidFill>
+          <a:ln/>
+        </p:spPr>
+      </p:sp>
+      <p:sp>
+        <p:nvSpPr>
+          <p:cNvPr id="39" name="Text 37"/>
+          <p:cNvSpPr/>
+          <p:nvPr/>
+        </p:nvSpPr>
+        <p:spPr>
+          <a:xfrm>
+            <a:off x="4700016" y="3749040"/>
+            <a:ext cx="1965960" cy="320040"/>
+          </a:xfrm>
+          <a:prstGeom prst="rect">
+            <a:avLst/>
+          </a:prstGeom>
+          <a:noFill/>
+          <a:ln/>
+        </p:spPr>
+        <p:txBody>
+          <a:bodyPr wrap="square" rtlCol="0" anchor="ctr"/>
+          <a:lstStyle/>
+          <a:p>
+            <a:pPr marL="0" indent="0" algn="ctr">
+              <a:buNone/>
+            </a:pPr>
+            <a:r>
+              <a:rPr lang="en-US" sz="1000" b="1" dirty="0">
+                <a:solidFill>
+                  <a:srgbClr val="2E75B6"/>
+                </a:solidFill>
+              </a:rPr>
+              <a:t>context_precision</a:t>
+            </a:r>
+            <a:endParaRPr lang="en-US" sz="1000" dirty="0"/>
+          </a:p>
+        </p:txBody>
+      </p:sp>
+      <p:sp>
+        <p:nvSpPr>
+          <p:cNvPr id="40" name="Text 38"/>
+          <p:cNvSpPr/>
+          <p:nvPr/>
+        </p:nvSpPr>
+        <p:spPr>
+          <a:xfrm>
+            <a:off x="4700016" y="4096512"/>
+            <a:ext cx="1965960" cy="411480"/>
+          </a:xfrm>
+          <a:prstGeom prst="rect">
+            <a:avLst/>
+          </a:prstGeom>
+          <a:noFill/>
+          <a:ln/>
+        </p:spPr>
+        <p:txBody>
+          <a:bodyPr wrap="square" rtlCol="0" anchor="ctr"/>
+          <a:lstStyle/>
+          <a:p>
+            <a:pPr marL="0" indent="0" algn="ctr">
+              <a:buNone/>
+            </a:pPr>
+            <a:r>
+              <a:rPr lang="en-US" sz="900" dirty="0">
+                <a:solidFill>
+                  <a:srgbClr val="5D6D7E"/>
+                </a:solidFill>
+              </a:rPr>
+              <a:t>Retrieved chunks noise-free?</a:t>
+            </a:r>
+            <a:endParaRPr lang="en-US" sz="900" dirty="0"/>
+          </a:p>
+        </p:txBody>
+      </p:sp>
+      <p:sp>
+        <p:nvSpPr>
+          <p:cNvPr id="41" name="Text 39"/>
+          <p:cNvSpPr/>
+          <p:nvPr/>
+        </p:nvSpPr>
+        <p:spPr>
+          <a:xfrm>
+            <a:off x="4700016" y="4544568"/>
+            <a:ext cx="1965960" cy="228600"/>
+          </a:xfrm>
+          <a:prstGeom prst="rect">
+            <a:avLst/>
+          </a:prstGeom>
+          <a:noFill/>
+          <a:ln/>
+        </p:spPr>
+        <p:txBody>
+          <a:bodyPr wrap="square" rtlCol="0" anchor="ctr"/>
+          <a:lstStyle/>
+          <a:p>
+            <a:pPr marL="0" indent="0" algn="ctr">
+              <a:buNone/>
+            </a:pPr>
+            <a:r>
+              <a:rPr lang="en-US" sz="1000" b="1" dirty="0">
+                <a:solidFill>
+                  <a:srgbClr val="028090"/>
+                </a:solidFill>
+              </a:rPr>
+              <a:t>&gt; 0.70</a:t>
+            </a:r>
+            <a:endParaRPr lang="en-US" sz="1000" dirty="0"/>
+          </a:p>
+        </p:txBody>
+      </p:sp>
+      <p:sp>
+        <p:nvSpPr>
+          <p:cNvPr id="42" name="Shape 40"/>
+          <p:cNvSpPr/>
+          <p:nvPr/>
+        </p:nvSpPr>
+        <p:spPr>
+          <a:xfrm>
+            <a:off x="6821424" y="3703320"/>
+            <a:ext cx="1965960" cy="1097280"/>
+          </a:xfrm>
+          <a:prstGeom prst="roundRect">
+            <a:avLst>
+              <a:gd name="adj" fmla="val 6667"/>
+            </a:avLst>
+          </a:prstGeom>
+          <a:solidFill>
+            <a:srgbClr val="FFFFFF"/>
+          </a:solidFill>
+          <a:ln/>
+        </p:spPr>
+      </p:sp>
+      <p:sp>
+        <p:nvSpPr>
+          <p:cNvPr id="43" name="Text 41"/>
+          <p:cNvSpPr/>
+          <p:nvPr/>
+        </p:nvSpPr>
+        <p:spPr>
+          <a:xfrm>
+            <a:off x="6821424" y="3749040"/>
+            <a:ext cx="1965960" cy="320040"/>
+          </a:xfrm>
+          <a:prstGeom prst="rect">
+            <a:avLst/>
+          </a:prstGeom>
+          <a:noFill/>
+          <a:ln/>
+        </p:spPr>
+        <p:txBody>
+          <a:bodyPr wrap="square" rtlCol="0" anchor="ctr"/>
+          <a:lstStyle/>
+          <a:p>
+            <a:pPr marL="0" indent="0" algn="ctr">
+              <a:buNone/>
+            </a:pPr>
+            <a:r>
+              <a:rPr lang="en-US" sz="1000" b="1" dirty="0">
+                <a:solidFill>
+                  <a:srgbClr val="2E75B6"/>
+                </a:solidFill>
+              </a:rPr>
+              <a:t>context_recall</a:t>
+            </a:r>
+            <a:endParaRPr lang="en-US" sz="1000" dirty="0"/>
+          </a:p>
+        </p:txBody>
+      </p:sp>
+      <p:sp>
+        <p:nvSpPr>
+          <p:cNvPr id="44" name="Text 42"/>
+          <p:cNvSpPr/>
+          <p:nvPr/>
+        </p:nvSpPr>
+        <p:spPr>
+          <a:xfrm>
+            <a:off x="6821424" y="4096512"/>
+            <a:ext cx="1965960" cy="411480"/>
+          </a:xfrm>
+          <a:prstGeom prst="rect">
+            <a:avLst/>
+          </a:prstGeom>
+          <a:noFill/>
+          <a:ln/>
+        </p:spPr>
+        <p:txBody>
+          <a:bodyPr wrap="square" rtlCol="0" anchor="ctr"/>
+          <a:lstStyle/>
+          <a:p>
+            <a:pPr marL="0" indent="0" algn="ctr">
+              <a:buNone/>
+            </a:pPr>
+            <a:r>
+              <a:rPr lang="en-US" sz="900" dirty="0">
+                <a:solidFill>
+                  <a:srgbClr val="5D6D7E"/>
+                </a:solidFill>
+              </a:rPr>
+              <a:t>All necessary info retrieved?</a:t>
+            </a:r>
+            <a:endParaRPr lang="en-US" sz="900" dirty="0"/>
+          </a:p>
+        </p:txBody>
+      </p:sp>
+      <p:sp>
+        <p:nvSpPr>
+          <p:cNvPr id="45" name="Text 43"/>
+          <p:cNvSpPr/>
+          <p:nvPr/>
+        </p:nvSpPr>
+        <p:spPr>
+          <a:xfrm>
+            <a:off x="6821424" y="4544568"/>
+            <a:ext cx="1965960" cy="228600"/>
+          </a:xfrm>
+          <a:prstGeom prst="rect">
+            <a:avLst/>
+          </a:prstGeom>
+          <a:noFill/>
+          <a:ln/>
+        </p:spPr>
+        <p:txBody>
+          <a:bodyPr wrap="square" rtlCol="0" anchor="ctr"/>
+          <a:lstStyle/>
+          <a:p>
+            <a:pPr marL="0" indent="0" algn="ctr">
+              <a:buNone/>
+            </a:pPr>
+            <a:r>
+              <a:rPr lang="en-US" sz="1000" b="1" dirty="0">
+                <a:solidFill>
+                  <a:srgbClr val="028090"/>
+                </a:solidFill>
+              </a:rPr>
+              <a:t>&gt; 0.70</a:t>
+            </a:r>
+            <a:endParaRPr lang="en-US" sz="1000" dirty="0"/>
+          </a:p>
+        </p:txBody>
+      </p:sp>
+    </p:spTree>
+  </p:cSld>
+  <p:clrMapOvr>
+    <a:masterClrMapping/>
+  </p:clrMapOvr>
+</p:sld>
+</file>
+
+<file path=ppt/slides/slide12.xml><?xml version="1.0" encoding="utf-8"?>
+<p:sld xmlns:a="http://schemas.openxmlformats.org/drawingml/2006/main" xmlns:r="http://schemas.openxmlformats.org/officeDocument/2006/relationships" xmlns:p="http://schemas.openxmlformats.org/presentationml/2006/main">
   <p:cSld name="Slide 11">
     <p:bg>
       <p:bgPr>
@@ -2519,7 +4958,7 @@
 </p:sld>
 </file>
 
-<file path=ppt/slides/slide11.xml><?xml version="1.0" encoding="utf-8"?>
+<file path=ppt/slides/slide13.xml><?xml version="1.0" encoding="utf-8"?>
 <p:sld xmlns:a="http://schemas.openxmlformats.org/drawingml/2006/main" xmlns:r="http://schemas.openxmlformats.org/officeDocument/2006/relationships" xmlns:p="http://schemas.openxmlformats.org/presentationml/2006/main">
   <p:cSld name="Slide 12">
     <p:bg>
@@ -3478,7 +5917,7 @@
 </p:sld>
 </file>
 
-<file path=ppt/slides/slide12.xml><?xml version="1.0" encoding="utf-8"?>
+<file path=ppt/slides/slide14.xml><?xml version="1.0" encoding="utf-8"?>
 <p:sld xmlns:a="http://schemas.openxmlformats.org/drawingml/2006/main" xmlns:r="http://schemas.openxmlformats.org/officeDocument/2006/relationships" xmlns:p="http://schemas.openxmlformats.org/presentationml/2006/main">
   <p:cSld name="Slide 13">
     <p:bg>
@@ -4065,7 +6504,7 @@
 </p:sld>
 </file>
 
-<file path=ppt/slides/slide13.xml><?xml version="1.0" encoding="utf-8"?>
+<file path=ppt/slides/slide15.xml><?xml version="1.0" encoding="utf-8"?>
 <p:sld xmlns:a="http://schemas.openxmlformats.org/drawingml/2006/main" xmlns:r="http://schemas.openxmlformats.org/officeDocument/2006/relationships" xmlns:p="http://schemas.openxmlformats.org/presentationml/2006/main">
   <p:cSld>
     <p:spTree>
@@ -4090,7 +6529,7 @@
         </p:nvSpPr>
         <p:spPr>
           <a:xfrm>
-            <a:off x="0" y="0"/>
+            <a:off x="182880" y="1383134"/>
             <a:ext cx="9144000" cy="914400"/>
           </a:xfrm>
           <a:prstGeom prst="rect">
@@ -4104,1229 +6543,13 @@
       </p:sp>
       <p:sp>
         <p:nvSpPr>
-          <p:cNvPr id="3" name="Text 1"/>
-          <p:cNvSpPr/>
-          <p:nvPr/>
-        </p:nvSpPr>
-        <p:spPr>
-          <a:xfrm>
-            <a:off x="365760" y="0"/>
-            <a:ext cx="8412480" cy="914400"/>
-          </a:xfrm>
-          <a:prstGeom prst="rect">
-            <a:avLst/>
-          </a:prstGeom>
-          <a:noFill/>
-          <a:ln/>
-        </p:spPr>
-        <p:txBody>
-          <a:bodyPr wrap="square" rtlCol="0" anchor="ctr"/>
-          <a:lstStyle/>
-          <a:p>
-            <a:pPr marL="0" indent="0">
-              <a:buNone/>
-            </a:pPr>
-            <a:r>
-              <a:rPr lang="en-US" sz="2200" b="1" dirty="0">
-                <a:solidFill>
-                  <a:srgbClr val="FFFFFF"/>
-                </a:solidFill>
-              </a:rPr>
-              <a:t>TECHNICAL CHOICES</a:t>
-            </a:r>
-            <a:endParaRPr lang="en-US" sz="2200" dirty="0"/>
-          </a:p>
-        </p:txBody>
-      </p:sp>
-      <p:sp>
-        <p:nvSpPr>
-          <p:cNvPr id="4" name="Shape 2"/>
-          <p:cNvSpPr/>
-          <p:nvPr/>
-        </p:nvSpPr>
-        <p:spPr>
-          <a:xfrm>
-            <a:off x="274320" y="1051560"/>
-            <a:ext cx="2697480" cy="1783080"/>
-          </a:xfrm>
-          <a:prstGeom prst="roundRect">
-            <a:avLst>
-              <a:gd name="adj" fmla="val 5128"/>
-            </a:avLst>
-          </a:prstGeom>
-          <a:solidFill>
-            <a:srgbClr val="F2F6FA"/>
-          </a:solidFill>
-          <a:ln/>
-          <a:effectLst>
-            <a:outerShdw blurRad="101600" dist="38100" dir="2700000" algn="bl" rotWithShape="0">
-              <a:srgbClr val="000000">
-                <a:alpha val="12000"/>
-              </a:srgbClr>
-            </a:outerShdw>
-          </a:effectLst>
-        </p:spPr>
-      </p:sp>
-      <p:sp>
-        <p:nvSpPr>
-          <p:cNvPr id="5" name="Shape 3"/>
-          <p:cNvSpPr/>
-          <p:nvPr/>
-        </p:nvSpPr>
-        <p:spPr>
-          <a:xfrm>
-            <a:off x="384048" y="1143000"/>
-            <a:ext cx="502920" cy="502920"/>
-          </a:xfrm>
-          <a:prstGeom prst="ellipse">
-            <a:avLst/>
-          </a:prstGeom>
-          <a:solidFill>
-            <a:srgbClr val="1F4E79"/>
-          </a:solidFill>
-          <a:ln/>
-        </p:spPr>
-      </p:sp>
-      <p:pic>
-        <p:nvPicPr>
-          <p:cNvPr id="6" name="Image 0" descr="preencoded.png"/>
-          <p:cNvPicPr>
-            <a:picLocks noChangeAspect="1"/>
-          </p:cNvPicPr>
-          <p:nvPr/>
-        </p:nvPicPr>
-        <p:blipFill>
-          <a:blip r:embed="rId3"/>
-          <a:stretch>
-            <a:fillRect/>
-          </a:stretch>
-        </p:blipFill>
-        <p:spPr>
-          <a:xfrm>
-            <a:off x="429768" y="1188720"/>
-            <a:ext cx="384048" cy="384048"/>
-          </a:xfrm>
-          <a:prstGeom prst="rect">
-            <a:avLst/>
-          </a:prstGeom>
-        </p:spPr>
-      </p:pic>
-      <p:sp>
-        <p:nvSpPr>
-          <p:cNvPr id="7" name="Text 4"/>
-          <p:cNvSpPr/>
-          <p:nvPr/>
-        </p:nvSpPr>
-        <p:spPr>
-          <a:xfrm>
-            <a:off x="960120" y="1143000"/>
-            <a:ext cx="1920240" cy="320040"/>
-          </a:xfrm>
-          <a:prstGeom prst="rect">
-            <a:avLst/>
-          </a:prstGeom>
-          <a:noFill/>
-          <a:ln/>
-        </p:spPr>
-        <p:txBody>
-          <a:bodyPr wrap="square" rtlCol="0" anchor="ctr"/>
-          <a:lstStyle/>
-          <a:p>
-            <a:pPr marL="0" indent="0">
-              <a:buNone/>
-            </a:pPr>
-            <a:r>
-              <a:rPr lang="en-US" sz="1200" b="1" dirty="0">
-                <a:solidFill>
-                  <a:srgbClr val="1F4E79"/>
-                </a:solidFill>
-              </a:rPr>
-              <a:t>mistral-embed</a:t>
-            </a:r>
-            <a:endParaRPr lang="en-US" sz="1200" dirty="0"/>
-          </a:p>
-        </p:txBody>
-      </p:sp>
-      <p:sp>
-        <p:nvSpPr>
-          <p:cNvPr id="8" name="Text 5"/>
-          <p:cNvSpPr/>
-          <p:nvPr/>
-        </p:nvSpPr>
-        <p:spPr>
-          <a:xfrm>
-            <a:off x="960120" y="1463040"/>
-            <a:ext cx="1920240" cy="274320"/>
-          </a:xfrm>
-          <a:prstGeom prst="rect">
-            <a:avLst/>
-          </a:prstGeom>
-          <a:noFill/>
-          <a:ln/>
-        </p:spPr>
-        <p:txBody>
-          <a:bodyPr wrap="square" rtlCol="0" anchor="ctr"/>
-          <a:lstStyle/>
-          <a:p>
-            <a:pPr marL="0" indent="0">
-              <a:buNone/>
-            </a:pPr>
-            <a:r>
-              <a:rPr lang="en-US" sz="1000" i="1" dirty="0">
-                <a:solidFill>
-                  <a:srgbClr val="5D6D7E"/>
-                </a:solidFill>
-              </a:rPr>
-              <a:t>Embedding model</a:t>
-            </a:r>
-            <a:endParaRPr lang="en-US" sz="1000" dirty="0"/>
-          </a:p>
-        </p:txBody>
-      </p:sp>
-      <p:sp>
-        <p:nvSpPr>
-          <p:cNvPr id="9" name="Text 6"/>
-          <p:cNvSpPr/>
-          <p:nvPr/>
-        </p:nvSpPr>
-        <p:spPr>
-          <a:xfrm>
-            <a:off x="384048" y="1828800"/>
-            <a:ext cx="2487168" cy="914400"/>
-          </a:xfrm>
-          <a:prstGeom prst="rect">
-            <a:avLst/>
-          </a:prstGeom>
-          <a:noFill/>
-          <a:ln/>
-        </p:spPr>
-        <p:txBody>
-          <a:bodyPr wrap="square" rtlCol="0" anchor="ctr"/>
-          <a:lstStyle/>
-          <a:p>
-            <a:pPr marL="0" indent="0">
-              <a:buNone/>
-            </a:pPr>
-            <a:r>
-              <a:rPr lang="en-US" sz="1000" dirty="0">
-                <a:solidFill>
-                  <a:srgbClr val="5D6D7E"/>
-                </a:solidFill>
-              </a:rPr>
-              <a:t>1,024 dimensions. Optimised French support. Same provider as LLM for tokenisation consistency.</a:t>
-            </a:r>
-            <a:endParaRPr lang="en-US" sz="1000" dirty="0"/>
-          </a:p>
-        </p:txBody>
-      </p:sp>
-      <p:sp>
-        <p:nvSpPr>
-          <p:cNvPr id="10" name="Shape 7"/>
-          <p:cNvSpPr/>
-          <p:nvPr/>
-        </p:nvSpPr>
-        <p:spPr>
-          <a:xfrm>
-            <a:off x="3154680" y="1051560"/>
-            <a:ext cx="2697480" cy="1783080"/>
-          </a:xfrm>
-          <a:prstGeom prst="roundRect">
-            <a:avLst>
-              <a:gd name="adj" fmla="val 5128"/>
-            </a:avLst>
-          </a:prstGeom>
-          <a:solidFill>
-            <a:srgbClr val="F2F6FA"/>
-          </a:solidFill>
-          <a:ln/>
-          <a:effectLst>
-            <a:outerShdw blurRad="101600" dist="38100" dir="2700000" algn="bl" rotWithShape="0">
-              <a:srgbClr val="000000">
-                <a:alpha val="12000"/>
-              </a:srgbClr>
-            </a:outerShdw>
-          </a:effectLst>
-        </p:spPr>
-      </p:sp>
-      <p:sp>
-        <p:nvSpPr>
-          <p:cNvPr id="11" name="Shape 8"/>
-          <p:cNvSpPr/>
-          <p:nvPr/>
-        </p:nvSpPr>
-        <p:spPr>
-          <a:xfrm>
-            <a:off x="3264408" y="1143000"/>
-            <a:ext cx="502920" cy="502920"/>
-          </a:xfrm>
-          <a:prstGeom prst="ellipse">
-            <a:avLst/>
-          </a:prstGeom>
-          <a:solidFill>
-            <a:srgbClr val="2E75B6"/>
-          </a:solidFill>
-          <a:ln/>
-        </p:spPr>
-      </p:sp>
-      <p:pic>
-        <p:nvPicPr>
-          <p:cNvPr id="12" name="Image 1" descr="preencoded.png"/>
-          <p:cNvPicPr>
-            <a:picLocks noChangeAspect="1"/>
-          </p:cNvPicPr>
-          <p:nvPr/>
-        </p:nvPicPr>
-        <p:blipFill>
-          <a:blip r:embed="rId4"/>
-          <a:stretch>
-            <a:fillRect/>
-          </a:stretch>
-        </p:blipFill>
-        <p:spPr>
-          <a:xfrm>
-            <a:off x="3310128" y="1188720"/>
-            <a:ext cx="384048" cy="384048"/>
-          </a:xfrm>
-          <a:prstGeom prst="rect">
-            <a:avLst/>
-          </a:prstGeom>
-        </p:spPr>
-      </p:pic>
-      <p:sp>
-        <p:nvSpPr>
-          <p:cNvPr id="13" name="Text 9"/>
-          <p:cNvSpPr/>
-          <p:nvPr/>
-        </p:nvSpPr>
-        <p:spPr>
-          <a:xfrm>
-            <a:off x="3840480" y="1143000"/>
-            <a:ext cx="1920240" cy="320040"/>
-          </a:xfrm>
-          <a:prstGeom prst="rect">
-            <a:avLst/>
-          </a:prstGeom>
-          <a:noFill/>
-          <a:ln/>
-        </p:spPr>
-        <p:txBody>
-          <a:bodyPr wrap="square" rtlCol="0" anchor="ctr"/>
-          <a:lstStyle/>
-          <a:p>
-            <a:pPr marL="0" indent="0">
-              <a:buNone/>
-            </a:pPr>
-            <a:r>
-              <a:rPr lang="en-US" sz="1200" b="1" dirty="0">
-                <a:solidFill>
-                  <a:srgbClr val="1F4E79"/>
-                </a:solidFill>
-              </a:rPr>
-              <a:t>FAISS IndexFlatL2</a:t>
-            </a:r>
-            <a:endParaRPr lang="en-US" sz="1200" dirty="0"/>
-          </a:p>
-        </p:txBody>
-      </p:sp>
-      <p:sp>
-        <p:nvSpPr>
-          <p:cNvPr id="14" name="Text 10"/>
-          <p:cNvSpPr/>
-          <p:nvPr/>
-        </p:nvSpPr>
-        <p:spPr>
-          <a:xfrm>
-            <a:off x="3840480" y="1463040"/>
-            <a:ext cx="1920240" cy="274320"/>
-          </a:xfrm>
-          <a:prstGeom prst="rect">
-            <a:avLst/>
-          </a:prstGeom>
-          <a:noFill/>
-          <a:ln/>
-        </p:spPr>
-        <p:txBody>
-          <a:bodyPr wrap="square" rtlCol="0" anchor="ctr"/>
-          <a:lstStyle/>
-          <a:p>
-            <a:pPr marL="0" indent="0">
-              <a:buNone/>
-            </a:pPr>
-            <a:r>
-              <a:rPr lang="en-US" sz="1000" i="1" dirty="0">
-                <a:solidFill>
-                  <a:srgbClr val="5D6D7E"/>
-                </a:solidFill>
-              </a:rPr>
-              <a:t>Vector database</a:t>
-            </a:r>
-            <a:endParaRPr lang="en-US" sz="1000" dirty="0"/>
-          </a:p>
-        </p:txBody>
-      </p:sp>
-      <p:sp>
-        <p:nvSpPr>
-          <p:cNvPr id="15" name="Text 11"/>
-          <p:cNvSpPr/>
-          <p:nvPr/>
-        </p:nvSpPr>
-        <p:spPr>
-          <a:xfrm>
-            <a:off x="3264408" y="1828800"/>
-            <a:ext cx="2487168" cy="914400"/>
-          </a:xfrm>
-          <a:prstGeom prst="rect">
-            <a:avLst/>
-          </a:prstGeom>
-          <a:noFill/>
-          <a:ln/>
-        </p:spPr>
-        <p:txBody>
-          <a:bodyPr wrap="square" rtlCol="0" anchor="ctr"/>
-          <a:lstStyle/>
-          <a:p>
-            <a:pPr marL="0" indent="0">
-              <a:buNone/>
-            </a:pPr>
-            <a:r>
-              <a:rPr lang="en-US" sz="1000" dirty="0">
-                <a:solidFill>
-                  <a:srgbClr val="5D6D7E"/>
-                </a:solidFill>
-              </a:rPr>
-              <a:t>Exact search in under 1 ms on 1,740 vectors. Zero configuration for POC. Scalable with IVFFlat in production.</a:t>
-            </a:r>
-            <a:endParaRPr lang="en-US" sz="1000" dirty="0"/>
-          </a:p>
-        </p:txBody>
-      </p:sp>
-      <p:sp>
-        <p:nvSpPr>
-          <p:cNvPr id="16" name="Shape 12"/>
-          <p:cNvSpPr/>
-          <p:nvPr/>
-        </p:nvSpPr>
-        <p:spPr>
-          <a:xfrm>
-            <a:off x="6035040" y="1051560"/>
-            <a:ext cx="2697480" cy="1783080"/>
-          </a:xfrm>
-          <a:prstGeom prst="roundRect">
-            <a:avLst>
-              <a:gd name="adj" fmla="val 5128"/>
-            </a:avLst>
-          </a:prstGeom>
-          <a:solidFill>
-            <a:srgbClr val="F2F6FA"/>
-          </a:solidFill>
-          <a:ln/>
-          <a:effectLst>
-            <a:outerShdw blurRad="101600" dist="38100" dir="2700000" algn="bl" rotWithShape="0">
-              <a:srgbClr val="000000">
-                <a:alpha val="12000"/>
-              </a:srgbClr>
-            </a:outerShdw>
-          </a:effectLst>
-        </p:spPr>
-      </p:sp>
-      <p:sp>
-        <p:nvSpPr>
-          <p:cNvPr id="17" name="Shape 13"/>
-          <p:cNvSpPr/>
-          <p:nvPr/>
-        </p:nvSpPr>
-        <p:spPr>
-          <a:xfrm>
-            <a:off x="6144768" y="1143000"/>
-            <a:ext cx="502920" cy="502920"/>
-          </a:xfrm>
-          <a:prstGeom prst="ellipse">
-            <a:avLst/>
-          </a:prstGeom>
-          <a:solidFill>
-            <a:srgbClr val="028090"/>
-          </a:solidFill>
-          <a:ln/>
-        </p:spPr>
-      </p:sp>
-      <p:pic>
-        <p:nvPicPr>
-          <p:cNvPr id="18" name="Image 2" descr="preencoded.png"/>
-          <p:cNvPicPr>
-            <a:picLocks noChangeAspect="1"/>
-          </p:cNvPicPr>
-          <p:nvPr/>
-        </p:nvPicPr>
-        <p:blipFill>
-          <a:blip r:embed="rId5"/>
-          <a:stretch>
-            <a:fillRect/>
-          </a:stretch>
-        </p:blipFill>
-        <p:spPr>
-          <a:xfrm>
-            <a:off x="6190488" y="1188720"/>
-            <a:ext cx="384048" cy="384048"/>
-          </a:xfrm>
-          <a:prstGeom prst="rect">
-            <a:avLst/>
-          </a:prstGeom>
-        </p:spPr>
-      </p:pic>
-      <p:sp>
-        <p:nvSpPr>
-          <p:cNvPr id="19" name="Text 14"/>
-          <p:cNvSpPr/>
-          <p:nvPr/>
-        </p:nvSpPr>
-        <p:spPr>
-          <a:xfrm>
-            <a:off x="6720840" y="1143000"/>
-            <a:ext cx="1920240" cy="320040"/>
-          </a:xfrm>
-          <a:prstGeom prst="rect">
-            <a:avLst/>
-          </a:prstGeom>
-          <a:noFill/>
-          <a:ln/>
-        </p:spPr>
-        <p:txBody>
-          <a:bodyPr wrap="square" rtlCol="0" anchor="ctr"/>
-          <a:lstStyle/>
-          <a:p>
-            <a:pPr marL="0" indent="0">
-              <a:buNone/>
-            </a:pPr>
-            <a:r>
-              <a:rPr lang="en-US" sz="1200" b="1" dirty="0">
-                <a:solidFill>
-                  <a:srgbClr val="1F4E79"/>
-                </a:solidFill>
-              </a:rPr>
-              <a:t>mistral-small-latest</a:t>
-            </a:r>
-            <a:endParaRPr lang="en-US" sz="1200" dirty="0"/>
-          </a:p>
-        </p:txBody>
-      </p:sp>
-      <p:sp>
-        <p:nvSpPr>
-          <p:cNvPr id="20" name="Text 15"/>
-          <p:cNvSpPr/>
-          <p:nvPr/>
-        </p:nvSpPr>
-        <p:spPr>
-          <a:xfrm>
-            <a:off x="6720840" y="1463040"/>
-            <a:ext cx="1920240" cy="274320"/>
-          </a:xfrm>
-          <a:prstGeom prst="rect">
-            <a:avLst/>
-          </a:prstGeom>
-          <a:noFill/>
-          <a:ln/>
-        </p:spPr>
-        <p:txBody>
-          <a:bodyPr wrap="square" rtlCol="0" anchor="ctr"/>
-          <a:lstStyle/>
-          <a:p>
-            <a:pPr marL="0" indent="0">
-              <a:buNone/>
-            </a:pPr>
-            <a:r>
-              <a:rPr lang="en-US" sz="1000" i="1" dirty="0">
-                <a:solidFill>
-                  <a:srgbClr val="5D6D7E"/>
-                </a:solidFill>
-              </a:rPr>
-              <a:t>Generation model</a:t>
-            </a:r>
-            <a:endParaRPr lang="en-US" sz="1000" dirty="0"/>
-          </a:p>
-        </p:txBody>
-      </p:sp>
-      <p:sp>
-        <p:nvSpPr>
-          <p:cNvPr id="21" name="Text 16"/>
-          <p:cNvSpPr/>
-          <p:nvPr/>
-        </p:nvSpPr>
-        <p:spPr>
-          <a:xfrm>
-            <a:off x="6144768" y="1828800"/>
-            <a:ext cx="2487168" cy="914400"/>
-          </a:xfrm>
-          <a:prstGeom prst="rect">
-            <a:avLst/>
-          </a:prstGeom>
-          <a:noFill/>
-          <a:ln/>
-        </p:spPr>
-        <p:txBody>
-          <a:bodyPr wrap="square" rtlCol="0" anchor="ctr"/>
-          <a:lstStyle/>
-          <a:p>
-            <a:pPr marL="0" indent="0">
-              <a:buNone/>
-            </a:pPr>
-            <a:r>
-              <a:rPr lang="en-US" sz="1000" dirty="0">
-                <a:solidFill>
-                  <a:srgbClr val="5D6D7E"/>
-                </a:solidFill>
-              </a:rPr>
-              <a:t>Temperature 0.1. Free tier. French responses. Strict system prompt: zero hallucination.</a:t>
-            </a:r>
-            <a:endParaRPr lang="en-US" sz="1000" dirty="0"/>
-          </a:p>
-        </p:txBody>
-      </p:sp>
-      <p:sp>
-        <p:nvSpPr>
-          <p:cNvPr id="22" name="Shape 17"/>
-          <p:cNvSpPr/>
-          <p:nvPr/>
-        </p:nvSpPr>
-        <p:spPr>
-          <a:xfrm>
-            <a:off x="274320" y="2971800"/>
-            <a:ext cx="2697480" cy="1783080"/>
-          </a:xfrm>
-          <a:prstGeom prst="roundRect">
-            <a:avLst>
-              <a:gd name="adj" fmla="val 5128"/>
-            </a:avLst>
-          </a:prstGeom>
-          <a:solidFill>
-            <a:srgbClr val="F2F6FA"/>
-          </a:solidFill>
-          <a:ln/>
-          <a:effectLst>
-            <a:outerShdw blurRad="101600" dist="38100" dir="2700000" algn="bl" rotWithShape="0">
-              <a:srgbClr val="000000">
-                <a:alpha val="12000"/>
-              </a:srgbClr>
-            </a:outerShdw>
-          </a:effectLst>
-        </p:spPr>
-      </p:sp>
-      <p:sp>
-        <p:nvSpPr>
-          <p:cNvPr id="23" name="Shape 18"/>
-          <p:cNvSpPr/>
-          <p:nvPr/>
-        </p:nvSpPr>
-        <p:spPr>
-          <a:xfrm>
-            <a:off x="384048" y="3063240"/>
-            <a:ext cx="502920" cy="502920"/>
-          </a:xfrm>
-          <a:prstGeom prst="ellipse">
-            <a:avLst/>
-          </a:prstGeom>
-          <a:solidFill>
-            <a:srgbClr val="1F4E79"/>
-          </a:solidFill>
-          <a:ln/>
-        </p:spPr>
-      </p:sp>
-      <p:pic>
-        <p:nvPicPr>
-          <p:cNvPr id="24" name="Image 3" descr="preencoded.png"/>
-          <p:cNvPicPr>
-            <a:picLocks noChangeAspect="1"/>
-          </p:cNvPicPr>
-          <p:nvPr/>
-        </p:nvPicPr>
-        <p:blipFill>
-          <a:blip r:embed="rId6"/>
-          <a:stretch>
-            <a:fillRect/>
-          </a:stretch>
-        </p:blipFill>
-        <p:spPr>
-          <a:xfrm>
-            <a:off x="429768" y="3108960"/>
-            <a:ext cx="384048" cy="384048"/>
-          </a:xfrm>
-          <a:prstGeom prst="rect">
-            <a:avLst/>
-          </a:prstGeom>
-        </p:spPr>
-      </p:pic>
-      <p:sp>
-        <p:nvSpPr>
-          <p:cNvPr id="25" name="Text 19"/>
-          <p:cNvSpPr/>
-          <p:nvPr/>
-        </p:nvSpPr>
-        <p:spPr>
-          <a:xfrm>
-            <a:off x="960120" y="3063240"/>
-            <a:ext cx="1920240" cy="320040"/>
-          </a:xfrm>
-          <a:prstGeom prst="rect">
-            <a:avLst/>
-          </a:prstGeom>
-          <a:noFill/>
-          <a:ln/>
-        </p:spPr>
-        <p:txBody>
-          <a:bodyPr wrap="square" rtlCol="0" anchor="ctr"/>
-          <a:lstStyle/>
-          <a:p>
-            <a:pPr marL="0" indent="0">
-              <a:buNone/>
-            </a:pPr>
-            <a:r>
-              <a:rPr lang="en-US" sz="1200" b="1" dirty="0">
-                <a:solidFill>
-                  <a:srgbClr val="1F4E79"/>
-                </a:solidFill>
-              </a:rPr>
-              <a:t>Poetry + Python 3.13</a:t>
-            </a:r>
-            <a:endParaRPr lang="en-US" sz="1200" dirty="0"/>
-          </a:p>
-        </p:txBody>
-      </p:sp>
-      <p:sp>
-        <p:nvSpPr>
-          <p:cNvPr id="26" name="Text 20"/>
-          <p:cNvSpPr/>
-          <p:nvPr/>
-        </p:nvSpPr>
-        <p:spPr>
-          <a:xfrm>
-            <a:off x="960120" y="3383280"/>
-            <a:ext cx="1920240" cy="274320"/>
-          </a:xfrm>
-          <a:prstGeom prst="rect">
-            <a:avLst/>
-          </a:prstGeom>
-          <a:noFill/>
-          <a:ln/>
-        </p:spPr>
-        <p:txBody>
-          <a:bodyPr wrap="square" rtlCol="0" anchor="ctr"/>
-          <a:lstStyle/>
-          <a:p>
-            <a:pPr marL="0" indent="0">
-              <a:buNone/>
-            </a:pPr>
-            <a:r>
-              <a:rPr lang="en-US" sz="1000" i="1" dirty="0">
-                <a:solidFill>
-                  <a:srgbClr val="5D6D7E"/>
-                </a:solidFill>
-              </a:rPr>
-              <a:t>Environment</a:t>
-            </a:r>
-            <a:endParaRPr lang="en-US" sz="1000" dirty="0"/>
-          </a:p>
-        </p:txBody>
-      </p:sp>
-      <p:sp>
-        <p:nvSpPr>
-          <p:cNvPr id="27" name="Text 21"/>
-          <p:cNvSpPr/>
-          <p:nvPr/>
-        </p:nvSpPr>
-        <p:spPr>
-          <a:xfrm>
-            <a:off x="384048" y="3749040"/>
-            <a:ext cx="2487168" cy="914400"/>
-          </a:xfrm>
-          <a:prstGeom prst="rect">
-            <a:avLst/>
-          </a:prstGeom>
-          <a:noFill/>
-          <a:ln/>
-        </p:spPr>
-        <p:txBody>
-          <a:bodyPr wrap="square" rtlCol="0" anchor="ctr"/>
-          <a:lstStyle/>
-          <a:p>
-            <a:pPr marL="0" indent="0">
-              <a:buNone/>
-            </a:pPr>
-            <a:r>
-              <a:rPr lang="en-US" sz="1000" dirty="0">
-                <a:solidFill>
-                  <a:srgbClr val="5D6D7E"/>
-                </a:solidFill>
-              </a:rPr>
-              <a:t>Lock file for reproducibility. Python bounded to 3.13-3.15. mistralai pinned to 1.2.5.</a:t>
-            </a:r>
-            <a:endParaRPr lang="en-US" sz="1000" dirty="0"/>
-          </a:p>
-        </p:txBody>
-      </p:sp>
-      <p:sp>
-        <p:nvSpPr>
-          <p:cNvPr id="28" name="Shape 22"/>
-          <p:cNvSpPr/>
-          <p:nvPr/>
-        </p:nvSpPr>
-        <p:spPr>
-          <a:xfrm>
-            <a:off x="3154680" y="2971800"/>
-            <a:ext cx="2697480" cy="1783080"/>
-          </a:xfrm>
-          <a:prstGeom prst="roundRect">
-            <a:avLst>
-              <a:gd name="adj" fmla="val 5128"/>
-            </a:avLst>
-          </a:prstGeom>
-          <a:solidFill>
-            <a:srgbClr val="F2F6FA"/>
-          </a:solidFill>
-          <a:ln/>
-          <a:effectLst>
-            <a:outerShdw blurRad="101600" dist="38100" dir="2700000" algn="bl" rotWithShape="0">
-              <a:srgbClr val="000000">
-                <a:alpha val="12000"/>
-              </a:srgbClr>
-            </a:outerShdw>
-          </a:effectLst>
-        </p:spPr>
-      </p:sp>
-      <p:sp>
-        <p:nvSpPr>
-          <p:cNvPr id="29" name="Shape 23"/>
-          <p:cNvSpPr/>
-          <p:nvPr/>
-        </p:nvSpPr>
-        <p:spPr>
-          <a:xfrm>
-            <a:off x="3264408" y="3063240"/>
-            <a:ext cx="502920" cy="502920"/>
-          </a:xfrm>
-          <a:prstGeom prst="ellipse">
-            <a:avLst/>
-          </a:prstGeom>
-          <a:solidFill>
-            <a:srgbClr val="2E75B6"/>
-          </a:solidFill>
-          <a:ln/>
-        </p:spPr>
-      </p:sp>
-      <p:pic>
-        <p:nvPicPr>
-          <p:cNvPr id="30" name="Image 4" descr="preencoded.png"/>
-          <p:cNvPicPr>
-            <a:picLocks noChangeAspect="1"/>
-          </p:cNvPicPr>
-          <p:nvPr/>
-        </p:nvPicPr>
-        <p:blipFill>
-          <a:blip r:embed="rId7"/>
-          <a:stretch>
-            <a:fillRect/>
-          </a:stretch>
-        </p:blipFill>
-        <p:spPr>
-          <a:xfrm>
-            <a:off x="3310128" y="3108960"/>
-            <a:ext cx="384048" cy="384048"/>
-          </a:xfrm>
-          <a:prstGeom prst="rect">
-            <a:avLst/>
-          </a:prstGeom>
-        </p:spPr>
-      </p:pic>
-      <p:sp>
-        <p:nvSpPr>
-          <p:cNvPr id="31" name="Text 24"/>
-          <p:cNvSpPr/>
-          <p:nvPr/>
-        </p:nvSpPr>
-        <p:spPr>
-          <a:xfrm>
-            <a:off x="3840480" y="3063240"/>
-            <a:ext cx="1920240" cy="320040"/>
-          </a:xfrm>
-          <a:prstGeom prst="rect">
-            <a:avLst/>
-          </a:prstGeom>
-          <a:noFill/>
-          <a:ln/>
-        </p:spPr>
-        <p:txBody>
-          <a:bodyPr wrap="square" rtlCol="0" anchor="ctr"/>
-          <a:lstStyle/>
-          <a:p>
-            <a:pPr marL="0" indent="0">
-              <a:buNone/>
-            </a:pPr>
-            <a:r>
-              <a:rPr lang="en-US" sz="1200" b="1" dirty="0">
-                <a:solidFill>
-                  <a:srgbClr val="1F4E79"/>
-                </a:solidFill>
-              </a:rPr>
-              <a:t>1 chunk per event</a:t>
-            </a:r>
-            <a:endParaRPr lang="en-US" sz="1200" dirty="0"/>
-          </a:p>
-        </p:txBody>
-      </p:sp>
-      <p:sp>
-        <p:nvSpPr>
-          <p:cNvPr id="32" name="Text 25"/>
-          <p:cNvSpPr/>
-          <p:nvPr/>
-        </p:nvSpPr>
-        <p:spPr>
-          <a:xfrm>
-            <a:off x="3840480" y="3383280"/>
-            <a:ext cx="1920240" cy="274320"/>
-          </a:xfrm>
-          <a:prstGeom prst="rect">
-            <a:avLst/>
-          </a:prstGeom>
-          <a:noFill/>
-          <a:ln/>
-        </p:spPr>
-        <p:txBody>
-          <a:bodyPr wrap="square" rtlCol="0" anchor="ctr"/>
-          <a:lstStyle/>
-          <a:p>
-            <a:pPr marL="0" indent="0">
-              <a:buNone/>
-            </a:pPr>
-            <a:r>
-              <a:rPr lang="en-US" sz="1000" i="1" dirty="0">
-                <a:solidFill>
-                  <a:srgbClr val="5D6D7E"/>
-                </a:solidFill>
-              </a:rPr>
-              <a:t>Chunking strategy</a:t>
-            </a:r>
-            <a:endParaRPr lang="en-US" sz="1000" dirty="0"/>
-          </a:p>
-        </p:txBody>
-      </p:sp>
-      <p:sp>
-        <p:nvSpPr>
-          <p:cNvPr id="33" name="Text 26"/>
-          <p:cNvSpPr/>
-          <p:nvPr/>
-        </p:nvSpPr>
-        <p:spPr>
-          <a:xfrm>
-            <a:off x="3264408" y="3749040"/>
-            <a:ext cx="2487168" cy="914400"/>
-          </a:xfrm>
-          <a:prstGeom prst="rect">
-            <a:avLst/>
-          </a:prstGeom>
-          <a:noFill/>
-          <a:ln/>
-        </p:spPr>
-        <p:txBody>
-          <a:bodyPr wrap="square" rtlCol="0" anchor="ctr"/>
-          <a:lstStyle/>
-          <a:p>
-            <a:pPr marL="0" indent="0">
-              <a:buNone/>
-            </a:pPr>
-            <a:r>
-              <a:rPr lang="en-US" sz="1000" dirty="0">
-                <a:solidFill>
-                  <a:srgbClr val="5D6D7E"/>
-                </a:solidFill>
-              </a:rPr>
-              <a:t>Median 50 characters. No recursive splitting. Concatenate title + description + venue + date.</a:t>
-            </a:r>
-            <a:endParaRPr lang="en-US" sz="1000" dirty="0"/>
-          </a:p>
-        </p:txBody>
-      </p:sp>
-      <p:sp>
-        <p:nvSpPr>
-          <p:cNvPr id="34" name="Shape 27"/>
-          <p:cNvSpPr/>
-          <p:nvPr/>
-        </p:nvSpPr>
-        <p:spPr>
-          <a:xfrm>
-            <a:off x="6035040" y="2971800"/>
-            <a:ext cx="2697480" cy="1783080"/>
-          </a:xfrm>
-          <a:prstGeom prst="roundRect">
-            <a:avLst>
-              <a:gd name="adj" fmla="val 5128"/>
-            </a:avLst>
-          </a:prstGeom>
-          <a:solidFill>
-            <a:srgbClr val="F2F6FA"/>
-          </a:solidFill>
-          <a:ln/>
-          <a:effectLst>
-            <a:outerShdw blurRad="101600" dist="38100" dir="2700000" algn="bl" rotWithShape="0">
-              <a:srgbClr val="000000">
-                <a:alpha val="12000"/>
-              </a:srgbClr>
-            </a:outerShdw>
-          </a:effectLst>
-        </p:spPr>
-      </p:sp>
-      <p:sp>
-        <p:nvSpPr>
-          <p:cNvPr id="35" name="Shape 28"/>
-          <p:cNvSpPr/>
-          <p:nvPr/>
-        </p:nvSpPr>
-        <p:spPr>
-          <a:xfrm>
-            <a:off x="6144768" y="3063240"/>
-            <a:ext cx="502920" cy="502920"/>
-          </a:xfrm>
-          <a:prstGeom prst="ellipse">
-            <a:avLst/>
-          </a:prstGeom>
-          <a:solidFill>
-            <a:srgbClr val="028090"/>
-          </a:solidFill>
-          <a:ln/>
-        </p:spPr>
-      </p:sp>
-      <p:pic>
-        <p:nvPicPr>
-          <p:cNvPr id="36" name="Image 5" descr="preencoded.png"/>
-          <p:cNvPicPr>
-            <a:picLocks noChangeAspect="1"/>
-          </p:cNvPicPr>
-          <p:nvPr/>
-        </p:nvPicPr>
-        <p:blipFill>
-          <a:blip r:embed="rId8"/>
-          <a:stretch>
-            <a:fillRect/>
-          </a:stretch>
-        </p:blipFill>
-        <p:spPr>
-          <a:xfrm>
-            <a:off x="6190488" y="3108960"/>
-            <a:ext cx="384048" cy="384048"/>
-          </a:xfrm>
-          <a:prstGeom prst="rect">
-            <a:avLst/>
-          </a:prstGeom>
-        </p:spPr>
-      </p:pic>
-      <p:sp>
-        <p:nvSpPr>
-          <p:cNvPr id="37" name="Text 29"/>
-          <p:cNvSpPr/>
-          <p:nvPr/>
-        </p:nvSpPr>
-        <p:spPr>
-          <a:xfrm>
-            <a:off x="6720840" y="3063240"/>
-            <a:ext cx="1920240" cy="320040"/>
-          </a:xfrm>
-          <a:prstGeom prst="rect">
-            <a:avLst/>
-          </a:prstGeom>
-          <a:noFill/>
-          <a:ln/>
-        </p:spPr>
-        <p:txBody>
-          <a:bodyPr wrap="square" rtlCol="0" anchor="ctr"/>
-          <a:lstStyle/>
-          <a:p>
-            <a:pPr marL="0" indent="0">
-              <a:buNone/>
-            </a:pPr>
-            <a:r>
-              <a:rPr lang="en-US" sz="1200" b="1" dirty="0">
-                <a:solidFill>
-                  <a:srgbClr val="1F4E79"/>
-                </a:solidFill>
-              </a:rPr>
-              <a:t>Streamlit</a:t>
-            </a:r>
-            <a:endParaRPr lang="en-US" sz="1200" dirty="0"/>
-          </a:p>
-        </p:txBody>
-      </p:sp>
-      <p:sp>
-        <p:nvSpPr>
-          <p:cNvPr id="38" name="Text 30"/>
-          <p:cNvSpPr/>
-          <p:nvPr/>
-        </p:nvSpPr>
-        <p:spPr>
-          <a:xfrm>
-            <a:off x="6720840" y="3383280"/>
-            <a:ext cx="1920240" cy="274320"/>
-          </a:xfrm>
-          <a:prstGeom prst="rect">
-            <a:avLst/>
-          </a:prstGeom>
-          <a:noFill/>
-          <a:ln/>
-        </p:spPr>
-        <p:txBody>
-          <a:bodyPr wrap="square" rtlCol="0" anchor="ctr"/>
-          <a:lstStyle/>
-          <a:p>
-            <a:pPr marL="0" indent="0">
-              <a:buNone/>
-            </a:pPr>
-            <a:r>
-              <a:rPr lang="en-US" sz="1000" i="1" dirty="0">
-                <a:solidFill>
-                  <a:srgbClr val="5D6D7E"/>
-                </a:solidFill>
-              </a:rPr>
-              <a:t>Interface</a:t>
-            </a:r>
-            <a:endParaRPr lang="en-US" sz="1000" dirty="0"/>
-          </a:p>
-        </p:txBody>
-      </p:sp>
-      <p:sp>
-        <p:nvSpPr>
-          <p:cNvPr id="39" name="Text 31"/>
-          <p:cNvSpPr/>
-          <p:nvPr/>
-        </p:nvSpPr>
-        <p:spPr>
-          <a:xfrm>
-            <a:off x="6144768" y="3749040"/>
-            <a:ext cx="2487168" cy="914400"/>
-          </a:xfrm>
-          <a:prstGeom prst="rect">
-            <a:avLst/>
-          </a:prstGeom>
-          <a:noFill/>
-          <a:ln/>
-        </p:spPr>
-        <p:txBody>
-          <a:bodyPr wrap="square" rtlCol="0" anchor="ctr"/>
-          <a:lstStyle/>
-          <a:p>
-            <a:pPr marL="0" indent="0">
-              <a:buNone/>
-            </a:pPr>
-            <a:r>
-              <a:rPr lang="en-US" sz="1000" dirty="0">
-                <a:solidFill>
-                  <a:srgbClr val="5D6D7E"/>
-                </a:solidFill>
-              </a:rPr>
-              <a:t>Conversational interface with source sidebar. Single load via @st.cache_resource.</a:t>
-            </a:r>
-            <a:endParaRPr lang="en-US" sz="1000" dirty="0"/>
-          </a:p>
-        </p:txBody>
-      </p:sp>
-    </p:spTree>
-    <p:extLst>
-      <p:ext uri="{BB962C8B-B14F-4D97-AF65-F5344CB8AC3E}">
-        <p14:creationId xmlns:p14="http://schemas.microsoft.com/office/powerpoint/2010/main" val="3449270898"/>
-      </p:ext>
-    </p:extLst>
-  </p:cSld>
-  <p:clrMapOvr>
-    <a:masterClrMapping/>
-  </p:clrMapOvr>
-</p:sld>
-</file>
-
-<file path=ppt/slides/slide14.xml><?xml version="1.0" encoding="utf-8"?>
-<p:sld xmlns:a="http://schemas.openxmlformats.org/drawingml/2006/main" xmlns:r="http://schemas.openxmlformats.org/officeDocument/2006/relationships" xmlns:p="http://schemas.openxmlformats.org/presentationml/2006/main">
-  <p:cSld name="Deliverables Submitted">
-    <p:bg>
-      <p:bgPr>
-        <a:solidFill>
-          <a:srgbClr val="FFFFFF"/>
-        </a:solidFill>
-        <a:effectLst/>
-      </p:bgPr>
-    </p:bg>
-    <p:spTree>
-      <p:nvGrpSpPr>
-        <p:cNvPr id="1" name=""/>
-        <p:cNvGrpSpPr/>
-        <p:nvPr/>
-      </p:nvGrpSpPr>
-      <p:grpSpPr>
-        <a:xfrm>
-          <a:off x="0" y="0"/>
-          <a:ext cx="0" cy="0"/>
-          <a:chOff x="0" y="0"/>
-          <a:chExt cx="0" cy="0"/>
-        </a:xfrm>
-      </p:grpSpPr>
-      <p:sp>
-        <p:nvSpPr>
-          <p:cNvPr id="2" name="Shape 0"/>
-          <p:cNvSpPr/>
-          <p:nvPr/>
-        </p:nvSpPr>
-        <p:spPr>
-          <a:xfrm>
-            <a:off x="0" y="0"/>
-            <a:ext cx="9144000" cy="914400"/>
-          </a:xfrm>
-          <a:prstGeom prst="rect">
-            <a:avLst/>
-          </a:prstGeom>
-          <a:solidFill>
-            <a:srgbClr val="1F4E79"/>
-          </a:solidFill>
-          <a:ln/>
-        </p:spPr>
-      </p:sp>
-      <p:sp>
-        <p:nvSpPr>
-          <p:cNvPr id="3" name="Text 1"/>
-          <p:cNvSpPr/>
-          <p:nvPr/>
-        </p:nvSpPr>
-        <p:spPr>
-          <a:xfrm>
-            <a:off x="365760" y="0"/>
-            <a:ext cx="8412480" cy="914400"/>
-          </a:xfrm>
-          <a:prstGeom prst="rect">
-            <a:avLst/>
-          </a:prstGeom>
-          <a:noFill/>
-          <a:ln/>
-        </p:spPr>
-        <p:txBody>
-          <a:bodyPr wrap="square" rtlCol="0" anchor="ctr"/>
-          <a:lstStyle/>
-          <a:p>
-            <a:pPr marL="0" indent="0">
-              <a:buNone/>
-            </a:pPr>
-            <a:r>
-              <a:rPr lang="en-US" sz="2200" b="1" dirty="0">
-                <a:solidFill>
-                  <a:srgbClr val="FFFFFF"/>
-                </a:solidFill>
-              </a:rPr>
-              <a:t>DELIVERABLES SUBMITTED</a:t>
-            </a:r>
-            <a:endParaRPr lang="en-US" sz="2200" dirty="0"/>
-          </a:p>
-        </p:txBody>
-      </p:sp>
-      <p:sp>
-        <p:nvSpPr>
           <p:cNvPr id="10" name="Card1"/>
           <p:cNvSpPr/>
           <p:nvPr/>
         </p:nvSpPr>
         <p:spPr>
           <a:xfrm>
-            <a:off x="274320" y="1051560"/>
+            <a:off x="420624" y="1069848"/>
             <a:ext cx="4114800" cy="685800"/>
           </a:xfrm>
           <a:prstGeom prst="roundRect">
@@ -6422,7 +7645,9 @@
       <p:sp>
         <p:nvSpPr>
           <p:cNvPr id="90" name="Notes"/>
-          <p:cNvSpPr/>
+          <p:cNvSpPr>
+            <a:spLocks noGrp="1"/>
+          </p:cNvSpPr>
           <p:nvPr>
             <p:ph type="body" idx="1"/>
           </p:nvPr>
@@ -6432,747 +7657,16 @@
           <a:bodyPr/>
           <a:lstStyle/>
           <a:p>
-            <a:r>
-              <a:t>Present each deliverable in one sentence. Emphasise: (1) the README covers full reproduction in one command, (2) Poetry guarantees an identical environment on every machine, (3) docstrings are integrated into the production code, (4) the 25 tests run before deployment and block the pipeline if any fail, (5) the report covers architecture, results, and recommendations, (6) all code is version-controlled on Git. The naming convention at the bottom matches the platform submission requirements.</a:t>
-            </a:r>
+            <a:endParaRPr dirty="0"/>
           </a:p>
         </p:txBody>
       </p:sp>
     </p:spTree>
-  </p:cSld>
-  <p:clrMapOvr>
-    <a:masterClrMapping/>
-  </p:clrMapOvr>
-</p:sld>
-</file>
-
-<file path=ppt/slides/slide15.xml><?xml version="1.0" encoding="utf-8"?>
-<p:sld xmlns:a="http://schemas.openxmlformats.org/drawingml/2006/main" xmlns:r="http://schemas.openxmlformats.org/officeDocument/2006/relationships" xmlns:p="http://schemas.openxmlformats.org/presentationml/2006/main">
-  <p:cSld name="LangChain">
-    <p:bg>
-      <p:bgPr>
-        <a:solidFill>
-          <a:srgbClr val="FFFFFF"/>
-        </a:solidFill>
-        <a:effectLst/>
-      </p:bgPr>
-    </p:bg>
-    <p:spTree>
-      <p:nvGrpSpPr>
-        <p:cNvPr id="1" name=""/>
-        <p:cNvGrpSpPr/>
-        <p:nvPr/>
-      </p:nvGrpSpPr>
-      <p:grpSpPr>
-        <a:xfrm>
-          <a:off x="0" y="0"/>
-          <a:ext cx="0" cy="0"/>
-          <a:chOff x="0" y="0"/>
-          <a:chExt cx="0" cy="0"/>
-        </a:xfrm>
-      </p:grpSpPr>
-      <p:sp>
-        <p:nvSpPr>
-          <p:cNvPr id="2" name="Header"/>
-          <p:cNvSpPr/>
-          <p:nvPr/>
-        </p:nvSpPr>
-        <p:spPr>
-          <a:xfrm>
-            <a:off x="0" y="0"/>
-            <a:ext cx="9144000" cy="914400"/>
-          </a:xfrm>
-          <a:prstGeom prst="rect">
-            <a:avLst/>
-          </a:prstGeom>
-          <a:solidFill>
-            <a:srgbClr val="1F4E79"/>
-          </a:solidFill>
-          <a:ln/>
-        </p:spPr>
-      </p:sp>
-      <p:sp>
-        <p:nvSpPr>
-          <p:cNvPr id="3" name="HeaderText"/>
-          <p:cNvSpPr/>
-          <p:nvPr/>
-        </p:nvSpPr>
-        <p:spPr>
-          <a:xfrm>
-            <a:off x="365760" y="0"/>
-            <a:ext cx="8412480" cy="914400"/>
-          </a:xfrm>
-          <a:prstGeom prst="rect">
-            <a:avLst/>
-          </a:prstGeom>
-          <a:noFill/>
-          <a:ln/>
-        </p:spPr>
-        <p:txBody>
-          <a:bodyPr wrap="square" rtlCol="0" anchor="ctr"/>
-          <a:lstStyle/>
-          <a:p>
-            <a:pPr marL="0" indent="0">
-              <a:buNone/>
-            </a:pPr>
-            <a:r>
-              <a:rPr lang="en-US" sz="2200" b="1" dirty="0">
-                <a:solidFill>
-                  <a:srgbClr val="FFFFFF"/>
-                </a:solidFill>
-              </a:rPr>
-              <a:t>WHY LANGCHAIN  |  RAG PIPELINE ORCHESTRATION</a:t>
-            </a:r>
-          </a:p>
-        </p:txBody>
-      </p:sp>
-      <p:sp>
-        <p:nvSpPr>
-          <p:cNvPr id="10" name="LeftCard"/>
-          <p:cNvSpPr/>
-          <p:nvPr/>
-        </p:nvSpPr>
-        <p:spPr>
-          <a:xfrm>
-            <a:off x="274320" y="1051560"/>
-            <a:ext cx="4114800" cy="4100400"/>
-          </a:xfrm>
-          <a:prstGeom prst="roundRect">
-            <a:avLst>
-              <a:gd name="adj" fmla="val 8000"/>
-            </a:avLst>
-          </a:prstGeom>
-          <a:solidFill>
-            <a:srgbClr val="F2F6FA"/>
-          </a:solidFill>
-          <a:ln/>
-        </p:spPr>
-      </p:sp>
-      <p:sp>
-        <p:nvSpPr>
-          <p:cNvPr id="11" name="IconCircle"/>
-          <p:cNvSpPr/>
-          <p:nvPr/>
-        </p:nvSpPr>
-        <p:spPr>
-          <a:xfrm>
-            <a:off x="457200" y="1234440"/>
-            <a:ext cx="548640" cy="548640"/>
-          </a:xfrm>
-          <a:prstGeom prst="ellipse">
-            <a:avLst/>
-          </a:prstGeom>
-          <a:solidFill>
-            <a:srgbClr val="028090"/>
-          </a:solidFill>
-          <a:ln/>
-        </p:spPr>
-      </p:sp>
-      <p:sp>
-        <p:nvSpPr>
-          <p:cNvPr id="12" name="IconText"/>
-          <p:cNvSpPr/>
-          <p:nvPr/>
-        </p:nvSpPr>
-        <p:spPr>
-          <a:xfrm>
-            <a:off x="457200" y="1234440"/>
-            <a:ext cx="548640" cy="548640"/>
-          </a:xfrm>
-          <a:prstGeom prst="rect">
-            <a:avLst/>
-          </a:prstGeom>
-          <a:noFill/>
-          <a:ln/>
-        </p:spPr>
-        <p:txBody>
-          <a:bodyPr wrap="square" lIns="0" tIns="0" rIns="0" bIns="0" rtlCol="0" anchor="ctr"/>
-          <a:lstStyle/>
-          <a:p>
-            <a:pPr marL="0" indent="0" algn="ctr">
-              <a:buNone/>
-            </a:pPr>
-            <a:r>
-              <a:rPr lang="en-US" sz="1800" b="1" dirty="0">
-                <a:solidFill>
-                  <a:srgbClr val="FFFFFF"/>
-                </a:solidFill>
-              </a:rPr>
-              <a:t>LC</a:t>
-            </a:r>
-          </a:p>
-        </p:txBody>
-      </p:sp>
-      <p:sp>
-        <p:nvSpPr>
-          <p:cNvPr id="13" name="LeftTitle"/>
-          <p:cNvSpPr/>
-          <p:nvPr/>
-        </p:nvSpPr>
-        <p:spPr>
-          <a:xfrm>
-            <a:off x="1097280" y="1270440"/>
-            <a:ext cx="3200400" cy="400000"/>
-          </a:xfrm>
-          <a:prstGeom prst="rect">
-            <a:avLst/>
-          </a:prstGeom>
-          <a:noFill/>
-          <a:ln/>
-        </p:spPr>
-        <p:txBody>
-          <a:bodyPr wrap="square" rtlCol="0" anchor="ctr"/>
-          <a:lstStyle/>
-          <a:p>
-            <a:pPr marL="0" indent="0">
-              <a:buNone/>
-            </a:pPr>
-            <a:r>
-              <a:rPr lang="en-US" sz="1600" b="1" dirty="0">
-                <a:solidFill>
-                  <a:srgbClr val="1F4E79"/>
-                </a:solidFill>
-              </a:rPr>
-              <a:t>LangChain</a:t>
-            </a:r>
-          </a:p>
-        </p:txBody>
-      </p:sp>
-      <p:sp>
-        <p:nvSpPr>
-          <p:cNvPr id="14" name="LeftSub"/>
-          <p:cNvSpPr/>
-          <p:nvPr/>
-        </p:nvSpPr>
-        <p:spPr>
-          <a:xfrm>
-            <a:off x="1097280" y="1620000"/>
-            <a:ext cx="3200400" cy="280000"/>
-          </a:xfrm>
-          <a:prstGeom prst="rect">
-            <a:avLst/>
-          </a:prstGeom>
-          <a:noFill/>
-          <a:ln/>
-        </p:spPr>
-        <p:txBody>
-          <a:bodyPr wrap="square" rtlCol="0" anchor="ctr"/>
-          <a:lstStyle/>
-          <a:p>
-            <a:pPr marL="0" indent="0">
-              <a:buNone/>
-            </a:pPr>
-            <a:r>
-              <a:rPr lang="en-US" sz="1100" i="1" dirty="0">
-                <a:solidFill>
-                  <a:srgbClr val="5D6D7E"/>
-                </a:solidFill>
-              </a:rPr>
-              <a:t>NLP orchestration framework</a:t>
-            </a:r>
-          </a:p>
-        </p:txBody>
-      </p:sp>
-      <p:sp>
-        <p:nvSpPr>
-          <p:cNvPr id="15" name="LeftBody"/>
-          <p:cNvSpPr/>
-          <p:nvPr/>
-        </p:nvSpPr>
-        <p:spPr>
-          <a:xfrm>
-            <a:off x="457200" y="2000000"/>
-            <a:ext cx="3840000" cy="3000000"/>
-          </a:xfrm>
-          <a:prstGeom prst="rect">
-            <a:avLst/>
-          </a:prstGeom>
-          <a:noFill/>
-          <a:ln/>
-        </p:spPr>
-        <p:txBody>
-          <a:bodyPr wrap="square" rtlCol="0" anchor="t"/>
-          <a:lstStyle/>
-          <a:p>
-            <a:pPr marL="228600" indent="-228600">
-              <a:buChar char="•"/>
-            </a:pPr>
-            <a:r>
-              <a:rPr lang="en-US" sz="1100" dirty="0">
-                <a:solidFill>
-                  <a:srgbClr val="5D6D7E"/>
-                </a:solidFill>
-              </a:rPr>
-              <a:t>Standardised interfaces for LLMs and vector stores — switching providers requires only a configuration change</a:t>
-            </a:r>
-          </a:p>
-          <a:p>
-            <a:pPr marL="228600" indent="-228600">
-              <a:buChar char="•"/>
-            </a:pPr>
-            <a:r>
-              <a:rPr lang="en-US" sz="1100" dirty="0">
-                <a:solidFill>
-                  <a:srgbClr val="5D6D7E"/>
-                </a:solidFill>
-              </a:rPr>
-              <a:t>Pre-built RAG chains (RetrievalQA) that orchestrate retrieval and generation in a few lines</a:t>
-            </a:r>
-          </a:p>
-          <a:p>
-            <a:pPr marL="228600" indent="-228600">
-              <a:buChar char="•"/>
-            </a:pPr>
-            <a:r>
-              <a:rPr lang="en-US" sz="1100" dirty="0">
-                <a:solidFill>
-                  <a:srgbClr val="5D6D7E"/>
-                </a:solidFill>
-              </a:rPr>
-              <a:t>Large ecosystem of connectors for dozens of LLM providers and vector databases</a:t>
-            </a:r>
-          </a:p>
-          <a:p>
-            <a:pPr marL="228600" indent="-228600">
-              <a:buChar char="•"/>
-            </a:pPr>
-            <a:r>
-              <a:rPr lang="en-US" sz="1100" dirty="0">
-                <a:solidFill>
-                  <a:srgbClr val="5D6D7E"/>
-                </a:solidFill>
-              </a:rPr>
-              <a:t>Native conversation history handling for future multi-turn versions in production</a:t>
-            </a:r>
-          </a:p>
-          <a:p>
-            <a:pPr marL="228600" indent="-228600">
-              <a:buChar char="•"/>
-            </a:pPr>
-            <a:r>
-              <a:rPr lang="en-US" sz="1100" dirty="0">
-                <a:solidFill>
-                  <a:srgbClr val="5D6D7E"/>
-                </a:solidFill>
-              </a:rPr>
-              <a:t>Single shared chain: the same module powers the live chatbot and the RAGAS evaluation</a:t>
-            </a:r>
-          </a:p>
-        </p:txBody>
-      </p:sp>
-      <p:sp>
-        <p:nvSpPr>
-          <p:cNvPr id="20" name="RightCard"/>
-          <p:cNvSpPr/>
-          <p:nvPr/>
-        </p:nvSpPr>
-        <p:spPr>
-          <a:xfrm>
-            <a:off x="4754880" y="1051560"/>
-            <a:ext cx="4114800" cy="4100400"/>
-          </a:xfrm>
-          <a:prstGeom prst="roundRect">
-            <a:avLst>
-              <a:gd name="adj" fmla="val 8000"/>
-            </a:avLst>
-          </a:prstGeom>
-          <a:solidFill>
-            <a:srgbClr val="F2F6FA"/>
-          </a:solidFill>
-          <a:ln/>
-        </p:spPr>
-      </p:sp>
-      <p:sp>
-        <p:nvSpPr>
-          <p:cNvPr id="21" name="RightTitle"/>
-          <p:cNvSpPr/>
-          <p:nvPr/>
-        </p:nvSpPr>
-        <p:spPr>
-          <a:xfrm>
-            <a:off x="5029200" y="1270440"/>
-            <a:ext cx="3657600" cy="400000"/>
-          </a:xfrm>
-          <a:prstGeom prst="rect">
-            <a:avLst/>
-          </a:prstGeom>
-          <a:noFill/>
-          <a:ln/>
-        </p:spPr>
-        <p:txBody>
-          <a:bodyPr wrap="square" rtlCol="0" anchor="ctr"/>
-          <a:lstStyle/>
-          <a:p>
-            <a:pPr marL="0" indent="0">
-              <a:buNone/>
-            </a:pPr>
-            <a:r>
-              <a:rPr lang="en-US" sz="1400" b="1" dirty="0">
-                <a:solidFill>
-                  <a:srgbClr val="1F4E79"/>
-                </a:solidFill>
-              </a:rPr>
-              <a:t>Role in this project</a:t>
-            </a:r>
-          </a:p>
-        </p:txBody>
-      </p:sp>
-      <p:sp>
-        <p:nvSpPr>
-          <p:cNvPr id="30" name="BlockA"/>
-          <p:cNvSpPr/>
-          <p:nvPr/>
-        </p:nvSpPr>
-        <p:spPr>
-          <a:xfrm>
-            <a:off x="4937400" y="1828800"/>
-            <a:ext cx="3657600" cy="914400"/>
-          </a:xfrm>
-          <a:prstGeom prst="roundRect">
-            <a:avLst>
-              <a:gd name="adj" fmla="val 6000"/>
-            </a:avLst>
-          </a:prstGeom>
-          <a:solidFill>
-            <a:srgbClr val="FFFFFF"/>
-          </a:solidFill>
-          <a:ln w="9525">
-            <a:solidFill>
-              <a:srgbClr val="D3D1C7"/>
-            </a:solidFill>
-          </a:ln>
-        </p:spPr>
-      </p:sp>
-      <p:sp>
-        <p:nvSpPr>
-          <p:cNvPr id="31" name="BlockALabel"/>
-          <p:cNvSpPr/>
-          <p:nvPr/>
-        </p:nvSpPr>
-        <p:spPr>
-          <a:xfrm>
-            <a:off x="4937400" y="1828800"/>
-            <a:ext cx="548640" cy="914400"/>
-          </a:xfrm>
-          <a:prstGeom prst="roundRect">
-            <a:avLst>
-              <a:gd name="adj" fmla="val 6000"/>
-            </a:avLst>
-          </a:prstGeom>
-          <a:solidFill>
-            <a:srgbClr val="028090"/>
-          </a:solidFill>
-          <a:ln/>
-        </p:spPr>
-      </p:sp>
-      <p:sp>
-        <p:nvSpPr>
-          <p:cNvPr id="32" name="BlockALabelTxt"/>
-          <p:cNvSpPr/>
-          <p:nvPr/>
-        </p:nvSpPr>
-        <p:spPr>
-          <a:xfrm>
-            <a:off x="4937400" y="1828800"/>
-            <a:ext cx="548640" cy="914400"/>
-          </a:xfrm>
-          <a:prstGeom prst="rect">
-            <a:avLst/>
-          </a:prstGeom>
-          <a:noFill/>
-          <a:ln/>
-        </p:spPr>
-        <p:txBody>
-          <a:bodyPr wrap="square" lIns="0" tIns="0" rIns="0" bIns="0" rtlCol="0" anchor="ctr"/>
-          <a:lstStyle/>
-          <a:p>
-            <a:pPr marL="0" indent="0" algn="ctr">
-              <a:buNone/>
-            </a:pPr>
-            <a:r>
-              <a:rPr lang="en-US" sz="800" b="1" dirty="0">
-                <a:solidFill>
-                  <a:srgbClr val="FFFFFF"/>
-                </a:solidFill>
-              </a:rPr>
-              <a:t>CHATBOT</a:t>
-            </a:r>
-          </a:p>
-        </p:txBody>
-      </p:sp>
-      <p:sp>
-        <p:nvSpPr>
-          <p:cNvPr id="33" name="BlockAText"/>
-          <p:cNvSpPr/>
-          <p:nvPr/>
-        </p:nvSpPr>
-        <p:spPr>
-          <a:xfrm>
-            <a:off x="5577480" y="1865880"/>
-            <a:ext cx="2926200" cy="840240"/>
-          </a:xfrm>
-          <a:prstGeom prst="rect">
-            <a:avLst/>
-          </a:prstGeom>
-          <a:noFill/>
-          <a:ln/>
-        </p:spPr>
-        <p:txBody>
-          <a:bodyPr wrap="square" rtlCol="0" anchor="ctr"/>
-          <a:lstStyle/>
-          <a:p>
-            <a:pPr marL="0" indent="0">
-              <a:buNone/>
-            </a:pPr>
-            <a:r>
-              <a:rPr lang="en-US" sz="1100" b="1" dirty="0">
-                <a:solidFill>
-                  <a:srgbClr val="1F4E79"/>
-                </a:solidFill>
-              </a:rPr>
-              <a:t>Single LCEL chain</a:t>
-            </a:r>
-          </a:p>
-          <a:p>
-            <a:pPr marL="0" indent="0">
-              <a:buNone/>
-            </a:pPr>
-            <a:r>
-              <a:rPr lang="en-US" sz="1000" dirty="0">
-                <a:solidFill>
-                  <a:srgbClr val="5D6D7E"/>
-                </a:solidFill>
-              </a:rPr>
-              <a:t>embed → retrieve → generate — used by the chatbot AND the evaluation</a:t>
-            </a:r>
-          </a:p>
-        </p:txBody>
-      </p:sp>
-      <p:sp>
-        <p:nvSpPr>
-          <p:cNvPr id="40" name="BlockB"/>
-          <p:cNvSpPr/>
-          <p:nvPr/>
-        </p:nvSpPr>
-        <p:spPr>
-          <a:xfrm>
-            <a:off x="4937400" y="2835000"/>
-            <a:ext cx="3657600" cy="914400"/>
-          </a:xfrm>
-          <a:prstGeom prst="roundRect">
-            <a:avLst>
-              <a:gd name="adj" fmla="val 6000"/>
-            </a:avLst>
-          </a:prstGeom>
-          <a:solidFill>
-            <a:srgbClr val="FFFFFF"/>
-          </a:solidFill>
-          <a:ln w="9525">
-            <a:solidFill>
-              <a:srgbClr val="D3D1C7"/>
-            </a:solidFill>
-          </a:ln>
-        </p:spPr>
-      </p:sp>
-      <p:sp>
-        <p:nvSpPr>
-          <p:cNvPr id="41" name="BlockBLabel"/>
-          <p:cNvSpPr/>
-          <p:nvPr/>
-        </p:nvSpPr>
-        <p:spPr>
-          <a:xfrm>
-            <a:off x="4937400" y="2835000"/>
-            <a:ext cx="548640" cy="914400"/>
-          </a:xfrm>
-          <a:prstGeom prst="roundRect">
-            <a:avLst>
-              <a:gd name="adj" fmla="val 6000"/>
-            </a:avLst>
-          </a:prstGeom>
-          <a:solidFill>
-            <a:srgbClr val="2E75B6"/>
-          </a:solidFill>
-          <a:ln/>
-        </p:spPr>
-      </p:sp>
-      <p:sp>
-        <p:nvSpPr>
-          <p:cNvPr id="42" name="BlockBLabelTxt"/>
-          <p:cNvSpPr/>
-          <p:nvPr/>
-        </p:nvSpPr>
-        <p:spPr>
-          <a:xfrm>
-            <a:off x="4937400" y="2835000"/>
-            <a:ext cx="548640" cy="914400"/>
-          </a:xfrm>
-          <a:prstGeom prst="rect">
-            <a:avLst/>
-          </a:prstGeom>
-          <a:noFill/>
-          <a:ln/>
-        </p:spPr>
-        <p:txBody>
-          <a:bodyPr wrap="square" lIns="0" tIns="0" rIns="0" bIns="0" rtlCol="0" anchor="ctr"/>
-          <a:lstStyle/>
-          <a:p>
-            <a:pPr marL="0" indent="0" algn="ctr">
-              <a:buNone/>
-            </a:pPr>
-            <a:r>
-              <a:rPr lang="en-US" sz="650" b="1" dirty="0">
-                <a:solidFill>
-                  <a:srgbClr val="FFFFFF"/>
-                </a:solidFill>
-              </a:rPr>
-              <a:t>EVALUATION</a:t>
-            </a:r>
-          </a:p>
-        </p:txBody>
-      </p:sp>
-      <p:sp>
-        <p:nvSpPr>
-          <p:cNvPr id="43" name="BlockBText"/>
-          <p:cNvSpPr/>
-          <p:nvPr/>
-        </p:nvSpPr>
-        <p:spPr>
-          <a:xfrm>
-            <a:off x="5577480" y="2872080"/>
-            <a:ext cx="2926200" cy="840240"/>
-          </a:xfrm>
-          <a:prstGeom prst="rect">
-            <a:avLst/>
-          </a:prstGeom>
-          <a:noFill/>
-          <a:ln/>
-        </p:spPr>
-        <p:txBody>
-          <a:bodyPr wrap="square" rtlCol="0" anchor="ctr"/>
-          <a:lstStyle/>
-          <a:p>
-            <a:pPr marL="0" indent="0">
-              <a:buNone/>
-            </a:pPr>
-            <a:r>
-              <a:rPr lang="en-US" sz="1100" b="1" dirty="0">
-                <a:solidFill>
-                  <a:srgbClr val="1F4E79"/>
-                </a:solidFill>
-              </a:rPr>
-              <a:t>Same RAGAS chain</a:t>
-            </a:r>
-          </a:p>
-          <a:p>
-            <a:pPr marL="0" indent="0">
-              <a:buNone/>
-            </a:pPr>
-            <a:r>
-              <a:rPr lang="en-US" sz="1000" dirty="0">
-                <a:solidFill>
-                  <a:srgbClr val="5D6D7E"/>
-                </a:solidFill>
-              </a:rPr>
-              <a:t>30 annotated questions evaluated on the chatbot's exact chain</a:t>
-            </a:r>
-          </a:p>
-        </p:txBody>
-      </p:sp>
-      <p:sp>
-        <p:nvSpPr>
-          <p:cNvPr id="50" name="BlockC"/>
-          <p:cNvSpPr/>
-          <p:nvPr/>
-        </p:nvSpPr>
-        <p:spPr>
-          <a:xfrm>
-            <a:off x="4937400" y="3841200"/>
-            <a:ext cx="3657600" cy="914400"/>
-          </a:xfrm>
-          <a:prstGeom prst="roundRect">
-            <a:avLst>
-              <a:gd name="adj" fmla="val 6000"/>
-            </a:avLst>
-          </a:prstGeom>
-          <a:solidFill>
-            <a:srgbClr val="EBF3FB"/>
-          </a:solidFill>
-          <a:ln w="9525">
-            <a:solidFill>
-              <a:srgbClr val="185FA5"/>
-            </a:solidFill>
-          </a:ln>
-        </p:spPr>
-      </p:sp>
-      <p:sp>
-        <p:nvSpPr>
-          <p:cNvPr id="51" name="BlockCText"/>
-          <p:cNvSpPr/>
-          <p:nvPr/>
-        </p:nvSpPr>
-        <p:spPr>
-          <a:xfrm>
-            <a:off x="5029200" y="3878280"/>
-            <a:ext cx="3474720" cy="840240"/>
-          </a:xfrm>
-          <a:prstGeom prst="rect">
-            <a:avLst/>
-          </a:prstGeom>
-          <a:noFill/>
-          <a:ln/>
-        </p:spPr>
-        <p:txBody>
-          <a:bodyPr wrap="square" rtlCol="0" anchor="ctr"/>
-          <a:lstStyle/>
-          <a:p>
-            <a:pPr marL="0" indent="0">
-              <a:buNone/>
-            </a:pPr>
-            <a:r>
-              <a:rPr lang="en-US" sz="1000" b="1" dirty="0">
-                <a:solidFill>
-                  <a:srgbClr val="0C447C"/>
-                </a:solidFill>
-              </a:rPr>
-              <a:t>Why not the Mistral API directly?</a:t>
-            </a:r>
-          </a:p>
-          <a:p>
-            <a:pPr marL="0" indent="0">
-              <a:buNone/>
-            </a:pPr>
-            <a:r>
-              <a:rPr lang="en-US" sz="1000" dirty="0">
-                <a:solidFill>
-                  <a:srgbClr val="185FA5"/>
-                </a:solidFill>
-              </a:rPr>
-              <a:t>LangChain abstracts the provider: migrating to GPT-4 or Llama needs no rewrite of the retrieval logic</a:t>
-            </a:r>
-          </a:p>
-        </p:txBody>
-      </p:sp>
-      <p:sp>
-        <p:nvSpPr>
-          <p:cNvPr id="99" name="Notes"/>
-          <p:cNvSpPr/>
-          <p:nvPr>
-            <p:ph type="body" idx="1"/>
-          </p:nvPr>
-        </p:nvSpPr>
-        <p:spPr/>
-        <p:txBody>
-          <a:bodyPr/>
-          <a:lstStyle/>
-          <a:p>
-            <a:r>
-              <a:t>Jeremy will specifically ask why LangChain. Answer in 3 points: (1) standardised interfaces mean portability across LLM providers and vector stores, (2) the LCEL chain natively orchestrates retrieval plus generation, (3) a large community-maintained ecosystem. src/rag/langchain_chain.py is the single source used by both the Streamlit chatbot and the RAGAS evaluation script, guaranteeing that what gets measured matches exactly what the user experiences.</a:t>
-            </a:r>
-          </a:p>
-        </p:txBody>
-      </p:sp>
-    </p:spTree>
+    <p:extLst>
+      <p:ext uri="{BB962C8B-B14F-4D97-AF65-F5344CB8AC3E}">
+        <p14:creationId xmlns:p14="http://schemas.microsoft.com/office/powerpoint/2010/main" val="2451255686"/>
+      </p:ext>
+    </p:extLst>
   </p:cSld>
   <p:clrMapOvr>
     <a:masterClrMapping/>
@@ -9830,6 +10324,1914 @@
 
 <file path=ppt/slides/slide5.xml><?xml version="1.0" encoding="utf-8"?>
 <p:sld xmlns:a="http://schemas.openxmlformats.org/drawingml/2006/main" xmlns:r="http://schemas.openxmlformats.org/officeDocument/2006/relationships" xmlns:p="http://schemas.openxmlformats.org/presentationml/2006/main">
+  <p:cSld>
+    <p:spTree>
+      <p:nvGrpSpPr>
+        <p:cNvPr id="1" name=""/>
+        <p:cNvGrpSpPr/>
+        <p:nvPr/>
+      </p:nvGrpSpPr>
+      <p:grpSpPr>
+        <a:xfrm>
+          <a:off x="0" y="0"/>
+          <a:ext cx="0" cy="0"/>
+          <a:chOff x="0" y="0"/>
+          <a:chExt cx="0" cy="0"/>
+        </a:xfrm>
+      </p:grpSpPr>
+      <p:sp>
+        <p:nvSpPr>
+          <p:cNvPr id="2" name="Shape 0"/>
+          <p:cNvSpPr/>
+          <p:nvPr/>
+        </p:nvSpPr>
+        <p:spPr>
+          <a:xfrm>
+            <a:off x="0" y="0"/>
+            <a:ext cx="9144000" cy="914400"/>
+          </a:xfrm>
+          <a:prstGeom prst="rect">
+            <a:avLst/>
+          </a:prstGeom>
+          <a:solidFill>
+            <a:srgbClr val="1F4E79"/>
+          </a:solidFill>
+          <a:ln/>
+        </p:spPr>
+      </p:sp>
+      <p:sp>
+        <p:nvSpPr>
+          <p:cNvPr id="3" name="Text 1"/>
+          <p:cNvSpPr/>
+          <p:nvPr/>
+        </p:nvSpPr>
+        <p:spPr>
+          <a:xfrm>
+            <a:off x="365760" y="0"/>
+            <a:ext cx="8412480" cy="914400"/>
+          </a:xfrm>
+          <a:prstGeom prst="rect">
+            <a:avLst/>
+          </a:prstGeom>
+          <a:noFill/>
+          <a:ln/>
+        </p:spPr>
+        <p:txBody>
+          <a:bodyPr wrap="square" rtlCol="0" anchor="ctr"/>
+          <a:lstStyle/>
+          <a:p>
+            <a:pPr marL="0" indent="0">
+              <a:buNone/>
+            </a:pPr>
+            <a:r>
+              <a:rPr lang="en-US" sz="2200" b="1" dirty="0">
+                <a:solidFill>
+                  <a:srgbClr val="FFFFFF"/>
+                </a:solidFill>
+              </a:rPr>
+              <a:t>TECHNICAL CHOICES</a:t>
+            </a:r>
+            <a:endParaRPr lang="en-US" sz="2200" dirty="0"/>
+          </a:p>
+        </p:txBody>
+      </p:sp>
+      <p:sp>
+        <p:nvSpPr>
+          <p:cNvPr id="4" name="Shape 2"/>
+          <p:cNvSpPr/>
+          <p:nvPr/>
+        </p:nvSpPr>
+        <p:spPr>
+          <a:xfrm>
+            <a:off x="274320" y="1051560"/>
+            <a:ext cx="2697480" cy="1783080"/>
+          </a:xfrm>
+          <a:prstGeom prst="roundRect">
+            <a:avLst>
+              <a:gd name="adj" fmla="val 5128"/>
+            </a:avLst>
+          </a:prstGeom>
+          <a:solidFill>
+            <a:srgbClr val="F2F6FA"/>
+          </a:solidFill>
+          <a:ln/>
+          <a:effectLst>
+            <a:outerShdw blurRad="101600" dist="38100" dir="2700000" algn="bl" rotWithShape="0">
+              <a:srgbClr val="000000">
+                <a:alpha val="12000"/>
+              </a:srgbClr>
+            </a:outerShdw>
+          </a:effectLst>
+        </p:spPr>
+      </p:sp>
+      <p:sp>
+        <p:nvSpPr>
+          <p:cNvPr id="5" name="Shape 3"/>
+          <p:cNvSpPr/>
+          <p:nvPr/>
+        </p:nvSpPr>
+        <p:spPr>
+          <a:xfrm>
+            <a:off x="384048" y="1143000"/>
+            <a:ext cx="502920" cy="502920"/>
+          </a:xfrm>
+          <a:prstGeom prst="ellipse">
+            <a:avLst/>
+          </a:prstGeom>
+          <a:solidFill>
+            <a:srgbClr val="1F4E79"/>
+          </a:solidFill>
+          <a:ln/>
+        </p:spPr>
+      </p:sp>
+      <p:pic>
+        <p:nvPicPr>
+          <p:cNvPr id="6" name="Image 0" descr="preencoded.png"/>
+          <p:cNvPicPr>
+            <a:picLocks noChangeAspect="1"/>
+          </p:cNvPicPr>
+          <p:nvPr/>
+        </p:nvPicPr>
+        <p:blipFill>
+          <a:blip r:embed="rId3"/>
+          <a:stretch>
+            <a:fillRect/>
+          </a:stretch>
+        </p:blipFill>
+        <p:spPr>
+          <a:xfrm>
+            <a:off x="429768" y="1188720"/>
+            <a:ext cx="384048" cy="384048"/>
+          </a:xfrm>
+          <a:prstGeom prst="rect">
+            <a:avLst/>
+          </a:prstGeom>
+        </p:spPr>
+      </p:pic>
+      <p:sp>
+        <p:nvSpPr>
+          <p:cNvPr id="7" name="Text 4"/>
+          <p:cNvSpPr/>
+          <p:nvPr/>
+        </p:nvSpPr>
+        <p:spPr>
+          <a:xfrm>
+            <a:off x="960120" y="1143000"/>
+            <a:ext cx="1920240" cy="320040"/>
+          </a:xfrm>
+          <a:prstGeom prst="rect">
+            <a:avLst/>
+          </a:prstGeom>
+          <a:noFill/>
+          <a:ln/>
+        </p:spPr>
+        <p:txBody>
+          <a:bodyPr wrap="square" rtlCol="0" anchor="ctr"/>
+          <a:lstStyle/>
+          <a:p>
+            <a:pPr marL="0" indent="0">
+              <a:buNone/>
+            </a:pPr>
+            <a:r>
+              <a:rPr lang="en-US" sz="1200" b="1" dirty="0">
+                <a:solidFill>
+                  <a:srgbClr val="1F4E79"/>
+                </a:solidFill>
+              </a:rPr>
+              <a:t>mistral-embed</a:t>
+            </a:r>
+            <a:endParaRPr lang="en-US" sz="1200" dirty="0"/>
+          </a:p>
+        </p:txBody>
+      </p:sp>
+      <p:sp>
+        <p:nvSpPr>
+          <p:cNvPr id="8" name="Text 5"/>
+          <p:cNvSpPr/>
+          <p:nvPr/>
+        </p:nvSpPr>
+        <p:spPr>
+          <a:xfrm>
+            <a:off x="960120" y="1463040"/>
+            <a:ext cx="1920240" cy="274320"/>
+          </a:xfrm>
+          <a:prstGeom prst="rect">
+            <a:avLst/>
+          </a:prstGeom>
+          <a:noFill/>
+          <a:ln/>
+        </p:spPr>
+        <p:txBody>
+          <a:bodyPr wrap="square" rtlCol="0" anchor="ctr"/>
+          <a:lstStyle/>
+          <a:p>
+            <a:pPr marL="0" indent="0">
+              <a:buNone/>
+            </a:pPr>
+            <a:r>
+              <a:rPr lang="en-US" sz="1000" i="1" dirty="0">
+                <a:solidFill>
+                  <a:srgbClr val="5D6D7E"/>
+                </a:solidFill>
+              </a:rPr>
+              <a:t>Embedding model</a:t>
+            </a:r>
+            <a:endParaRPr lang="en-US" sz="1000" dirty="0"/>
+          </a:p>
+        </p:txBody>
+      </p:sp>
+      <p:sp>
+        <p:nvSpPr>
+          <p:cNvPr id="9" name="Text 6"/>
+          <p:cNvSpPr/>
+          <p:nvPr/>
+        </p:nvSpPr>
+        <p:spPr>
+          <a:xfrm>
+            <a:off x="384048" y="1828800"/>
+            <a:ext cx="2487168" cy="914400"/>
+          </a:xfrm>
+          <a:prstGeom prst="rect">
+            <a:avLst/>
+          </a:prstGeom>
+          <a:noFill/>
+          <a:ln/>
+        </p:spPr>
+        <p:txBody>
+          <a:bodyPr wrap="square" rtlCol="0" anchor="ctr"/>
+          <a:lstStyle/>
+          <a:p>
+            <a:pPr marL="0" indent="0">
+              <a:buNone/>
+            </a:pPr>
+            <a:r>
+              <a:rPr lang="en-US" sz="1000" dirty="0">
+                <a:solidFill>
+                  <a:srgbClr val="5D6D7E"/>
+                </a:solidFill>
+              </a:rPr>
+              <a:t>1,024 dimensions. Optimised French support. Same provider as LLM for tokenisation consistency.</a:t>
+            </a:r>
+            <a:endParaRPr lang="en-US" sz="1000" dirty="0"/>
+          </a:p>
+        </p:txBody>
+      </p:sp>
+      <p:sp>
+        <p:nvSpPr>
+          <p:cNvPr id="10" name="Shape 7"/>
+          <p:cNvSpPr/>
+          <p:nvPr/>
+        </p:nvSpPr>
+        <p:spPr>
+          <a:xfrm>
+            <a:off x="3154680" y="1051560"/>
+            <a:ext cx="2697480" cy="1783080"/>
+          </a:xfrm>
+          <a:prstGeom prst="roundRect">
+            <a:avLst>
+              <a:gd name="adj" fmla="val 5128"/>
+            </a:avLst>
+          </a:prstGeom>
+          <a:solidFill>
+            <a:srgbClr val="F2F6FA"/>
+          </a:solidFill>
+          <a:ln/>
+          <a:effectLst>
+            <a:outerShdw blurRad="101600" dist="38100" dir="2700000" algn="bl" rotWithShape="0">
+              <a:srgbClr val="000000">
+                <a:alpha val="12000"/>
+              </a:srgbClr>
+            </a:outerShdw>
+          </a:effectLst>
+        </p:spPr>
+      </p:sp>
+      <p:sp>
+        <p:nvSpPr>
+          <p:cNvPr id="11" name="Shape 8"/>
+          <p:cNvSpPr/>
+          <p:nvPr/>
+        </p:nvSpPr>
+        <p:spPr>
+          <a:xfrm>
+            <a:off x="3264408" y="1143000"/>
+            <a:ext cx="502920" cy="502920"/>
+          </a:xfrm>
+          <a:prstGeom prst="ellipse">
+            <a:avLst/>
+          </a:prstGeom>
+          <a:solidFill>
+            <a:srgbClr val="2E75B6"/>
+          </a:solidFill>
+          <a:ln/>
+        </p:spPr>
+      </p:sp>
+      <p:pic>
+        <p:nvPicPr>
+          <p:cNvPr id="12" name="Image 1" descr="preencoded.png"/>
+          <p:cNvPicPr>
+            <a:picLocks noChangeAspect="1"/>
+          </p:cNvPicPr>
+          <p:nvPr/>
+        </p:nvPicPr>
+        <p:blipFill>
+          <a:blip r:embed="rId4"/>
+          <a:stretch>
+            <a:fillRect/>
+          </a:stretch>
+        </p:blipFill>
+        <p:spPr>
+          <a:xfrm>
+            <a:off x="3310128" y="1188720"/>
+            <a:ext cx="384048" cy="384048"/>
+          </a:xfrm>
+          <a:prstGeom prst="rect">
+            <a:avLst/>
+          </a:prstGeom>
+        </p:spPr>
+      </p:pic>
+      <p:sp>
+        <p:nvSpPr>
+          <p:cNvPr id="13" name="Text 9"/>
+          <p:cNvSpPr/>
+          <p:nvPr/>
+        </p:nvSpPr>
+        <p:spPr>
+          <a:xfrm>
+            <a:off x="3840480" y="1143000"/>
+            <a:ext cx="1920240" cy="320040"/>
+          </a:xfrm>
+          <a:prstGeom prst="rect">
+            <a:avLst/>
+          </a:prstGeom>
+          <a:noFill/>
+          <a:ln/>
+        </p:spPr>
+        <p:txBody>
+          <a:bodyPr wrap="square" rtlCol="0" anchor="ctr"/>
+          <a:lstStyle/>
+          <a:p>
+            <a:pPr marL="0" indent="0">
+              <a:buNone/>
+            </a:pPr>
+            <a:r>
+              <a:rPr lang="en-US" sz="1200" b="1" dirty="0">
+                <a:solidFill>
+                  <a:srgbClr val="1F4E79"/>
+                </a:solidFill>
+              </a:rPr>
+              <a:t>FAISS IndexFlatL2</a:t>
+            </a:r>
+            <a:endParaRPr lang="en-US" sz="1200" dirty="0"/>
+          </a:p>
+        </p:txBody>
+      </p:sp>
+      <p:sp>
+        <p:nvSpPr>
+          <p:cNvPr id="14" name="Text 10"/>
+          <p:cNvSpPr/>
+          <p:nvPr/>
+        </p:nvSpPr>
+        <p:spPr>
+          <a:xfrm>
+            <a:off x="3840480" y="1463040"/>
+            <a:ext cx="1920240" cy="274320"/>
+          </a:xfrm>
+          <a:prstGeom prst="rect">
+            <a:avLst/>
+          </a:prstGeom>
+          <a:noFill/>
+          <a:ln/>
+        </p:spPr>
+        <p:txBody>
+          <a:bodyPr wrap="square" rtlCol="0" anchor="ctr"/>
+          <a:lstStyle/>
+          <a:p>
+            <a:pPr marL="0" indent="0">
+              <a:buNone/>
+            </a:pPr>
+            <a:r>
+              <a:rPr lang="en-US" sz="1000" i="1" dirty="0">
+                <a:solidFill>
+                  <a:srgbClr val="5D6D7E"/>
+                </a:solidFill>
+              </a:rPr>
+              <a:t>Vector database</a:t>
+            </a:r>
+            <a:endParaRPr lang="en-US" sz="1000" dirty="0"/>
+          </a:p>
+        </p:txBody>
+      </p:sp>
+      <p:sp>
+        <p:nvSpPr>
+          <p:cNvPr id="15" name="Text 11"/>
+          <p:cNvSpPr/>
+          <p:nvPr/>
+        </p:nvSpPr>
+        <p:spPr>
+          <a:xfrm>
+            <a:off x="3264408" y="1828800"/>
+            <a:ext cx="2487168" cy="914400"/>
+          </a:xfrm>
+          <a:prstGeom prst="rect">
+            <a:avLst/>
+          </a:prstGeom>
+          <a:noFill/>
+          <a:ln/>
+        </p:spPr>
+        <p:txBody>
+          <a:bodyPr wrap="square" rtlCol="0" anchor="ctr"/>
+          <a:lstStyle/>
+          <a:p>
+            <a:pPr marL="0" indent="0">
+              <a:buNone/>
+            </a:pPr>
+            <a:r>
+              <a:rPr lang="en-US" sz="1000" dirty="0">
+                <a:solidFill>
+                  <a:srgbClr val="5D6D7E"/>
+                </a:solidFill>
+              </a:rPr>
+              <a:t>Exact search in under 1 ms on 1,740 vectors. Zero configuration for POC. Scalable with IVFFlat in production.</a:t>
+            </a:r>
+            <a:endParaRPr lang="en-US" sz="1000" dirty="0"/>
+          </a:p>
+        </p:txBody>
+      </p:sp>
+      <p:sp>
+        <p:nvSpPr>
+          <p:cNvPr id="16" name="Shape 12"/>
+          <p:cNvSpPr/>
+          <p:nvPr/>
+        </p:nvSpPr>
+        <p:spPr>
+          <a:xfrm>
+            <a:off x="6035040" y="1051560"/>
+            <a:ext cx="2697480" cy="1783080"/>
+          </a:xfrm>
+          <a:prstGeom prst="roundRect">
+            <a:avLst>
+              <a:gd name="adj" fmla="val 5128"/>
+            </a:avLst>
+          </a:prstGeom>
+          <a:solidFill>
+            <a:srgbClr val="F2F6FA"/>
+          </a:solidFill>
+          <a:ln/>
+          <a:effectLst>
+            <a:outerShdw blurRad="101600" dist="38100" dir="2700000" algn="bl" rotWithShape="0">
+              <a:srgbClr val="000000">
+                <a:alpha val="12000"/>
+              </a:srgbClr>
+            </a:outerShdw>
+          </a:effectLst>
+        </p:spPr>
+      </p:sp>
+      <p:sp>
+        <p:nvSpPr>
+          <p:cNvPr id="17" name="Shape 13"/>
+          <p:cNvSpPr/>
+          <p:nvPr/>
+        </p:nvSpPr>
+        <p:spPr>
+          <a:xfrm>
+            <a:off x="6144768" y="1143000"/>
+            <a:ext cx="502920" cy="502920"/>
+          </a:xfrm>
+          <a:prstGeom prst="ellipse">
+            <a:avLst/>
+          </a:prstGeom>
+          <a:solidFill>
+            <a:srgbClr val="028090"/>
+          </a:solidFill>
+          <a:ln/>
+        </p:spPr>
+      </p:sp>
+      <p:pic>
+        <p:nvPicPr>
+          <p:cNvPr id="18" name="Image 2" descr="preencoded.png"/>
+          <p:cNvPicPr>
+            <a:picLocks noChangeAspect="1"/>
+          </p:cNvPicPr>
+          <p:nvPr/>
+        </p:nvPicPr>
+        <p:blipFill>
+          <a:blip r:embed="rId5"/>
+          <a:stretch>
+            <a:fillRect/>
+          </a:stretch>
+        </p:blipFill>
+        <p:spPr>
+          <a:xfrm>
+            <a:off x="6190488" y="1188720"/>
+            <a:ext cx="384048" cy="384048"/>
+          </a:xfrm>
+          <a:prstGeom prst="rect">
+            <a:avLst/>
+          </a:prstGeom>
+        </p:spPr>
+      </p:pic>
+      <p:sp>
+        <p:nvSpPr>
+          <p:cNvPr id="19" name="Text 14"/>
+          <p:cNvSpPr/>
+          <p:nvPr/>
+        </p:nvSpPr>
+        <p:spPr>
+          <a:xfrm>
+            <a:off x="6720840" y="1143000"/>
+            <a:ext cx="1920240" cy="320040"/>
+          </a:xfrm>
+          <a:prstGeom prst="rect">
+            <a:avLst/>
+          </a:prstGeom>
+          <a:noFill/>
+          <a:ln/>
+        </p:spPr>
+        <p:txBody>
+          <a:bodyPr wrap="square" rtlCol="0" anchor="ctr"/>
+          <a:lstStyle/>
+          <a:p>
+            <a:pPr marL="0" indent="0">
+              <a:buNone/>
+            </a:pPr>
+            <a:r>
+              <a:rPr lang="en-US" sz="1200" b="1" dirty="0">
+                <a:solidFill>
+                  <a:srgbClr val="1F4E79"/>
+                </a:solidFill>
+              </a:rPr>
+              <a:t>mistral-small-latest</a:t>
+            </a:r>
+            <a:endParaRPr lang="en-US" sz="1200" dirty="0"/>
+          </a:p>
+        </p:txBody>
+      </p:sp>
+      <p:sp>
+        <p:nvSpPr>
+          <p:cNvPr id="20" name="Text 15"/>
+          <p:cNvSpPr/>
+          <p:nvPr/>
+        </p:nvSpPr>
+        <p:spPr>
+          <a:xfrm>
+            <a:off x="6720840" y="1463040"/>
+            <a:ext cx="1920240" cy="274320"/>
+          </a:xfrm>
+          <a:prstGeom prst="rect">
+            <a:avLst/>
+          </a:prstGeom>
+          <a:noFill/>
+          <a:ln/>
+        </p:spPr>
+        <p:txBody>
+          <a:bodyPr wrap="square" rtlCol="0" anchor="ctr"/>
+          <a:lstStyle/>
+          <a:p>
+            <a:pPr marL="0" indent="0">
+              <a:buNone/>
+            </a:pPr>
+            <a:r>
+              <a:rPr lang="en-US" sz="1000" i="1" dirty="0">
+                <a:solidFill>
+                  <a:srgbClr val="5D6D7E"/>
+                </a:solidFill>
+              </a:rPr>
+              <a:t>Generation model</a:t>
+            </a:r>
+            <a:endParaRPr lang="en-US" sz="1000" dirty="0"/>
+          </a:p>
+        </p:txBody>
+      </p:sp>
+      <p:sp>
+        <p:nvSpPr>
+          <p:cNvPr id="21" name="Text 16"/>
+          <p:cNvSpPr/>
+          <p:nvPr/>
+        </p:nvSpPr>
+        <p:spPr>
+          <a:xfrm>
+            <a:off x="6144768" y="1828800"/>
+            <a:ext cx="2487168" cy="914400"/>
+          </a:xfrm>
+          <a:prstGeom prst="rect">
+            <a:avLst/>
+          </a:prstGeom>
+          <a:noFill/>
+          <a:ln/>
+        </p:spPr>
+        <p:txBody>
+          <a:bodyPr wrap="square" rtlCol="0" anchor="ctr"/>
+          <a:lstStyle/>
+          <a:p>
+            <a:pPr marL="0" indent="0">
+              <a:buNone/>
+            </a:pPr>
+            <a:r>
+              <a:rPr lang="en-US" sz="1000" dirty="0">
+                <a:solidFill>
+                  <a:srgbClr val="5D6D7E"/>
+                </a:solidFill>
+              </a:rPr>
+              <a:t>Temperature 0.1. Free tier. French responses. Strict system prompt: zero hallucination.</a:t>
+            </a:r>
+            <a:endParaRPr lang="en-US" sz="1000" dirty="0"/>
+          </a:p>
+        </p:txBody>
+      </p:sp>
+      <p:sp>
+        <p:nvSpPr>
+          <p:cNvPr id="22" name="Shape 17"/>
+          <p:cNvSpPr/>
+          <p:nvPr/>
+        </p:nvSpPr>
+        <p:spPr>
+          <a:xfrm>
+            <a:off x="274320" y="2971800"/>
+            <a:ext cx="2697480" cy="1783080"/>
+          </a:xfrm>
+          <a:prstGeom prst="roundRect">
+            <a:avLst>
+              <a:gd name="adj" fmla="val 5128"/>
+            </a:avLst>
+          </a:prstGeom>
+          <a:solidFill>
+            <a:srgbClr val="F2F6FA"/>
+          </a:solidFill>
+          <a:ln/>
+          <a:effectLst>
+            <a:outerShdw blurRad="101600" dist="38100" dir="2700000" algn="bl" rotWithShape="0">
+              <a:srgbClr val="000000">
+                <a:alpha val="12000"/>
+              </a:srgbClr>
+            </a:outerShdw>
+          </a:effectLst>
+        </p:spPr>
+      </p:sp>
+      <p:sp>
+        <p:nvSpPr>
+          <p:cNvPr id="23" name="Shape 18"/>
+          <p:cNvSpPr/>
+          <p:nvPr/>
+        </p:nvSpPr>
+        <p:spPr>
+          <a:xfrm>
+            <a:off x="384048" y="3063240"/>
+            <a:ext cx="502920" cy="502920"/>
+          </a:xfrm>
+          <a:prstGeom prst="ellipse">
+            <a:avLst/>
+          </a:prstGeom>
+          <a:solidFill>
+            <a:srgbClr val="1F4E79"/>
+          </a:solidFill>
+          <a:ln/>
+        </p:spPr>
+      </p:sp>
+      <p:pic>
+        <p:nvPicPr>
+          <p:cNvPr id="24" name="Image 3" descr="preencoded.png"/>
+          <p:cNvPicPr>
+            <a:picLocks noChangeAspect="1"/>
+          </p:cNvPicPr>
+          <p:nvPr/>
+        </p:nvPicPr>
+        <p:blipFill>
+          <a:blip r:embed="rId6"/>
+          <a:stretch>
+            <a:fillRect/>
+          </a:stretch>
+        </p:blipFill>
+        <p:spPr>
+          <a:xfrm>
+            <a:off x="429768" y="3108960"/>
+            <a:ext cx="384048" cy="384048"/>
+          </a:xfrm>
+          <a:prstGeom prst="rect">
+            <a:avLst/>
+          </a:prstGeom>
+        </p:spPr>
+      </p:pic>
+      <p:sp>
+        <p:nvSpPr>
+          <p:cNvPr id="25" name="Text 19"/>
+          <p:cNvSpPr/>
+          <p:nvPr/>
+        </p:nvSpPr>
+        <p:spPr>
+          <a:xfrm>
+            <a:off x="960120" y="3063240"/>
+            <a:ext cx="1920240" cy="320040"/>
+          </a:xfrm>
+          <a:prstGeom prst="rect">
+            <a:avLst/>
+          </a:prstGeom>
+          <a:noFill/>
+          <a:ln/>
+        </p:spPr>
+        <p:txBody>
+          <a:bodyPr wrap="square" rtlCol="0" anchor="ctr"/>
+          <a:lstStyle/>
+          <a:p>
+            <a:pPr marL="0" indent="0">
+              <a:buNone/>
+            </a:pPr>
+            <a:r>
+              <a:rPr lang="en-US" sz="1200" b="1" dirty="0">
+                <a:solidFill>
+                  <a:srgbClr val="1F4E79"/>
+                </a:solidFill>
+              </a:rPr>
+              <a:t>Poetry + Python 3.13</a:t>
+            </a:r>
+            <a:endParaRPr lang="en-US" sz="1200" dirty="0"/>
+          </a:p>
+        </p:txBody>
+      </p:sp>
+      <p:sp>
+        <p:nvSpPr>
+          <p:cNvPr id="26" name="Text 20"/>
+          <p:cNvSpPr/>
+          <p:nvPr/>
+        </p:nvSpPr>
+        <p:spPr>
+          <a:xfrm>
+            <a:off x="960120" y="3383280"/>
+            <a:ext cx="1920240" cy="274320"/>
+          </a:xfrm>
+          <a:prstGeom prst="rect">
+            <a:avLst/>
+          </a:prstGeom>
+          <a:noFill/>
+          <a:ln/>
+        </p:spPr>
+        <p:txBody>
+          <a:bodyPr wrap="square" rtlCol="0" anchor="ctr"/>
+          <a:lstStyle/>
+          <a:p>
+            <a:pPr marL="0" indent="0">
+              <a:buNone/>
+            </a:pPr>
+            <a:r>
+              <a:rPr lang="en-US" sz="1000" i="1" dirty="0">
+                <a:solidFill>
+                  <a:srgbClr val="5D6D7E"/>
+                </a:solidFill>
+              </a:rPr>
+              <a:t>Environment</a:t>
+            </a:r>
+            <a:endParaRPr lang="en-US" sz="1000" dirty="0"/>
+          </a:p>
+        </p:txBody>
+      </p:sp>
+      <p:sp>
+        <p:nvSpPr>
+          <p:cNvPr id="27" name="Text 21"/>
+          <p:cNvSpPr/>
+          <p:nvPr/>
+        </p:nvSpPr>
+        <p:spPr>
+          <a:xfrm>
+            <a:off x="384048" y="3749040"/>
+            <a:ext cx="2487168" cy="914400"/>
+          </a:xfrm>
+          <a:prstGeom prst="rect">
+            <a:avLst/>
+          </a:prstGeom>
+          <a:noFill/>
+          <a:ln/>
+        </p:spPr>
+        <p:txBody>
+          <a:bodyPr wrap="square" rtlCol="0" anchor="ctr"/>
+          <a:lstStyle/>
+          <a:p>
+            <a:pPr marL="0" indent="0">
+              <a:buNone/>
+            </a:pPr>
+            <a:r>
+              <a:rPr lang="en-US" sz="1000" dirty="0">
+                <a:solidFill>
+                  <a:srgbClr val="5D6D7E"/>
+                </a:solidFill>
+              </a:rPr>
+              <a:t>Lock file for reproducibility. Python bounded to 3.13-3.15. mistralai pinned to 1.2.5.</a:t>
+            </a:r>
+            <a:endParaRPr lang="en-US" sz="1000" dirty="0"/>
+          </a:p>
+        </p:txBody>
+      </p:sp>
+      <p:sp>
+        <p:nvSpPr>
+          <p:cNvPr id="28" name="Shape 22"/>
+          <p:cNvSpPr/>
+          <p:nvPr/>
+        </p:nvSpPr>
+        <p:spPr>
+          <a:xfrm>
+            <a:off x="3154680" y="2971800"/>
+            <a:ext cx="2697480" cy="1783080"/>
+          </a:xfrm>
+          <a:prstGeom prst="roundRect">
+            <a:avLst>
+              <a:gd name="adj" fmla="val 5128"/>
+            </a:avLst>
+          </a:prstGeom>
+          <a:solidFill>
+            <a:srgbClr val="F2F6FA"/>
+          </a:solidFill>
+          <a:ln/>
+          <a:effectLst>
+            <a:outerShdw blurRad="101600" dist="38100" dir="2700000" algn="bl" rotWithShape="0">
+              <a:srgbClr val="000000">
+                <a:alpha val="12000"/>
+              </a:srgbClr>
+            </a:outerShdw>
+          </a:effectLst>
+        </p:spPr>
+      </p:sp>
+      <p:sp>
+        <p:nvSpPr>
+          <p:cNvPr id="29" name="Shape 23"/>
+          <p:cNvSpPr/>
+          <p:nvPr/>
+        </p:nvSpPr>
+        <p:spPr>
+          <a:xfrm>
+            <a:off x="3264408" y="3063240"/>
+            <a:ext cx="502920" cy="502920"/>
+          </a:xfrm>
+          <a:prstGeom prst="ellipse">
+            <a:avLst/>
+          </a:prstGeom>
+          <a:solidFill>
+            <a:srgbClr val="2E75B6"/>
+          </a:solidFill>
+          <a:ln/>
+        </p:spPr>
+      </p:sp>
+      <p:pic>
+        <p:nvPicPr>
+          <p:cNvPr id="30" name="Image 4" descr="preencoded.png"/>
+          <p:cNvPicPr>
+            <a:picLocks noChangeAspect="1"/>
+          </p:cNvPicPr>
+          <p:nvPr/>
+        </p:nvPicPr>
+        <p:blipFill>
+          <a:blip r:embed="rId7"/>
+          <a:stretch>
+            <a:fillRect/>
+          </a:stretch>
+        </p:blipFill>
+        <p:spPr>
+          <a:xfrm>
+            <a:off x="3310128" y="3108960"/>
+            <a:ext cx="384048" cy="384048"/>
+          </a:xfrm>
+          <a:prstGeom prst="rect">
+            <a:avLst/>
+          </a:prstGeom>
+        </p:spPr>
+      </p:pic>
+      <p:sp>
+        <p:nvSpPr>
+          <p:cNvPr id="31" name="Text 24"/>
+          <p:cNvSpPr/>
+          <p:nvPr/>
+        </p:nvSpPr>
+        <p:spPr>
+          <a:xfrm>
+            <a:off x="3840480" y="3063240"/>
+            <a:ext cx="1920240" cy="320040"/>
+          </a:xfrm>
+          <a:prstGeom prst="rect">
+            <a:avLst/>
+          </a:prstGeom>
+          <a:noFill/>
+          <a:ln/>
+        </p:spPr>
+        <p:txBody>
+          <a:bodyPr wrap="square" rtlCol="0" anchor="ctr"/>
+          <a:lstStyle/>
+          <a:p>
+            <a:pPr marL="0" indent="0">
+              <a:buNone/>
+            </a:pPr>
+            <a:r>
+              <a:rPr lang="en-US" sz="1200" b="1" dirty="0">
+                <a:solidFill>
+                  <a:srgbClr val="1F4E79"/>
+                </a:solidFill>
+              </a:rPr>
+              <a:t>1 chunk per event</a:t>
+            </a:r>
+            <a:endParaRPr lang="en-US" sz="1200" dirty="0"/>
+          </a:p>
+        </p:txBody>
+      </p:sp>
+      <p:sp>
+        <p:nvSpPr>
+          <p:cNvPr id="32" name="Text 25"/>
+          <p:cNvSpPr/>
+          <p:nvPr/>
+        </p:nvSpPr>
+        <p:spPr>
+          <a:xfrm>
+            <a:off x="3840480" y="3383280"/>
+            <a:ext cx="1920240" cy="274320"/>
+          </a:xfrm>
+          <a:prstGeom prst="rect">
+            <a:avLst/>
+          </a:prstGeom>
+          <a:noFill/>
+          <a:ln/>
+        </p:spPr>
+        <p:txBody>
+          <a:bodyPr wrap="square" rtlCol="0" anchor="ctr"/>
+          <a:lstStyle/>
+          <a:p>
+            <a:pPr marL="0" indent="0">
+              <a:buNone/>
+            </a:pPr>
+            <a:r>
+              <a:rPr lang="en-US" sz="1000" i="1" dirty="0">
+                <a:solidFill>
+                  <a:srgbClr val="5D6D7E"/>
+                </a:solidFill>
+              </a:rPr>
+              <a:t>Chunking strategy</a:t>
+            </a:r>
+            <a:endParaRPr lang="en-US" sz="1000" dirty="0"/>
+          </a:p>
+        </p:txBody>
+      </p:sp>
+      <p:sp>
+        <p:nvSpPr>
+          <p:cNvPr id="33" name="Text 26"/>
+          <p:cNvSpPr/>
+          <p:nvPr/>
+        </p:nvSpPr>
+        <p:spPr>
+          <a:xfrm>
+            <a:off x="3264408" y="3749040"/>
+            <a:ext cx="2487168" cy="914400"/>
+          </a:xfrm>
+          <a:prstGeom prst="rect">
+            <a:avLst/>
+          </a:prstGeom>
+          <a:noFill/>
+          <a:ln/>
+        </p:spPr>
+        <p:txBody>
+          <a:bodyPr wrap="square" rtlCol="0" anchor="ctr"/>
+          <a:lstStyle/>
+          <a:p>
+            <a:pPr marL="0" indent="0">
+              <a:buNone/>
+            </a:pPr>
+            <a:r>
+              <a:rPr lang="en-US" sz="1000" dirty="0">
+                <a:solidFill>
+                  <a:srgbClr val="5D6D7E"/>
+                </a:solidFill>
+              </a:rPr>
+              <a:t>Median 50 characters. No recursive splitting. Concatenate title + description + venue + date.</a:t>
+            </a:r>
+            <a:endParaRPr lang="en-US" sz="1000" dirty="0"/>
+          </a:p>
+        </p:txBody>
+      </p:sp>
+      <p:sp>
+        <p:nvSpPr>
+          <p:cNvPr id="34" name="Shape 27"/>
+          <p:cNvSpPr/>
+          <p:nvPr/>
+        </p:nvSpPr>
+        <p:spPr>
+          <a:xfrm>
+            <a:off x="6035040" y="2971800"/>
+            <a:ext cx="2697480" cy="1783080"/>
+          </a:xfrm>
+          <a:prstGeom prst="roundRect">
+            <a:avLst>
+              <a:gd name="adj" fmla="val 5128"/>
+            </a:avLst>
+          </a:prstGeom>
+          <a:solidFill>
+            <a:srgbClr val="F2F6FA"/>
+          </a:solidFill>
+          <a:ln/>
+          <a:effectLst>
+            <a:outerShdw blurRad="101600" dist="38100" dir="2700000" algn="bl" rotWithShape="0">
+              <a:srgbClr val="000000">
+                <a:alpha val="12000"/>
+              </a:srgbClr>
+            </a:outerShdw>
+          </a:effectLst>
+        </p:spPr>
+      </p:sp>
+      <p:sp>
+        <p:nvSpPr>
+          <p:cNvPr id="35" name="Shape 28"/>
+          <p:cNvSpPr/>
+          <p:nvPr/>
+        </p:nvSpPr>
+        <p:spPr>
+          <a:xfrm>
+            <a:off x="6144768" y="3063240"/>
+            <a:ext cx="502920" cy="502920"/>
+          </a:xfrm>
+          <a:prstGeom prst="ellipse">
+            <a:avLst/>
+          </a:prstGeom>
+          <a:solidFill>
+            <a:srgbClr val="028090"/>
+          </a:solidFill>
+          <a:ln/>
+        </p:spPr>
+      </p:sp>
+      <p:pic>
+        <p:nvPicPr>
+          <p:cNvPr id="36" name="Image 5" descr="preencoded.png"/>
+          <p:cNvPicPr>
+            <a:picLocks noChangeAspect="1"/>
+          </p:cNvPicPr>
+          <p:nvPr/>
+        </p:nvPicPr>
+        <p:blipFill>
+          <a:blip r:embed="rId8"/>
+          <a:stretch>
+            <a:fillRect/>
+          </a:stretch>
+        </p:blipFill>
+        <p:spPr>
+          <a:xfrm>
+            <a:off x="6190488" y="3108960"/>
+            <a:ext cx="384048" cy="384048"/>
+          </a:xfrm>
+          <a:prstGeom prst="rect">
+            <a:avLst/>
+          </a:prstGeom>
+        </p:spPr>
+      </p:pic>
+      <p:sp>
+        <p:nvSpPr>
+          <p:cNvPr id="37" name="Text 29"/>
+          <p:cNvSpPr/>
+          <p:nvPr/>
+        </p:nvSpPr>
+        <p:spPr>
+          <a:xfrm>
+            <a:off x="6720840" y="3063240"/>
+            <a:ext cx="1920240" cy="320040"/>
+          </a:xfrm>
+          <a:prstGeom prst="rect">
+            <a:avLst/>
+          </a:prstGeom>
+          <a:noFill/>
+          <a:ln/>
+        </p:spPr>
+        <p:txBody>
+          <a:bodyPr wrap="square" rtlCol="0" anchor="ctr"/>
+          <a:lstStyle/>
+          <a:p>
+            <a:pPr marL="0" indent="0">
+              <a:buNone/>
+            </a:pPr>
+            <a:r>
+              <a:rPr lang="en-US" sz="1200" b="1" dirty="0">
+                <a:solidFill>
+                  <a:srgbClr val="1F4E79"/>
+                </a:solidFill>
+              </a:rPr>
+              <a:t>Streamlit</a:t>
+            </a:r>
+            <a:endParaRPr lang="en-US" sz="1200" dirty="0"/>
+          </a:p>
+        </p:txBody>
+      </p:sp>
+      <p:sp>
+        <p:nvSpPr>
+          <p:cNvPr id="38" name="Text 30"/>
+          <p:cNvSpPr/>
+          <p:nvPr/>
+        </p:nvSpPr>
+        <p:spPr>
+          <a:xfrm>
+            <a:off x="6720840" y="3383280"/>
+            <a:ext cx="1920240" cy="274320"/>
+          </a:xfrm>
+          <a:prstGeom prst="rect">
+            <a:avLst/>
+          </a:prstGeom>
+          <a:noFill/>
+          <a:ln/>
+        </p:spPr>
+        <p:txBody>
+          <a:bodyPr wrap="square" rtlCol="0" anchor="ctr"/>
+          <a:lstStyle/>
+          <a:p>
+            <a:pPr marL="0" indent="0">
+              <a:buNone/>
+            </a:pPr>
+            <a:r>
+              <a:rPr lang="en-US" sz="1000" i="1" dirty="0">
+                <a:solidFill>
+                  <a:srgbClr val="5D6D7E"/>
+                </a:solidFill>
+              </a:rPr>
+              <a:t>Interface</a:t>
+            </a:r>
+            <a:endParaRPr lang="en-US" sz="1000" dirty="0"/>
+          </a:p>
+        </p:txBody>
+      </p:sp>
+      <p:sp>
+        <p:nvSpPr>
+          <p:cNvPr id="39" name="Text 31"/>
+          <p:cNvSpPr/>
+          <p:nvPr/>
+        </p:nvSpPr>
+        <p:spPr>
+          <a:xfrm>
+            <a:off x="6144768" y="3749040"/>
+            <a:ext cx="2487168" cy="914400"/>
+          </a:xfrm>
+          <a:prstGeom prst="rect">
+            <a:avLst/>
+          </a:prstGeom>
+          <a:noFill/>
+          <a:ln/>
+        </p:spPr>
+        <p:txBody>
+          <a:bodyPr wrap="square" rtlCol="0" anchor="ctr"/>
+          <a:lstStyle/>
+          <a:p>
+            <a:pPr marL="0" indent="0">
+              <a:buNone/>
+            </a:pPr>
+            <a:r>
+              <a:rPr lang="en-US" sz="1000" dirty="0">
+                <a:solidFill>
+                  <a:srgbClr val="5D6D7E"/>
+                </a:solidFill>
+              </a:rPr>
+              <a:t>Conversational interface with source sidebar. Single load via @st.cache_resource.</a:t>
+            </a:r>
+            <a:endParaRPr lang="en-US" sz="1000" dirty="0"/>
+          </a:p>
+        </p:txBody>
+      </p:sp>
+    </p:spTree>
+    <p:extLst>
+      <p:ext uri="{BB962C8B-B14F-4D97-AF65-F5344CB8AC3E}">
+        <p14:creationId xmlns:p14="http://schemas.microsoft.com/office/powerpoint/2010/main" val="3449270898"/>
+      </p:ext>
+    </p:extLst>
+  </p:cSld>
+  <p:clrMapOvr>
+    <a:masterClrMapping/>
+  </p:clrMapOvr>
+</p:sld>
+</file>
+
+<file path=ppt/slides/slide6.xml><?xml version="1.0" encoding="utf-8"?>
+<p:sld xmlns:a="http://schemas.openxmlformats.org/drawingml/2006/main" xmlns:r="http://schemas.openxmlformats.org/officeDocument/2006/relationships" xmlns:p="http://schemas.openxmlformats.org/presentationml/2006/main">
+  <p:cSld name="LangChain">
+    <p:bg>
+      <p:bgPr>
+        <a:solidFill>
+          <a:srgbClr val="FFFFFF"/>
+        </a:solidFill>
+        <a:effectLst/>
+      </p:bgPr>
+    </p:bg>
+    <p:spTree>
+      <p:nvGrpSpPr>
+        <p:cNvPr id="1" name=""/>
+        <p:cNvGrpSpPr/>
+        <p:nvPr/>
+      </p:nvGrpSpPr>
+      <p:grpSpPr>
+        <a:xfrm>
+          <a:off x="0" y="0"/>
+          <a:ext cx="0" cy="0"/>
+          <a:chOff x="0" y="0"/>
+          <a:chExt cx="0" cy="0"/>
+        </a:xfrm>
+      </p:grpSpPr>
+      <p:sp>
+        <p:nvSpPr>
+          <p:cNvPr id="2" name="Header"/>
+          <p:cNvSpPr/>
+          <p:nvPr/>
+        </p:nvSpPr>
+        <p:spPr>
+          <a:xfrm>
+            <a:off x="0" y="0"/>
+            <a:ext cx="9144000" cy="914400"/>
+          </a:xfrm>
+          <a:prstGeom prst="rect">
+            <a:avLst/>
+          </a:prstGeom>
+          <a:solidFill>
+            <a:srgbClr val="1F4E79"/>
+          </a:solidFill>
+          <a:ln/>
+        </p:spPr>
+      </p:sp>
+      <p:sp>
+        <p:nvSpPr>
+          <p:cNvPr id="3" name="HeaderText"/>
+          <p:cNvSpPr/>
+          <p:nvPr/>
+        </p:nvSpPr>
+        <p:spPr>
+          <a:xfrm>
+            <a:off x="365760" y="0"/>
+            <a:ext cx="8412480" cy="914400"/>
+          </a:xfrm>
+          <a:prstGeom prst="rect">
+            <a:avLst/>
+          </a:prstGeom>
+          <a:noFill/>
+          <a:ln/>
+        </p:spPr>
+        <p:txBody>
+          <a:bodyPr wrap="square" rtlCol="0" anchor="ctr"/>
+          <a:lstStyle/>
+          <a:p>
+            <a:pPr marL="0" indent="0">
+              <a:buNone/>
+            </a:pPr>
+            <a:r>
+              <a:rPr lang="en-US" sz="2200" b="1" dirty="0">
+                <a:solidFill>
+                  <a:srgbClr val="FFFFFF"/>
+                </a:solidFill>
+              </a:rPr>
+              <a:t>WHY LANGCHAIN  |  RAG PIPELINE ORCHESTRATION</a:t>
+            </a:r>
+          </a:p>
+        </p:txBody>
+      </p:sp>
+      <p:sp>
+        <p:nvSpPr>
+          <p:cNvPr id="10" name="LeftCard"/>
+          <p:cNvSpPr/>
+          <p:nvPr/>
+        </p:nvSpPr>
+        <p:spPr>
+          <a:xfrm>
+            <a:off x="274320" y="1051560"/>
+            <a:ext cx="4114800" cy="4100400"/>
+          </a:xfrm>
+          <a:prstGeom prst="roundRect">
+            <a:avLst>
+              <a:gd name="adj" fmla="val 8000"/>
+            </a:avLst>
+          </a:prstGeom>
+          <a:solidFill>
+            <a:srgbClr val="F2F6FA"/>
+          </a:solidFill>
+          <a:ln/>
+        </p:spPr>
+      </p:sp>
+      <p:sp>
+        <p:nvSpPr>
+          <p:cNvPr id="11" name="IconCircle"/>
+          <p:cNvSpPr/>
+          <p:nvPr/>
+        </p:nvSpPr>
+        <p:spPr>
+          <a:xfrm>
+            <a:off x="457200" y="1234440"/>
+            <a:ext cx="548640" cy="548640"/>
+          </a:xfrm>
+          <a:prstGeom prst="ellipse">
+            <a:avLst/>
+          </a:prstGeom>
+          <a:solidFill>
+            <a:srgbClr val="028090"/>
+          </a:solidFill>
+          <a:ln/>
+        </p:spPr>
+      </p:sp>
+      <p:sp>
+        <p:nvSpPr>
+          <p:cNvPr id="12" name="IconText"/>
+          <p:cNvSpPr/>
+          <p:nvPr/>
+        </p:nvSpPr>
+        <p:spPr>
+          <a:xfrm>
+            <a:off x="457200" y="1234440"/>
+            <a:ext cx="548640" cy="548640"/>
+          </a:xfrm>
+          <a:prstGeom prst="rect">
+            <a:avLst/>
+          </a:prstGeom>
+          <a:noFill/>
+          <a:ln/>
+        </p:spPr>
+        <p:txBody>
+          <a:bodyPr wrap="square" lIns="0" tIns="0" rIns="0" bIns="0" rtlCol="0" anchor="ctr"/>
+          <a:lstStyle/>
+          <a:p>
+            <a:pPr marL="0" indent="0" algn="ctr">
+              <a:buNone/>
+            </a:pPr>
+            <a:r>
+              <a:rPr lang="en-US" sz="1800" b="1" dirty="0">
+                <a:solidFill>
+                  <a:srgbClr val="FFFFFF"/>
+                </a:solidFill>
+              </a:rPr>
+              <a:t>LC</a:t>
+            </a:r>
+          </a:p>
+        </p:txBody>
+      </p:sp>
+      <p:sp>
+        <p:nvSpPr>
+          <p:cNvPr id="13" name="LeftTitle"/>
+          <p:cNvSpPr/>
+          <p:nvPr/>
+        </p:nvSpPr>
+        <p:spPr>
+          <a:xfrm>
+            <a:off x="1097280" y="1270440"/>
+            <a:ext cx="3200400" cy="400000"/>
+          </a:xfrm>
+          <a:prstGeom prst="rect">
+            <a:avLst/>
+          </a:prstGeom>
+          <a:noFill/>
+          <a:ln/>
+        </p:spPr>
+        <p:txBody>
+          <a:bodyPr wrap="square" rtlCol="0" anchor="ctr"/>
+          <a:lstStyle/>
+          <a:p>
+            <a:pPr marL="0" indent="0">
+              <a:buNone/>
+            </a:pPr>
+            <a:r>
+              <a:rPr lang="en-US" sz="1600" b="1" dirty="0">
+                <a:solidFill>
+                  <a:srgbClr val="1F4E79"/>
+                </a:solidFill>
+              </a:rPr>
+              <a:t>LangChain</a:t>
+            </a:r>
+          </a:p>
+        </p:txBody>
+      </p:sp>
+      <p:sp>
+        <p:nvSpPr>
+          <p:cNvPr id="14" name="LeftSub"/>
+          <p:cNvSpPr/>
+          <p:nvPr/>
+        </p:nvSpPr>
+        <p:spPr>
+          <a:xfrm>
+            <a:off x="1097280" y="1620000"/>
+            <a:ext cx="3200400" cy="280000"/>
+          </a:xfrm>
+          <a:prstGeom prst="rect">
+            <a:avLst/>
+          </a:prstGeom>
+          <a:noFill/>
+          <a:ln/>
+        </p:spPr>
+        <p:txBody>
+          <a:bodyPr wrap="square" rtlCol="0" anchor="ctr"/>
+          <a:lstStyle/>
+          <a:p>
+            <a:pPr marL="0" indent="0">
+              <a:buNone/>
+            </a:pPr>
+            <a:r>
+              <a:rPr lang="en-US" sz="1100" i="1" dirty="0">
+                <a:solidFill>
+                  <a:srgbClr val="5D6D7E"/>
+                </a:solidFill>
+              </a:rPr>
+              <a:t>NLP orchestration framework</a:t>
+            </a:r>
+          </a:p>
+        </p:txBody>
+      </p:sp>
+      <p:sp>
+        <p:nvSpPr>
+          <p:cNvPr id="15" name="LeftBody"/>
+          <p:cNvSpPr/>
+          <p:nvPr/>
+        </p:nvSpPr>
+        <p:spPr>
+          <a:xfrm>
+            <a:off x="457200" y="2000000"/>
+            <a:ext cx="3840000" cy="3000000"/>
+          </a:xfrm>
+          <a:prstGeom prst="rect">
+            <a:avLst/>
+          </a:prstGeom>
+          <a:noFill/>
+          <a:ln/>
+        </p:spPr>
+        <p:txBody>
+          <a:bodyPr wrap="square" rtlCol="0" anchor="t"/>
+          <a:lstStyle/>
+          <a:p>
+            <a:pPr marL="228600" indent="-228600">
+              <a:buChar char="•"/>
+            </a:pPr>
+            <a:r>
+              <a:rPr lang="en-US" sz="1100" dirty="0">
+                <a:solidFill>
+                  <a:srgbClr val="5D6D7E"/>
+                </a:solidFill>
+              </a:rPr>
+              <a:t>Standardised interfaces for LLMs and vector stores — switching providers requires only a configuration change</a:t>
+            </a:r>
+          </a:p>
+          <a:p>
+            <a:pPr marL="228600" indent="-228600">
+              <a:buChar char="•"/>
+            </a:pPr>
+            <a:r>
+              <a:rPr lang="en-US" sz="1100" dirty="0">
+                <a:solidFill>
+                  <a:srgbClr val="5D6D7E"/>
+                </a:solidFill>
+              </a:rPr>
+              <a:t>Pre-built RAG chains (RetrievalQA) that orchestrate retrieval and generation in a few lines</a:t>
+            </a:r>
+          </a:p>
+          <a:p>
+            <a:pPr marL="228600" indent="-228600">
+              <a:buChar char="•"/>
+            </a:pPr>
+            <a:r>
+              <a:rPr lang="en-US" sz="1100" dirty="0">
+                <a:solidFill>
+                  <a:srgbClr val="5D6D7E"/>
+                </a:solidFill>
+              </a:rPr>
+              <a:t>Large ecosystem of connectors for dozens of LLM providers and vector databases</a:t>
+            </a:r>
+          </a:p>
+          <a:p>
+            <a:pPr marL="228600" indent="-228600">
+              <a:buChar char="•"/>
+            </a:pPr>
+            <a:r>
+              <a:rPr lang="en-US" sz="1100" dirty="0">
+                <a:solidFill>
+                  <a:srgbClr val="5D6D7E"/>
+                </a:solidFill>
+              </a:rPr>
+              <a:t>Native conversation history handling for future multi-turn versions in production</a:t>
+            </a:r>
+          </a:p>
+          <a:p>
+            <a:pPr marL="228600" indent="-228600">
+              <a:buChar char="•"/>
+            </a:pPr>
+            <a:r>
+              <a:rPr lang="en-US" sz="1100" dirty="0">
+                <a:solidFill>
+                  <a:srgbClr val="5D6D7E"/>
+                </a:solidFill>
+              </a:rPr>
+              <a:t>Single shared chain: the same module powers the live chatbot and the RAGAS evaluation</a:t>
+            </a:r>
+          </a:p>
+        </p:txBody>
+      </p:sp>
+      <p:sp>
+        <p:nvSpPr>
+          <p:cNvPr id="20" name="RightCard"/>
+          <p:cNvSpPr/>
+          <p:nvPr/>
+        </p:nvSpPr>
+        <p:spPr>
+          <a:xfrm>
+            <a:off x="4754880" y="1051560"/>
+            <a:ext cx="4114800" cy="4100400"/>
+          </a:xfrm>
+          <a:prstGeom prst="roundRect">
+            <a:avLst>
+              <a:gd name="adj" fmla="val 8000"/>
+            </a:avLst>
+          </a:prstGeom>
+          <a:solidFill>
+            <a:srgbClr val="F2F6FA"/>
+          </a:solidFill>
+          <a:ln/>
+        </p:spPr>
+      </p:sp>
+      <p:sp>
+        <p:nvSpPr>
+          <p:cNvPr id="21" name="RightTitle"/>
+          <p:cNvSpPr/>
+          <p:nvPr/>
+        </p:nvSpPr>
+        <p:spPr>
+          <a:xfrm>
+            <a:off x="5029200" y="1270440"/>
+            <a:ext cx="3657600" cy="400000"/>
+          </a:xfrm>
+          <a:prstGeom prst="rect">
+            <a:avLst/>
+          </a:prstGeom>
+          <a:noFill/>
+          <a:ln/>
+        </p:spPr>
+        <p:txBody>
+          <a:bodyPr wrap="square" rtlCol="0" anchor="ctr"/>
+          <a:lstStyle/>
+          <a:p>
+            <a:pPr marL="0" indent="0">
+              <a:buNone/>
+            </a:pPr>
+            <a:r>
+              <a:rPr lang="en-US" sz="1400" b="1" dirty="0">
+                <a:solidFill>
+                  <a:srgbClr val="1F4E79"/>
+                </a:solidFill>
+              </a:rPr>
+              <a:t>Role in this project</a:t>
+            </a:r>
+          </a:p>
+        </p:txBody>
+      </p:sp>
+      <p:sp>
+        <p:nvSpPr>
+          <p:cNvPr id="30" name="BlockA"/>
+          <p:cNvSpPr/>
+          <p:nvPr/>
+        </p:nvSpPr>
+        <p:spPr>
+          <a:xfrm>
+            <a:off x="4937400" y="1828800"/>
+            <a:ext cx="3657600" cy="914400"/>
+          </a:xfrm>
+          <a:prstGeom prst="roundRect">
+            <a:avLst>
+              <a:gd name="adj" fmla="val 6000"/>
+            </a:avLst>
+          </a:prstGeom>
+          <a:solidFill>
+            <a:srgbClr val="FFFFFF"/>
+          </a:solidFill>
+          <a:ln w="9525">
+            <a:solidFill>
+              <a:srgbClr val="D3D1C7"/>
+            </a:solidFill>
+          </a:ln>
+        </p:spPr>
+      </p:sp>
+      <p:sp>
+        <p:nvSpPr>
+          <p:cNvPr id="31" name="BlockALabel"/>
+          <p:cNvSpPr/>
+          <p:nvPr/>
+        </p:nvSpPr>
+        <p:spPr>
+          <a:xfrm>
+            <a:off x="4937400" y="1828800"/>
+            <a:ext cx="548640" cy="914400"/>
+          </a:xfrm>
+          <a:prstGeom prst="roundRect">
+            <a:avLst>
+              <a:gd name="adj" fmla="val 6000"/>
+            </a:avLst>
+          </a:prstGeom>
+          <a:solidFill>
+            <a:srgbClr val="028090"/>
+          </a:solidFill>
+          <a:ln/>
+        </p:spPr>
+      </p:sp>
+      <p:sp>
+        <p:nvSpPr>
+          <p:cNvPr id="32" name="BlockALabelTxt"/>
+          <p:cNvSpPr/>
+          <p:nvPr/>
+        </p:nvSpPr>
+        <p:spPr>
+          <a:xfrm>
+            <a:off x="4937400" y="1828800"/>
+            <a:ext cx="548640" cy="914400"/>
+          </a:xfrm>
+          <a:prstGeom prst="rect">
+            <a:avLst/>
+          </a:prstGeom>
+          <a:noFill/>
+          <a:ln/>
+        </p:spPr>
+        <p:txBody>
+          <a:bodyPr wrap="square" lIns="0" tIns="0" rIns="0" bIns="0" rtlCol="0" anchor="ctr"/>
+          <a:lstStyle/>
+          <a:p>
+            <a:pPr marL="0" indent="0" algn="ctr">
+              <a:buNone/>
+            </a:pPr>
+            <a:r>
+              <a:rPr lang="en-US" sz="800" b="1" dirty="0">
+                <a:solidFill>
+                  <a:srgbClr val="FFFFFF"/>
+                </a:solidFill>
+              </a:rPr>
+              <a:t>CHATBOT</a:t>
+            </a:r>
+          </a:p>
+        </p:txBody>
+      </p:sp>
+      <p:sp>
+        <p:nvSpPr>
+          <p:cNvPr id="33" name="BlockAText"/>
+          <p:cNvSpPr/>
+          <p:nvPr/>
+        </p:nvSpPr>
+        <p:spPr>
+          <a:xfrm>
+            <a:off x="5577480" y="1865880"/>
+            <a:ext cx="2926200" cy="840240"/>
+          </a:xfrm>
+          <a:prstGeom prst="rect">
+            <a:avLst/>
+          </a:prstGeom>
+          <a:noFill/>
+          <a:ln/>
+        </p:spPr>
+        <p:txBody>
+          <a:bodyPr wrap="square" rtlCol="0" anchor="ctr"/>
+          <a:lstStyle/>
+          <a:p>
+            <a:pPr marL="0" indent="0">
+              <a:buNone/>
+            </a:pPr>
+            <a:r>
+              <a:rPr lang="en-US" sz="1100" b="1" dirty="0">
+                <a:solidFill>
+                  <a:srgbClr val="1F4E79"/>
+                </a:solidFill>
+              </a:rPr>
+              <a:t>Single LCEL chain</a:t>
+            </a:r>
+          </a:p>
+          <a:p>
+            <a:pPr marL="0" indent="0">
+              <a:buNone/>
+            </a:pPr>
+            <a:r>
+              <a:rPr lang="en-US" sz="1000" dirty="0">
+                <a:solidFill>
+                  <a:srgbClr val="5D6D7E"/>
+                </a:solidFill>
+              </a:rPr>
+              <a:t>embed → retrieve → generate — used by the chatbot AND the evaluation</a:t>
+            </a:r>
+          </a:p>
+        </p:txBody>
+      </p:sp>
+      <p:sp>
+        <p:nvSpPr>
+          <p:cNvPr id="40" name="BlockB"/>
+          <p:cNvSpPr/>
+          <p:nvPr/>
+        </p:nvSpPr>
+        <p:spPr>
+          <a:xfrm>
+            <a:off x="4937400" y="2835000"/>
+            <a:ext cx="3657600" cy="914400"/>
+          </a:xfrm>
+          <a:prstGeom prst="roundRect">
+            <a:avLst>
+              <a:gd name="adj" fmla="val 6000"/>
+            </a:avLst>
+          </a:prstGeom>
+          <a:solidFill>
+            <a:srgbClr val="FFFFFF"/>
+          </a:solidFill>
+          <a:ln w="9525">
+            <a:solidFill>
+              <a:srgbClr val="D3D1C7"/>
+            </a:solidFill>
+          </a:ln>
+        </p:spPr>
+      </p:sp>
+      <p:sp>
+        <p:nvSpPr>
+          <p:cNvPr id="41" name="BlockBLabel"/>
+          <p:cNvSpPr/>
+          <p:nvPr/>
+        </p:nvSpPr>
+        <p:spPr>
+          <a:xfrm>
+            <a:off x="4937400" y="2835000"/>
+            <a:ext cx="548640" cy="914400"/>
+          </a:xfrm>
+          <a:prstGeom prst="roundRect">
+            <a:avLst>
+              <a:gd name="adj" fmla="val 6000"/>
+            </a:avLst>
+          </a:prstGeom>
+          <a:solidFill>
+            <a:srgbClr val="2E75B6"/>
+          </a:solidFill>
+          <a:ln/>
+        </p:spPr>
+      </p:sp>
+      <p:sp>
+        <p:nvSpPr>
+          <p:cNvPr id="42" name="BlockBLabelTxt"/>
+          <p:cNvSpPr/>
+          <p:nvPr/>
+        </p:nvSpPr>
+        <p:spPr>
+          <a:xfrm>
+            <a:off x="4937400" y="2835000"/>
+            <a:ext cx="548640" cy="914400"/>
+          </a:xfrm>
+          <a:prstGeom prst="rect">
+            <a:avLst/>
+          </a:prstGeom>
+          <a:noFill/>
+          <a:ln/>
+        </p:spPr>
+        <p:txBody>
+          <a:bodyPr wrap="square" lIns="0" tIns="0" rIns="0" bIns="0" rtlCol="0" anchor="ctr"/>
+          <a:lstStyle/>
+          <a:p>
+            <a:pPr marL="0" indent="0" algn="ctr">
+              <a:buNone/>
+            </a:pPr>
+            <a:r>
+              <a:rPr lang="en-US" sz="650" b="1" dirty="0">
+                <a:solidFill>
+                  <a:srgbClr val="FFFFFF"/>
+                </a:solidFill>
+              </a:rPr>
+              <a:t>EVALUATION</a:t>
+            </a:r>
+          </a:p>
+        </p:txBody>
+      </p:sp>
+      <p:sp>
+        <p:nvSpPr>
+          <p:cNvPr id="43" name="BlockBText"/>
+          <p:cNvSpPr/>
+          <p:nvPr/>
+        </p:nvSpPr>
+        <p:spPr>
+          <a:xfrm>
+            <a:off x="5577480" y="2872080"/>
+            <a:ext cx="2926200" cy="840240"/>
+          </a:xfrm>
+          <a:prstGeom prst="rect">
+            <a:avLst/>
+          </a:prstGeom>
+          <a:noFill/>
+          <a:ln/>
+        </p:spPr>
+        <p:txBody>
+          <a:bodyPr wrap="square" rtlCol="0" anchor="ctr"/>
+          <a:lstStyle/>
+          <a:p>
+            <a:pPr marL="0" indent="0">
+              <a:buNone/>
+            </a:pPr>
+            <a:r>
+              <a:rPr lang="en-US" sz="1100" b="1" dirty="0">
+                <a:solidFill>
+                  <a:srgbClr val="1F4E79"/>
+                </a:solidFill>
+              </a:rPr>
+              <a:t>Same RAGAS chain</a:t>
+            </a:r>
+          </a:p>
+          <a:p>
+            <a:pPr marL="0" indent="0">
+              <a:buNone/>
+            </a:pPr>
+            <a:r>
+              <a:rPr lang="en-US" sz="1000" dirty="0">
+                <a:solidFill>
+                  <a:srgbClr val="5D6D7E"/>
+                </a:solidFill>
+              </a:rPr>
+              <a:t>30 annotated questions evaluated on the chatbot's exact chain</a:t>
+            </a:r>
+          </a:p>
+        </p:txBody>
+      </p:sp>
+      <p:sp>
+        <p:nvSpPr>
+          <p:cNvPr id="50" name="BlockC"/>
+          <p:cNvSpPr/>
+          <p:nvPr/>
+        </p:nvSpPr>
+        <p:spPr>
+          <a:xfrm>
+            <a:off x="4937400" y="3841200"/>
+            <a:ext cx="3657600" cy="914400"/>
+          </a:xfrm>
+          <a:prstGeom prst="roundRect">
+            <a:avLst>
+              <a:gd name="adj" fmla="val 6000"/>
+            </a:avLst>
+          </a:prstGeom>
+          <a:solidFill>
+            <a:srgbClr val="EBF3FB"/>
+          </a:solidFill>
+          <a:ln w="9525">
+            <a:solidFill>
+              <a:srgbClr val="185FA5"/>
+            </a:solidFill>
+          </a:ln>
+        </p:spPr>
+      </p:sp>
+      <p:sp>
+        <p:nvSpPr>
+          <p:cNvPr id="51" name="BlockCText"/>
+          <p:cNvSpPr/>
+          <p:nvPr/>
+        </p:nvSpPr>
+        <p:spPr>
+          <a:xfrm>
+            <a:off x="5029200" y="3878280"/>
+            <a:ext cx="3474720" cy="840240"/>
+          </a:xfrm>
+          <a:prstGeom prst="rect">
+            <a:avLst/>
+          </a:prstGeom>
+          <a:noFill/>
+          <a:ln/>
+        </p:spPr>
+        <p:txBody>
+          <a:bodyPr wrap="square" rtlCol="0" anchor="ctr"/>
+          <a:lstStyle/>
+          <a:p>
+            <a:pPr marL="0" indent="0">
+              <a:buNone/>
+            </a:pPr>
+            <a:r>
+              <a:rPr lang="en-US" sz="1000" b="1" dirty="0">
+                <a:solidFill>
+                  <a:srgbClr val="0C447C"/>
+                </a:solidFill>
+              </a:rPr>
+              <a:t>Why not the Mistral API directly?</a:t>
+            </a:r>
+          </a:p>
+          <a:p>
+            <a:pPr marL="0" indent="0">
+              <a:buNone/>
+            </a:pPr>
+            <a:r>
+              <a:rPr lang="en-US" sz="1000" dirty="0">
+                <a:solidFill>
+                  <a:srgbClr val="185FA5"/>
+                </a:solidFill>
+              </a:rPr>
+              <a:t>LangChain abstracts the provider: migrating to GPT-4 or Llama needs no rewrite of the retrieval logic</a:t>
+            </a:r>
+          </a:p>
+        </p:txBody>
+      </p:sp>
+      <p:sp>
+        <p:nvSpPr>
+          <p:cNvPr id="99" name="Notes"/>
+          <p:cNvSpPr>
+            <a:spLocks noGrp="1"/>
+          </p:cNvSpPr>
+          <p:nvPr>
+            <p:ph type="body" idx="1"/>
+          </p:nvPr>
+        </p:nvSpPr>
+        <p:spPr/>
+        <p:txBody>
+          <a:bodyPr/>
+          <a:lstStyle/>
+          <a:p>
+            <a:r>
+              <a:t>Jeremy will specifically ask why LangChain. Answer in 3 points: (1) standardised interfaces mean portability across LLM providers and vector stores, (2) the LCEL chain natively orchestrates retrieval plus generation, (3) a large community-maintained ecosystem. src/rag/langchain_chain.py is the single source used by both the Streamlit chatbot and the RAGAS evaluation script, guaranteeing that what gets measured matches exactly what the user experiences.</a:t>
+            </a:r>
+          </a:p>
+        </p:txBody>
+      </p:sp>
+    </p:spTree>
+  </p:cSld>
+  <p:clrMapOvr>
+    <a:masterClrMapping/>
+  </p:clrMapOvr>
+</p:sld>
+</file>
+
+<file path=ppt/slides/slide7.xml><?xml version="1.0" encoding="utf-8"?>
+<p:sld xmlns:a="http://schemas.openxmlformats.org/drawingml/2006/main" xmlns:r="http://schemas.openxmlformats.org/officeDocument/2006/relationships" xmlns:p="http://schemas.openxmlformats.org/presentationml/2006/main">
   <p:cSld name="Slide 6">
     <p:bg>
       <p:bgPr>
@@ -9861,7 +12263,7 @@
         </p:nvSpPr>
         <p:spPr>
           <a:xfrm>
-            <a:off x="0" y="0"/>
+            <a:off x="0" y="13716"/>
             <a:ext cx="9144000" cy="914400"/>
           </a:xfrm>
           <a:prstGeom prst="rect">
@@ -10932,7 +13334,7 @@
 </p:sld>
 </file>
 
-<file path=ppt/slides/slide6.xml><?xml version="1.0" encoding="utf-8"?>
+<file path=ppt/slides/slide8.xml><?xml version="1.0" encoding="utf-8"?>
 <p:sld xmlns:a="http://schemas.openxmlformats.org/drawingml/2006/main" xmlns:r="http://schemas.openxmlformats.org/officeDocument/2006/relationships" xmlns:p="http://schemas.openxmlformats.org/presentationml/2006/main">
   <p:cSld name="Slide 7">
     <p:bg>
@@ -11945,7 +14347,7 @@
 </p:sld>
 </file>
 
-<file path=ppt/slides/slide7.xml><?xml version="1.0" encoding="utf-8"?>
+<file path=ppt/slides/slide9.xml><?xml version="1.0" encoding="utf-8"?>
 <p:sld xmlns:a="http://schemas.openxmlformats.org/drawingml/2006/main" xmlns:r="http://schemas.openxmlformats.org/officeDocument/2006/relationships" xmlns:p="http://schemas.openxmlformats.org/presentationml/2006/main">
   <p:cSld name="Slide 8">
     <p:bg>
@@ -12496,2445 +14898,6 @@
               <a:t>Ste-Elisabeth</a:t>
             </a:r>
             <a:endParaRPr lang="en-US" sz="900" dirty="0"/>
-          </a:p>
-        </p:txBody>
-      </p:sp>
-    </p:spTree>
-  </p:cSld>
-  <p:clrMapOvr>
-    <a:masterClrMapping/>
-  </p:clrMapOvr>
-</p:sld>
-</file>
-
-<file path=ppt/slides/slide8.xml><?xml version="1.0" encoding="utf-8"?>
-<p:sld xmlns:a="http://schemas.openxmlformats.org/drawingml/2006/main" xmlns:r="http://schemas.openxmlformats.org/officeDocument/2006/relationships" xmlns:p="http://schemas.openxmlformats.org/presentationml/2006/main">
-  <p:cSld name="Slide 9">
-    <p:bg>
-      <p:bgPr>
-        <a:solidFill>
-          <a:srgbClr val="FFFFFF"/>
-        </a:solidFill>
-        <a:effectLst/>
-      </p:bgPr>
-    </p:bg>
-    <p:spTree>
-      <p:nvGrpSpPr>
-        <p:cNvPr id="1" name=""/>
-        <p:cNvGrpSpPr/>
-        <p:nvPr/>
-      </p:nvGrpSpPr>
-      <p:grpSpPr>
-        <a:xfrm>
-          <a:off x="0" y="0"/>
-          <a:ext cx="0" cy="0"/>
-          <a:chOff x="0" y="0"/>
-          <a:chExt cx="0" cy="0"/>
-        </a:xfrm>
-      </p:grpSpPr>
-      <p:sp>
-        <p:nvSpPr>
-          <p:cNvPr id="2" name="Shape 0"/>
-          <p:cNvSpPr/>
-          <p:nvPr/>
-        </p:nvSpPr>
-        <p:spPr>
-          <a:xfrm>
-            <a:off x="0" y="0"/>
-            <a:ext cx="9144000" cy="914400"/>
-          </a:xfrm>
-          <a:prstGeom prst="rect">
-            <a:avLst/>
-          </a:prstGeom>
-          <a:solidFill>
-            <a:srgbClr val="1F4E79"/>
-          </a:solidFill>
-          <a:ln/>
-        </p:spPr>
-      </p:sp>
-      <p:sp>
-        <p:nvSpPr>
-          <p:cNvPr id="3" name="Text 1"/>
-          <p:cNvSpPr/>
-          <p:nvPr/>
-        </p:nvSpPr>
-        <p:spPr>
-          <a:xfrm>
-            <a:off x="365760" y="0"/>
-            <a:ext cx="8412480" cy="914400"/>
-          </a:xfrm>
-          <a:prstGeom prst="rect">
-            <a:avLst/>
-          </a:prstGeom>
-          <a:noFill/>
-          <a:ln/>
-        </p:spPr>
-        <p:txBody>
-          <a:bodyPr wrap="square" rtlCol="0" anchor="ctr"/>
-          <a:lstStyle/>
-          <a:p>
-            <a:pPr marL="0" indent="0">
-              <a:buNone/>
-            </a:pPr>
-            <a:r>
-              <a:rPr lang="en-US" sz="2200" b="1" dirty="0">
-                <a:solidFill>
-                  <a:srgbClr val="FFFFFF"/>
-                </a:solidFill>
-              </a:rPr>
-              <a:t>UNIT TESTS  |  25 / 25 PASSED</a:t>
-            </a:r>
-            <a:endParaRPr lang="en-US" sz="2200" dirty="0"/>
-          </a:p>
-        </p:txBody>
-      </p:sp>
-      <p:sp>
-        <p:nvSpPr>
-          <p:cNvPr id="4" name="Shape 2"/>
-          <p:cNvSpPr/>
-          <p:nvPr/>
-        </p:nvSpPr>
-        <p:spPr>
-          <a:xfrm>
-            <a:off x="274320" y="1051560"/>
-            <a:ext cx="8595360" cy="685800"/>
-          </a:xfrm>
-          <a:prstGeom prst="roundRect">
-            <a:avLst>
-              <a:gd name="adj" fmla="val 10667"/>
-            </a:avLst>
-          </a:prstGeom>
-          <a:solidFill>
-            <a:srgbClr val="F2F6FA"/>
-          </a:solidFill>
-          <a:ln/>
-        </p:spPr>
-      </p:sp>
-      <p:sp>
-        <p:nvSpPr>
-          <p:cNvPr id="5" name="Shape 3"/>
-          <p:cNvSpPr/>
-          <p:nvPr/>
-        </p:nvSpPr>
-        <p:spPr>
-          <a:xfrm>
-            <a:off x="384048" y="1143000"/>
-            <a:ext cx="457200" cy="502920"/>
-          </a:xfrm>
-          <a:prstGeom prst="roundRect">
-            <a:avLst>
-              <a:gd name="adj" fmla="val 12000"/>
-            </a:avLst>
-          </a:prstGeom>
-          <a:solidFill>
-            <a:srgbClr val="1F4E79"/>
-          </a:solidFill>
-          <a:ln/>
-        </p:spPr>
-      </p:sp>
-      <p:sp>
-        <p:nvSpPr>
-          <p:cNvPr id="6" name="Text 4"/>
-          <p:cNvSpPr/>
-          <p:nvPr/>
-        </p:nvSpPr>
-        <p:spPr>
-          <a:xfrm>
-            <a:off x="384048" y="1143000"/>
-            <a:ext cx="457200" cy="502920"/>
-          </a:xfrm>
-          <a:prstGeom prst="rect">
-            <a:avLst/>
-          </a:prstGeom>
-          <a:noFill/>
-          <a:ln/>
-        </p:spPr>
-        <p:txBody>
-          <a:bodyPr wrap="square" lIns="0" tIns="0" rIns="0" bIns="0" rtlCol="0" anchor="ctr"/>
-          <a:lstStyle/>
-          <a:p>
-            <a:pPr marL="0" indent="0" algn="ctr">
-              <a:buNone/>
-            </a:pPr>
-            <a:r>
-              <a:rPr lang="en-US" sz="1400" b="1" dirty="0">
-                <a:solidFill>
-                  <a:srgbClr val="FFFFFF"/>
-                </a:solidFill>
-              </a:rPr>
-              <a:t>6</a:t>
-            </a:r>
-            <a:endParaRPr lang="en-US" sz="1400" dirty="0"/>
-          </a:p>
-        </p:txBody>
-      </p:sp>
-      <p:sp>
-        <p:nvSpPr>
-          <p:cNvPr id="7" name="Text 5"/>
-          <p:cNvSpPr/>
-          <p:nvPr/>
-        </p:nvSpPr>
-        <p:spPr>
-          <a:xfrm>
-            <a:off x="932688" y="1124712"/>
-            <a:ext cx="2743200" cy="320040"/>
-          </a:xfrm>
-          <a:prstGeom prst="rect">
-            <a:avLst/>
-          </a:prstGeom>
-          <a:noFill/>
-          <a:ln/>
-        </p:spPr>
-        <p:txBody>
-          <a:bodyPr wrap="square" rtlCol="0" anchor="ctr"/>
-          <a:lstStyle/>
-          <a:p>
-            <a:pPr marL="0" indent="0">
-              <a:buNone/>
-            </a:pPr>
-            <a:r>
-              <a:rPr lang="en-US" sz="1200" b="1" dirty="0">
-                <a:solidFill>
-                  <a:srgbClr val="1F4E79"/>
-                </a:solidFill>
-              </a:rPr>
-              <a:t>TestRawData</a:t>
-            </a:r>
-            <a:endParaRPr lang="en-US" sz="1200" dirty="0"/>
-          </a:p>
-        </p:txBody>
-      </p:sp>
-      <p:sp>
-        <p:nvSpPr>
-          <p:cNvPr id="8" name="Text 6"/>
-          <p:cNvSpPr/>
-          <p:nvPr/>
-        </p:nvSpPr>
-        <p:spPr>
-          <a:xfrm>
-            <a:off x="932688" y="1435608"/>
-            <a:ext cx="7315200" cy="256032"/>
-          </a:xfrm>
-          <a:prstGeom prst="rect">
-            <a:avLst/>
-          </a:prstGeom>
-          <a:noFill/>
-          <a:ln/>
-        </p:spPr>
-        <p:txBody>
-          <a:bodyPr wrap="square" rtlCol="0" anchor="ctr"/>
-          <a:lstStyle/>
-          <a:p>
-            <a:pPr marL="0" indent="0">
-              <a:buNone/>
-            </a:pPr>
-            <a:r>
-              <a:rPr lang="en-US" sz="1000" dirty="0">
-                <a:solidFill>
-                  <a:srgbClr val="5D6D7E"/>
-                </a:solidFill>
-              </a:rPr>
-              <a:t>File present, not empty, titles and descriptions non-null, dates present</a:t>
-            </a:r>
-            <a:endParaRPr lang="en-US" sz="1000" dirty="0"/>
-          </a:p>
-        </p:txBody>
-      </p:sp>
-      <p:sp>
-        <p:nvSpPr>
-          <p:cNvPr id="9" name="Text 7"/>
-          <p:cNvSpPr/>
-          <p:nvPr/>
-        </p:nvSpPr>
-        <p:spPr>
-          <a:xfrm>
-            <a:off x="8046720" y="1216152"/>
-            <a:ext cx="777240" cy="320040"/>
-          </a:xfrm>
-          <a:prstGeom prst="rect">
-            <a:avLst/>
-          </a:prstGeom>
-          <a:solidFill>
-            <a:srgbClr val="028090"/>
-          </a:solidFill>
-          <a:ln/>
-        </p:spPr>
-        <p:txBody>
-          <a:bodyPr wrap="square" lIns="38100" tIns="38100" rIns="38100" bIns="38100" rtlCol="0" anchor="ctr"/>
-          <a:lstStyle/>
-          <a:p>
-            <a:pPr marL="0" indent="0" algn="ctr">
-              <a:buNone/>
-            </a:pPr>
-            <a:r>
-              <a:rPr lang="en-US" sz="1000" b="1" dirty="0">
-                <a:solidFill>
-                  <a:srgbClr val="FFFFFF"/>
-                </a:solidFill>
-              </a:rPr>
-              <a:t>PASSED</a:t>
-            </a:r>
-            <a:endParaRPr lang="en-US" sz="1000" dirty="0"/>
-          </a:p>
-        </p:txBody>
-      </p:sp>
-      <p:sp>
-        <p:nvSpPr>
-          <p:cNvPr id="10" name="Shape 8"/>
-          <p:cNvSpPr/>
-          <p:nvPr/>
-        </p:nvSpPr>
-        <p:spPr>
-          <a:xfrm>
-            <a:off x="274320" y="1837944"/>
-            <a:ext cx="8595360" cy="685800"/>
-          </a:xfrm>
-          <a:prstGeom prst="roundRect">
-            <a:avLst>
-              <a:gd name="adj" fmla="val 10667"/>
-            </a:avLst>
-          </a:prstGeom>
-          <a:solidFill>
-            <a:srgbClr val="F2F6FA"/>
-          </a:solidFill>
-          <a:ln/>
-        </p:spPr>
-      </p:sp>
-      <p:sp>
-        <p:nvSpPr>
-          <p:cNvPr id="11" name="Shape 9"/>
-          <p:cNvSpPr/>
-          <p:nvPr/>
-        </p:nvSpPr>
-        <p:spPr>
-          <a:xfrm>
-            <a:off x="384048" y="1929384"/>
-            <a:ext cx="457200" cy="502920"/>
-          </a:xfrm>
-          <a:prstGeom prst="roundRect">
-            <a:avLst>
-              <a:gd name="adj" fmla="val 12000"/>
-            </a:avLst>
-          </a:prstGeom>
-          <a:solidFill>
-            <a:srgbClr val="2E75B6"/>
-          </a:solidFill>
-          <a:ln/>
-        </p:spPr>
-      </p:sp>
-      <p:sp>
-        <p:nvSpPr>
-          <p:cNvPr id="12" name="Text 10"/>
-          <p:cNvSpPr/>
-          <p:nvPr/>
-        </p:nvSpPr>
-        <p:spPr>
-          <a:xfrm>
-            <a:off x="384048" y="1929384"/>
-            <a:ext cx="457200" cy="502920"/>
-          </a:xfrm>
-          <a:prstGeom prst="rect">
-            <a:avLst/>
-          </a:prstGeom>
-          <a:noFill/>
-          <a:ln/>
-        </p:spPr>
-        <p:txBody>
-          <a:bodyPr wrap="square" lIns="0" tIns="0" rIns="0" bIns="0" rtlCol="0" anchor="ctr"/>
-          <a:lstStyle/>
-          <a:p>
-            <a:pPr marL="0" indent="0" algn="ctr">
-              <a:buNone/>
-            </a:pPr>
-            <a:r>
-              <a:rPr lang="en-US" sz="1400" b="1" dirty="0">
-                <a:solidFill>
-                  <a:srgbClr val="FFFFFF"/>
-                </a:solidFill>
-              </a:rPr>
-              <a:t>3</a:t>
-            </a:r>
-            <a:endParaRPr lang="en-US" sz="1400" dirty="0"/>
-          </a:p>
-        </p:txBody>
-      </p:sp>
-      <p:sp>
-        <p:nvSpPr>
-          <p:cNvPr id="13" name="Text 11"/>
-          <p:cNvSpPr/>
-          <p:nvPr/>
-        </p:nvSpPr>
-        <p:spPr>
-          <a:xfrm>
-            <a:off x="932688" y="1911096"/>
-            <a:ext cx="2743200" cy="320040"/>
-          </a:xfrm>
-          <a:prstGeom prst="rect">
-            <a:avLst/>
-          </a:prstGeom>
-          <a:noFill/>
-          <a:ln/>
-        </p:spPr>
-        <p:txBody>
-          <a:bodyPr wrap="square" rtlCol="0" anchor="ctr"/>
-          <a:lstStyle/>
-          <a:p>
-            <a:pPr marL="0" indent="0">
-              <a:buNone/>
-            </a:pPr>
-            <a:r>
-              <a:rPr lang="en-US" sz="1200" b="1" dirty="0">
-                <a:solidFill>
-                  <a:srgbClr val="1F4E79"/>
-                </a:solidFill>
-              </a:rPr>
-              <a:t>TestDateFilter</a:t>
-            </a:r>
-            <a:endParaRPr lang="en-US" sz="1200" dirty="0"/>
-          </a:p>
-        </p:txBody>
-      </p:sp>
-      <p:sp>
-        <p:nvSpPr>
-          <p:cNvPr id="14" name="Text 12"/>
-          <p:cNvSpPr/>
-          <p:nvPr/>
-        </p:nvSpPr>
-        <p:spPr>
-          <a:xfrm>
-            <a:off x="932688" y="2221992"/>
-            <a:ext cx="7315200" cy="256032"/>
-          </a:xfrm>
-          <a:prstGeom prst="rect">
-            <a:avLst/>
-          </a:prstGeom>
-          <a:noFill/>
-          <a:ln/>
-        </p:spPr>
-        <p:txBody>
-          <a:bodyPr wrap="square" rtlCol="0" anchor="ctr"/>
-          <a:lstStyle/>
-          <a:p>
-            <a:pPr marL="0" indent="0">
-              <a:buNone/>
-            </a:pPr>
-            <a:r>
-              <a:rPr lang="en-US" sz="1000" dirty="0">
-                <a:solidFill>
-                  <a:srgbClr val="5D6D7E"/>
-                </a:solidFill>
-              </a:rPr>
-              <a:t>All events within 12 months, none more than 2 years in future, date range &gt; 30 days</a:t>
-            </a:r>
-            <a:endParaRPr lang="en-US" sz="1000" dirty="0"/>
-          </a:p>
-        </p:txBody>
-      </p:sp>
-      <p:sp>
-        <p:nvSpPr>
-          <p:cNvPr id="15" name="Text 13"/>
-          <p:cNvSpPr/>
-          <p:nvPr/>
-        </p:nvSpPr>
-        <p:spPr>
-          <a:xfrm>
-            <a:off x="8046720" y="2002536"/>
-            <a:ext cx="777240" cy="320040"/>
-          </a:xfrm>
-          <a:prstGeom prst="rect">
-            <a:avLst/>
-          </a:prstGeom>
-          <a:solidFill>
-            <a:srgbClr val="028090"/>
-          </a:solidFill>
-          <a:ln/>
-        </p:spPr>
-        <p:txBody>
-          <a:bodyPr wrap="square" lIns="38100" tIns="38100" rIns="38100" bIns="38100" rtlCol="0" anchor="ctr"/>
-          <a:lstStyle/>
-          <a:p>
-            <a:pPr marL="0" indent="0" algn="ctr">
-              <a:buNone/>
-            </a:pPr>
-            <a:r>
-              <a:rPr lang="en-US" sz="1000" b="1" dirty="0">
-                <a:solidFill>
-                  <a:srgbClr val="FFFFFF"/>
-                </a:solidFill>
-              </a:rPr>
-              <a:t>PASSED</a:t>
-            </a:r>
-            <a:endParaRPr lang="en-US" sz="1000" dirty="0"/>
-          </a:p>
-        </p:txBody>
-      </p:sp>
-      <p:sp>
-        <p:nvSpPr>
-          <p:cNvPr id="16" name="Shape 14"/>
-          <p:cNvSpPr/>
-          <p:nvPr/>
-        </p:nvSpPr>
-        <p:spPr>
-          <a:xfrm>
-            <a:off x="274320" y="2624328"/>
-            <a:ext cx="8595360" cy="685800"/>
-          </a:xfrm>
-          <a:prstGeom prst="roundRect">
-            <a:avLst>
-              <a:gd name="adj" fmla="val 10667"/>
-            </a:avLst>
-          </a:prstGeom>
-          <a:solidFill>
-            <a:srgbClr val="F2F6FA"/>
-          </a:solidFill>
-          <a:ln/>
-        </p:spPr>
-      </p:sp>
-      <p:sp>
-        <p:nvSpPr>
-          <p:cNvPr id="17" name="Shape 15"/>
-          <p:cNvSpPr/>
-          <p:nvPr/>
-        </p:nvSpPr>
-        <p:spPr>
-          <a:xfrm>
-            <a:off x="384048" y="2715768"/>
-            <a:ext cx="457200" cy="502920"/>
-          </a:xfrm>
-          <a:prstGeom prst="roundRect">
-            <a:avLst>
-              <a:gd name="adj" fmla="val 12000"/>
-            </a:avLst>
-          </a:prstGeom>
-          <a:solidFill>
-            <a:srgbClr val="028090"/>
-          </a:solidFill>
-          <a:ln/>
-        </p:spPr>
-      </p:sp>
-      <p:sp>
-        <p:nvSpPr>
-          <p:cNvPr id="18" name="Text 16"/>
-          <p:cNvSpPr/>
-          <p:nvPr/>
-        </p:nvSpPr>
-        <p:spPr>
-          <a:xfrm>
-            <a:off x="384048" y="2715768"/>
-            <a:ext cx="457200" cy="502920"/>
-          </a:xfrm>
-          <a:prstGeom prst="rect">
-            <a:avLst/>
-          </a:prstGeom>
-          <a:noFill/>
-          <a:ln/>
-        </p:spPr>
-        <p:txBody>
-          <a:bodyPr wrap="square" lIns="0" tIns="0" rIns="0" bIns="0" rtlCol="0" anchor="ctr"/>
-          <a:lstStyle/>
-          <a:p>
-            <a:pPr marL="0" indent="0" algn="ctr">
-              <a:buNone/>
-            </a:pPr>
-            <a:r>
-              <a:rPr lang="en-US" sz="1400" b="1" dirty="0">
-                <a:solidFill>
-                  <a:srgbClr val="FFFFFF"/>
-                </a:solidFill>
-              </a:rPr>
-              <a:t>3</a:t>
-            </a:r>
-            <a:endParaRPr lang="en-US" sz="1400" dirty="0"/>
-          </a:p>
-        </p:txBody>
-      </p:sp>
-      <p:sp>
-        <p:nvSpPr>
-          <p:cNvPr id="19" name="Text 17"/>
-          <p:cNvSpPr/>
-          <p:nvPr/>
-        </p:nvSpPr>
-        <p:spPr>
-          <a:xfrm>
-            <a:off x="932688" y="2697480"/>
-            <a:ext cx="2743200" cy="320040"/>
-          </a:xfrm>
-          <a:prstGeom prst="rect">
-            <a:avLst/>
-          </a:prstGeom>
-          <a:noFill/>
-          <a:ln/>
-        </p:spPr>
-        <p:txBody>
-          <a:bodyPr wrap="square" rtlCol="0" anchor="ctr"/>
-          <a:lstStyle/>
-          <a:p>
-            <a:pPr marL="0" indent="0">
-              <a:buNone/>
-            </a:pPr>
-            <a:r>
-              <a:rPr lang="en-US" sz="1200" b="1" dirty="0">
-                <a:solidFill>
-                  <a:srgbClr val="1F4E79"/>
-                </a:solidFill>
-              </a:rPr>
-              <a:t>TestLocationFilter</a:t>
-            </a:r>
-            <a:endParaRPr lang="en-US" sz="1200" dirty="0"/>
-          </a:p>
-        </p:txBody>
-      </p:sp>
-      <p:sp>
-        <p:nvSpPr>
-          <p:cNvPr id="20" name="Text 18"/>
-          <p:cNvSpPr/>
-          <p:nvPr/>
-        </p:nvSpPr>
-        <p:spPr>
-          <a:xfrm>
-            <a:off x="932688" y="3008376"/>
-            <a:ext cx="7315200" cy="256032"/>
-          </a:xfrm>
-          <a:prstGeom prst="rect">
-            <a:avLst/>
-          </a:prstGeom>
-          <a:noFill/>
-          <a:ln/>
-        </p:spPr>
-        <p:txBody>
-          <a:bodyPr wrap="square" rtlCol="0" anchor="ctr"/>
-          <a:lstStyle/>
-          <a:p>
-            <a:pPr marL="0" indent="0">
-              <a:buNone/>
-            </a:pPr>
-            <a:r>
-              <a:rPr lang="en-US" sz="1000" dirty="0">
-                <a:solidFill>
-                  <a:srgbClr val="5D6D7E"/>
-                </a:solidFill>
-              </a:rPr>
-              <a:t>Over 90% of events in Paris, city field non-null, no residual postal codes</a:t>
-            </a:r>
-            <a:endParaRPr lang="en-US" sz="1000" dirty="0"/>
-          </a:p>
-        </p:txBody>
-      </p:sp>
-      <p:sp>
-        <p:nvSpPr>
-          <p:cNvPr id="21" name="Text 19"/>
-          <p:cNvSpPr/>
-          <p:nvPr/>
-        </p:nvSpPr>
-        <p:spPr>
-          <a:xfrm>
-            <a:off x="8046720" y="2788920"/>
-            <a:ext cx="777240" cy="320040"/>
-          </a:xfrm>
-          <a:prstGeom prst="rect">
-            <a:avLst/>
-          </a:prstGeom>
-          <a:solidFill>
-            <a:srgbClr val="028090"/>
-          </a:solidFill>
-          <a:ln/>
-        </p:spPr>
-        <p:txBody>
-          <a:bodyPr wrap="square" lIns="38100" tIns="38100" rIns="38100" bIns="38100" rtlCol="0" anchor="ctr"/>
-          <a:lstStyle/>
-          <a:p>
-            <a:pPr marL="0" indent="0" algn="ctr">
-              <a:buNone/>
-            </a:pPr>
-            <a:r>
-              <a:rPr lang="en-US" sz="1000" b="1" dirty="0">
-                <a:solidFill>
-                  <a:srgbClr val="FFFFFF"/>
-                </a:solidFill>
-              </a:rPr>
-              <a:t>PASSED</a:t>
-            </a:r>
-            <a:endParaRPr lang="en-US" sz="1000" dirty="0"/>
-          </a:p>
-        </p:txBody>
-      </p:sp>
-      <p:sp>
-        <p:nvSpPr>
-          <p:cNvPr id="22" name="Shape 20"/>
-          <p:cNvSpPr/>
-          <p:nvPr/>
-        </p:nvSpPr>
-        <p:spPr>
-          <a:xfrm>
-            <a:off x="274320" y="3410712"/>
-            <a:ext cx="8595360" cy="685800"/>
-          </a:xfrm>
-          <a:prstGeom prst="roundRect">
-            <a:avLst>
-              <a:gd name="adj" fmla="val 10667"/>
-            </a:avLst>
-          </a:prstGeom>
-          <a:solidFill>
-            <a:srgbClr val="F2F6FA"/>
-          </a:solidFill>
-          <a:ln/>
-        </p:spPr>
-      </p:sp>
-      <p:sp>
-        <p:nvSpPr>
-          <p:cNvPr id="23" name="Shape 21"/>
-          <p:cNvSpPr/>
-          <p:nvPr/>
-        </p:nvSpPr>
-        <p:spPr>
-          <a:xfrm>
-            <a:off x="384048" y="3502152"/>
-            <a:ext cx="457200" cy="502920"/>
-          </a:xfrm>
-          <a:prstGeom prst="roundRect">
-            <a:avLst>
-              <a:gd name="adj" fmla="val 12000"/>
-            </a:avLst>
-          </a:prstGeom>
-          <a:solidFill>
-            <a:srgbClr val="1F4E79"/>
-          </a:solidFill>
-          <a:ln/>
-        </p:spPr>
-      </p:sp>
-      <p:sp>
-        <p:nvSpPr>
-          <p:cNvPr id="24" name="Text 22"/>
-          <p:cNvSpPr/>
-          <p:nvPr/>
-        </p:nvSpPr>
-        <p:spPr>
-          <a:xfrm>
-            <a:off x="384048" y="3502152"/>
-            <a:ext cx="457200" cy="502920"/>
-          </a:xfrm>
-          <a:prstGeom prst="rect">
-            <a:avLst/>
-          </a:prstGeom>
-          <a:noFill/>
-          <a:ln/>
-        </p:spPr>
-        <p:txBody>
-          <a:bodyPr wrap="square" lIns="0" tIns="0" rIns="0" bIns="0" rtlCol="0" anchor="ctr"/>
-          <a:lstStyle/>
-          <a:p>
-            <a:pPr marL="0" indent="0" algn="ctr">
-              <a:buNone/>
-            </a:pPr>
-            <a:r>
-              <a:rPr lang="en-US" sz="1400" b="1" dirty="0">
-                <a:solidFill>
-                  <a:srgbClr val="FFFFFF"/>
-                </a:solidFill>
-              </a:rPr>
-              <a:t>10</a:t>
-            </a:r>
-            <a:endParaRPr lang="en-US" sz="1400" dirty="0"/>
-          </a:p>
-        </p:txBody>
-      </p:sp>
-      <p:sp>
-        <p:nvSpPr>
-          <p:cNvPr id="25" name="Text 23"/>
-          <p:cNvSpPr/>
-          <p:nvPr/>
-        </p:nvSpPr>
-        <p:spPr>
-          <a:xfrm>
-            <a:off x="932688" y="3483864"/>
-            <a:ext cx="2743200" cy="320040"/>
-          </a:xfrm>
-          <a:prstGeom prst="rect">
-            <a:avLst/>
-          </a:prstGeom>
-          <a:noFill/>
-          <a:ln/>
-        </p:spPr>
-        <p:txBody>
-          <a:bodyPr wrap="square" rtlCol="0" anchor="ctr"/>
-          <a:lstStyle/>
-          <a:p>
-            <a:pPr marL="0" indent="0">
-              <a:buNone/>
-            </a:pPr>
-            <a:r>
-              <a:rPr lang="en-US" sz="1200" b="1" dirty="0">
-                <a:solidFill>
-                  <a:srgbClr val="1F4E79"/>
-                </a:solidFill>
-              </a:rPr>
-              <a:t>TestVectorDatabase</a:t>
-            </a:r>
-            <a:endParaRPr lang="en-US" sz="1200" dirty="0"/>
-          </a:p>
-        </p:txBody>
-      </p:sp>
-      <p:sp>
-        <p:nvSpPr>
-          <p:cNvPr id="26" name="Text 24"/>
-          <p:cNvSpPr/>
-          <p:nvPr/>
-        </p:nvSpPr>
-        <p:spPr>
-          <a:xfrm>
-            <a:off x="932688" y="3794760"/>
-            <a:ext cx="7315200" cy="256032"/>
-          </a:xfrm>
-          <a:prstGeom prst="rect">
-            <a:avLst/>
-          </a:prstGeom>
-          <a:noFill/>
-          <a:ln/>
-        </p:spPr>
-        <p:txBody>
-          <a:bodyPr wrap="square" rtlCol="0" anchor="ctr"/>
-          <a:lstStyle/>
-          <a:p>
-            <a:pPr marL="0" indent="0">
-              <a:buNone/>
-            </a:pPr>
-            <a:r>
-              <a:rPr lang="en-US" sz="1000" dirty="0">
-                <a:solidFill>
-                  <a:srgbClr val="5D6D7E"/>
-                </a:solidFill>
-              </a:rPr>
-              <a:t>Dimension 1,024, non-empty index, index/metadata sync, float32 dtype, valid search</a:t>
-            </a:r>
-            <a:endParaRPr lang="en-US" sz="1000" dirty="0"/>
-          </a:p>
-        </p:txBody>
-      </p:sp>
-      <p:sp>
-        <p:nvSpPr>
-          <p:cNvPr id="27" name="Text 25"/>
-          <p:cNvSpPr/>
-          <p:nvPr/>
-        </p:nvSpPr>
-        <p:spPr>
-          <a:xfrm>
-            <a:off x="8046720" y="3575304"/>
-            <a:ext cx="777240" cy="320040"/>
-          </a:xfrm>
-          <a:prstGeom prst="rect">
-            <a:avLst/>
-          </a:prstGeom>
-          <a:solidFill>
-            <a:srgbClr val="028090"/>
-          </a:solidFill>
-          <a:ln/>
-        </p:spPr>
-        <p:txBody>
-          <a:bodyPr wrap="square" lIns="38100" tIns="38100" rIns="38100" bIns="38100" rtlCol="0" anchor="ctr"/>
-          <a:lstStyle/>
-          <a:p>
-            <a:pPr marL="0" indent="0" algn="ctr">
-              <a:buNone/>
-            </a:pPr>
-            <a:r>
-              <a:rPr lang="en-US" sz="1000" b="1" dirty="0">
-                <a:solidFill>
-                  <a:srgbClr val="FFFFFF"/>
-                </a:solidFill>
-              </a:rPr>
-              <a:t>PASSED</a:t>
-            </a:r>
-            <a:endParaRPr lang="en-US" sz="1000" dirty="0"/>
-          </a:p>
-        </p:txBody>
-      </p:sp>
-      <p:sp>
-        <p:nvSpPr>
-          <p:cNvPr id="28" name="Shape 26"/>
-          <p:cNvSpPr/>
-          <p:nvPr/>
-        </p:nvSpPr>
-        <p:spPr>
-          <a:xfrm>
-            <a:off x="274320" y="4197096"/>
-            <a:ext cx="8595360" cy="685800"/>
-          </a:xfrm>
-          <a:prstGeom prst="roundRect">
-            <a:avLst>
-              <a:gd name="adj" fmla="val 10667"/>
-            </a:avLst>
-          </a:prstGeom>
-          <a:solidFill>
-            <a:srgbClr val="F2F6FA"/>
-          </a:solidFill>
-          <a:ln/>
-        </p:spPr>
-      </p:sp>
-      <p:sp>
-        <p:nvSpPr>
-          <p:cNvPr id="29" name="Shape 27"/>
-          <p:cNvSpPr/>
-          <p:nvPr/>
-        </p:nvSpPr>
-        <p:spPr>
-          <a:xfrm>
-            <a:off x="384048" y="4288536"/>
-            <a:ext cx="457200" cy="502920"/>
-          </a:xfrm>
-          <a:prstGeom prst="roundRect">
-            <a:avLst>
-              <a:gd name="adj" fmla="val 12000"/>
-            </a:avLst>
-          </a:prstGeom>
-          <a:solidFill>
-            <a:srgbClr val="2E75B6"/>
-          </a:solidFill>
-          <a:ln/>
-        </p:spPr>
-      </p:sp>
-      <p:sp>
-        <p:nvSpPr>
-          <p:cNvPr id="30" name="Text 28"/>
-          <p:cNvSpPr/>
-          <p:nvPr/>
-        </p:nvSpPr>
-        <p:spPr>
-          <a:xfrm>
-            <a:off x="384048" y="4288536"/>
-            <a:ext cx="457200" cy="502920"/>
-          </a:xfrm>
-          <a:prstGeom prst="rect">
-            <a:avLst/>
-          </a:prstGeom>
-          <a:noFill/>
-          <a:ln/>
-        </p:spPr>
-        <p:txBody>
-          <a:bodyPr wrap="square" lIns="0" tIns="0" rIns="0" bIns="0" rtlCol="0" anchor="ctr"/>
-          <a:lstStyle/>
-          <a:p>
-            <a:pPr marL="0" indent="0" algn="ctr">
-              <a:buNone/>
-            </a:pPr>
-            <a:r>
-              <a:rPr lang="en-US" sz="1400" b="1" dirty="0">
-                <a:solidFill>
-                  <a:srgbClr val="FFFFFF"/>
-                </a:solidFill>
-              </a:rPr>
-              <a:t>3</a:t>
-            </a:r>
-            <a:endParaRPr lang="en-US" sz="1400" dirty="0"/>
-          </a:p>
-        </p:txBody>
-      </p:sp>
-      <p:sp>
-        <p:nvSpPr>
-          <p:cNvPr id="31" name="Text 29"/>
-          <p:cNvSpPr/>
-          <p:nvPr/>
-        </p:nvSpPr>
-        <p:spPr>
-          <a:xfrm>
-            <a:off x="932688" y="4270248"/>
-            <a:ext cx="2743200" cy="320040"/>
-          </a:xfrm>
-          <a:prstGeom prst="rect">
-            <a:avLst/>
-          </a:prstGeom>
-          <a:noFill/>
-          <a:ln/>
-        </p:spPr>
-        <p:txBody>
-          <a:bodyPr wrap="square" rtlCol="0" anchor="ctr"/>
-          <a:lstStyle/>
-          <a:p>
-            <a:pPr marL="0" indent="0">
-              <a:buNone/>
-            </a:pPr>
-            <a:r>
-              <a:rPr lang="en-US" sz="1200" b="1" dirty="0">
-                <a:solidFill>
-                  <a:srgbClr val="1F4E79"/>
-                </a:solidFill>
-              </a:rPr>
-              <a:t>TestChunkQuality</a:t>
-            </a:r>
-            <a:endParaRPr lang="en-US" sz="1200" dirty="0"/>
-          </a:p>
-        </p:txBody>
-      </p:sp>
-      <p:sp>
-        <p:nvSpPr>
-          <p:cNvPr id="32" name="Text 30"/>
-          <p:cNvSpPr/>
-          <p:nvPr/>
-        </p:nvSpPr>
-        <p:spPr>
-          <a:xfrm>
-            <a:off x="932688" y="4581144"/>
-            <a:ext cx="7315200" cy="256032"/>
-          </a:xfrm>
-          <a:prstGeom prst="rect">
-            <a:avLst/>
-          </a:prstGeom>
-          <a:noFill/>
-          <a:ln/>
-        </p:spPr>
-        <p:txBody>
-          <a:bodyPr wrap="square" rtlCol="0" anchor="ctr"/>
-          <a:lstStyle/>
-          <a:p>
-            <a:pPr marL="0" indent="0">
-              <a:buNone/>
-            </a:pPr>
-            <a:r>
-              <a:rPr lang="en-US" sz="1000" dirty="0">
-                <a:solidFill>
-                  <a:srgbClr val="5D6D7E"/>
-                </a:solidFill>
-              </a:rPr>
-              <a:t>Non-empty chunk text, event marker present, URL non-empty</a:t>
-            </a:r>
-            <a:endParaRPr lang="en-US" sz="1000" dirty="0"/>
-          </a:p>
-        </p:txBody>
-      </p:sp>
-      <p:sp>
-        <p:nvSpPr>
-          <p:cNvPr id="33" name="Text 31"/>
-          <p:cNvSpPr/>
-          <p:nvPr/>
-        </p:nvSpPr>
-        <p:spPr>
-          <a:xfrm>
-            <a:off x="8046720" y="4361688"/>
-            <a:ext cx="777240" cy="320040"/>
-          </a:xfrm>
-          <a:prstGeom prst="rect">
-            <a:avLst/>
-          </a:prstGeom>
-          <a:solidFill>
-            <a:srgbClr val="028090"/>
-          </a:solidFill>
-          <a:ln/>
-        </p:spPr>
-        <p:txBody>
-          <a:bodyPr wrap="square" lIns="38100" tIns="38100" rIns="38100" bIns="38100" rtlCol="0" anchor="ctr"/>
-          <a:lstStyle/>
-          <a:p>
-            <a:pPr marL="0" indent="0" algn="ctr">
-              <a:buNone/>
-            </a:pPr>
-            <a:r>
-              <a:rPr lang="en-US" sz="1000" b="1" dirty="0">
-                <a:solidFill>
-                  <a:srgbClr val="FFFFFF"/>
-                </a:solidFill>
-              </a:rPr>
-              <a:t>PASSED</a:t>
-            </a:r>
-            <a:endParaRPr lang="en-US" sz="1000" dirty="0"/>
-          </a:p>
-        </p:txBody>
-      </p:sp>
-    </p:spTree>
-  </p:cSld>
-  <p:clrMapOvr>
-    <a:masterClrMapping/>
-  </p:clrMapOvr>
-</p:sld>
-</file>
-
-<file path=ppt/slides/slide9.xml><?xml version="1.0" encoding="utf-8"?>
-<p:sld xmlns:a="http://schemas.openxmlformats.org/drawingml/2006/main" xmlns:r="http://schemas.openxmlformats.org/officeDocument/2006/relationships" xmlns:p="http://schemas.openxmlformats.org/presentationml/2006/main">
-  <p:cSld name="Slide 10">
-    <p:bg>
-      <p:bgPr>
-        <a:solidFill>
-          <a:srgbClr val="FFFFFF"/>
-        </a:solidFill>
-        <a:effectLst/>
-      </p:bgPr>
-    </p:bg>
-    <p:spTree>
-      <p:nvGrpSpPr>
-        <p:cNvPr id="1" name=""/>
-        <p:cNvGrpSpPr/>
-        <p:nvPr/>
-      </p:nvGrpSpPr>
-      <p:grpSpPr>
-        <a:xfrm>
-          <a:off x="0" y="0"/>
-          <a:ext cx="0" cy="0"/>
-          <a:chOff x="0" y="0"/>
-          <a:chExt cx="0" cy="0"/>
-        </a:xfrm>
-      </p:grpSpPr>
-      <p:sp>
-        <p:nvSpPr>
-          <p:cNvPr id="2" name="Shape 0"/>
-          <p:cNvSpPr/>
-          <p:nvPr/>
-        </p:nvSpPr>
-        <p:spPr>
-          <a:xfrm>
-            <a:off x="0" y="0"/>
-            <a:ext cx="9144000" cy="914400"/>
-          </a:xfrm>
-          <a:prstGeom prst="rect">
-            <a:avLst/>
-          </a:prstGeom>
-          <a:solidFill>
-            <a:srgbClr val="1F4E79"/>
-          </a:solidFill>
-          <a:ln/>
-        </p:spPr>
-      </p:sp>
-      <p:sp>
-        <p:nvSpPr>
-          <p:cNvPr id="3" name="Text 1"/>
-          <p:cNvSpPr/>
-          <p:nvPr/>
-        </p:nvSpPr>
-        <p:spPr>
-          <a:xfrm>
-            <a:off x="365760" y="0"/>
-            <a:ext cx="8412480" cy="914400"/>
-          </a:xfrm>
-          <a:prstGeom prst="rect">
-            <a:avLst/>
-          </a:prstGeom>
-          <a:noFill/>
-          <a:ln/>
-        </p:spPr>
-        <p:txBody>
-          <a:bodyPr wrap="square" rtlCol="0" anchor="ctr"/>
-          <a:lstStyle/>
-          <a:p>
-            <a:pPr marL="0" indent="0">
-              <a:buNone/>
-            </a:pPr>
-            <a:r>
-              <a:rPr lang="en-US" sz="2200" b="1" dirty="0">
-                <a:solidFill>
-                  <a:srgbClr val="FFFFFF"/>
-                </a:solidFill>
-              </a:rPr>
-              <a:t>EVALUATION  |  ANNOTATED TEST DATASET</a:t>
-            </a:r>
-            <a:endParaRPr lang="en-US" sz="2200" dirty="0"/>
-          </a:p>
-        </p:txBody>
-      </p:sp>
-      <p:sp>
-        <p:nvSpPr>
-          <p:cNvPr id="4" name="Shape 2"/>
-          <p:cNvSpPr/>
-          <p:nvPr/>
-        </p:nvSpPr>
-        <p:spPr>
-          <a:xfrm>
-            <a:off x="274320" y="1051560"/>
-            <a:ext cx="2697480" cy="914400"/>
-          </a:xfrm>
-          <a:prstGeom prst="roundRect">
-            <a:avLst>
-              <a:gd name="adj" fmla="val 10000"/>
-            </a:avLst>
-          </a:prstGeom>
-          <a:solidFill>
-            <a:srgbClr val="F2F6FA"/>
-          </a:solidFill>
-          <a:ln/>
-          <a:effectLst>
-            <a:outerShdw blurRad="101600" dist="38100" dir="2700000" algn="bl" rotWithShape="0">
-              <a:srgbClr val="000000">
-                <a:alpha val="12000"/>
-              </a:srgbClr>
-            </a:outerShdw>
-          </a:effectLst>
-        </p:spPr>
-      </p:sp>
-      <p:sp>
-        <p:nvSpPr>
-          <p:cNvPr id="5" name="Shape 3"/>
-          <p:cNvSpPr/>
-          <p:nvPr/>
-        </p:nvSpPr>
-        <p:spPr>
-          <a:xfrm>
-            <a:off x="384048" y="1216152"/>
-            <a:ext cx="548640" cy="548640"/>
-          </a:xfrm>
-          <a:prstGeom prst="ellipse">
-            <a:avLst/>
-          </a:prstGeom>
-          <a:solidFill>
-            <a:srgbClr val="1F4E79"/>
-          </a:solidFill>
-          <a:ln/>
-        </p:spPr>
-      </p:sp>
-      <p:sp>
-        <p:nvSpPr>
-          <p:cNvPr id="6" name="Text 4"/>
-          <p:cNvSpPr/>
-          <p:nvPr/>
-        </p:nvSpPr>
-        <p:spPr>
-          <a:xfrm>
-            <a:off x="384048" y="1216152"/>
-            <a:ext cx="548640" cy="548640"/>
-          </a:xfrm>
-          <a:prstGeom prst="rect">
-            <a:avLst/>
-          </a:prstGeom>
-          <a:noFill/>
-          <a:ln/>
-        </p:spPr>
-        <p:txBody>
-          <a:bodyPr wrap="square" lIns="0" tIns="0" rIns="0" bIns="0" rtlCol="0" anchor="ctr"/>
-          <a:lstStyle/>
-          <a:p>
-            <a:pPr marL="0" indent="0" algn="ctr">
-              <a:buNone/>
-            </a:pPr>
-            <a:r>
-              <a:rPr lang="en-US" sz="1800" b="1" dirty="0">
-                <a:solidFill>
-                  <a:srgbClr val="FFFFFF"/>
-                </a:solidFill>
-              </a:rPr>
-              <a:t>6</a:t>
-            </a:r>
-            <a:endParaRPr lang="en-US" sz="1800" dirty="0"/>
-          </a:p>
-        </p:txBody>
-      </p:sp>
-      <p:sp>
-        <p:nvSpPr>
-          <p:cNvPr id="7" name="Text 5"/>
-          <p:cNvSpPr/>
-          <p:nvPr/>
-        </p:nvSpPr>
-        <p:spPr>
-          <a:xfrm>
-            <a:off x="1024128" y="1280160"/>
-            <a:ext cx="1828800" cy="457200"/>
-          </a:xfrm>
-          <a:prstGeom prst="rect">
-            <a:avLst/>
-          </a:prstGeom>
-          <a:noFill/>
-          <a:ln/>
-        </p:spPr>
-        <p:txBody>
-          <a:bodyPr wrap="square" rtlCol="0" anchor="ctr"/>
-          <a:lstStyle/>
-          <a:p>
-            <a:pPr marL="0" indent="0">
-              <a:buNone/>
-            </a:pPr>
-            <a:r>
-              <a:rPr lang="en-US" sz="1100" dirty="0">
-                <a:solidFill>
-                  <a:srgbClr val="1F4E79"/>
-                </a:solidFill>
-              </a:rPr>
-              <a:t>Specific events</a:t>
-            </a:r>
-            <a:endParaRPr lang="en-US" sz="1100" dirty="0"/>
-          </a:p>
-        </p:txBody>
-      </p:sp>
-      <p:sp>
-        <p:nvSpPr>
-          <p:cNvPr id="8" name="Shape 6"/>
-          <p:cNvSpPr/>
-          <p:nvPr/>
-        </p:nvSpPr>
-        <p:spPr>
-          <a:xfrm>
-            <a:off x="3154680" y="1051560"/>
-            <a:ext cx="2697480" cy="914400"/>
-          </a:xfrm>
-          <a:prstGeom prst="roundRect">
-            <a:avLst>
-              <a:gd name="adj" fmla="val 10000"/>
-            </a:avLst>
-          </a:prstGeom>
-          <a:solidFill>
-            <a:srgbClr val="F2F6FA"/>
-          </a:solidFill>
-          <a:ln/>
-          <a:effectLst>
-            <a:outerShdw blurRad="101600" dist="38100" dir="2700000" algn="bl" rotWithShape="0">
-              <a:srgbClr val="000000">
-                <a:alpha val="12000"/>
-              </a:srgbClr>
-            </a:outerShdw>
-          </a:effectLst>
-        </p:spPr>
-      </p:sp>
-      <p:sp>
-        <p:nvSpPr>
-          <p:cNvPr id="9" name="Shape 7"/>
-          <p:cNvSpPr/>
-          <p:nvPr/>
-        </p:nvSpPr>
-        <p:spPr>
-          <a:xfrm>
-            <a:off x="3264408" y="1216152"/>
-            <a:ext cx="548640" cy="548640"/>
-          </a:xfrm>
-          <a:prstGeom prst="ellipse">
-            <a:avLst/>
-          </a:prstGeom>
-          <a:solidFill>
-            <a:srgbClr val="2E75B6"/>
-          </a:solidFill>
-          <a:ln/>
-        </p:spPr>
-      </p:sp>
-      <p:sp>
-        <p:nvSpPr>
-          <p:cNvPr id="10" name="Text 8"/>
-          <p:cNvSpPr/>
-          <p:nvPr/>
-        </p:nvSpPr>
-        <p:spPr>
-          <a:xfrm>
-            <a:off x="3264408" y="1216152"/>
-            <a:ext cx="548640" cy="548640"/>
-          </a:xfrm>
-          <a:prstGeom prst="rect">
-            <a:avLst/>
-          </a:prstGeom>
-          <a:noFill/>
-          <a:ln/>
-        </p:spPr>
-        <p:txBody>
-          <a:bodyPr wrap="square" lIns="0" tIns="0" rIns="0" bIns="0" rtlCol="0" anchor="ctr"/>
-          <a:lstStyle/>
-          <a:p>
-            <a:pPr marL="0" indent="0" algn="ctr">
-              <a:buNone/>
-            </a:pPr>
-            <a:r>
-              <a:rPr lang="en-US" sz="1800" b="1" dirty="0">
-                <a:solidFill>
-                  <a:srgbClr val="FFFFFF"/>
-                </a:solidFill>
-              </a:rPr>
-              <a:t>5</a:t>
-            </a:r>
-            <a:endParaRPr lang="en-US" sz="1800" dirty="0"/>
-          </a:p>
-        </p:txBody>
-      </p:sp>
-      <p:sp>
-        <p:nvSpPr>
-          <p:cNvPr id="11" name="Text 9"/>
-          <p:cNvSpPr/>
-          <p:nvPr/>
-        </p:nvSpPr>
-        <p:spPr>
-          <a:xfrm>
-            <a:off x="3904488" y="1280160"/>
-            <a:ext cx="1828800" cy="457200"/>
-          </a:xfrm>
-          <a:prstGeom prst="rect">
-            <a:avLst/>
-          </a:prstGeom>
-          <a:noFill/>
-          <a:ln/>
-        </p:spPr>
-        <p:txBody>
-          <a:bodyPr wrap="square" rtlCol="0" anchor="ctr"/>
-          <a:lstStyle/>
-          <a:p>
-            <a:pPr marL="0" indent="0">
-              <a:buNone/>
-            </a:pPr>
-            <a:r>
-              <a:rPr lang="en-US" sz="1100" dirty="0">
-                <a:solidFill>
-                  <a:srgbClr val="1F4E79"/>
-                </a:solidFill>
-              </a:rPr>
-              <a:t>Date-based queries</a:t>
-            </a:r>
-            <a:endParaRPr lang="en-US" sz="1100" dirty="0"/>
-          </a:p>
-        </p:txBody>
-      </p:sp>
-      <p:sp>
-        <p:nvSpPr>
-          <p:cNvPr id="12" name="Shape 10"/>
-          <p:cNvSpPr/>
-          <p:nvPr/>
-        </p:nvSpPr>
-        <p:spPr>
-          <a:xfrm>
-            <a:off x="6035040" y="1051560"/>
-            <a:ext cx="2697480" cy="914400"/>
-          </a:xfrm>
-          <a:prstGeom prst="roundRect">
-            <a:avLst>
-              <a:gd name="adj" fmla="val 10000"/>
-            </a:avLst>
-          </a:prstGeom>
-          <a:solidFill>
-            <a:srgbClr val="F2F6FA"/>
-          </a:solidFill>
-          <a:ln/>
-          <a:effectLst>
-            <a:outerShdw blurRad="101600" dist="38100" dir="2700000" algn="bl" rotWithShape="0">
-              <a:srgbClr val="000000">
-                <a:alpha val="12000"/>
-              </a:srgbClr>
-            </a:outerShdw>
-          </a:effectLst>
-        </p:spPr>
-      </p:sp>
-      <p:sp>
-        <p:nvSpPr>
-          <p:cNvPr id="13" name="Shape 11"/>
-          <p:cNvSpPr/>
-          <p:nvPr/>
-        </p:nvSpPr>
-        <p:spPr>
-          <a:xfrm>
-            <a:off x="6144768" y="1216152"/>
-            <a:ext cx="548640" cy="548640"/>
-          </a:xfrm>
-          <a:prstGeom prst="ellipse">
-            <a:avLst/>
-          </a:prstGeom>
-          <a:solidFill>
-            <a:srgbClr val="028090"/>
-          </a:solidFill>
-          <a:ln/>
-        </p:spPr>
-      </p:sp>
-      <p:sp>
-        <p:nvSpPr>
-          <p:cNvPr id="14" name="Text 12"/>
-          <p:cNvSpPr/>
-          <p:nvPr/>
-        </p:nvSpPr>
-        <p:spPr>
-          <a:xfrm>
-            <a:off x="6144768" y="1216152"/>
-            <a:ext cx="548640" cy="548640"/>
-          </a:xfrm>
-          <a:prstGeom prst="rect">
-            <a:avLst/>
-          </a:prstGeom>
-          <a:noFill/>
-          <a:ln/>
-        </p:spPr>
-        <p:txBody>
-          <a:bodyPr wrap="square" lIns="0" tIns="0" rIns="0" bIns="0" rtlCol="0" anchor="ctr"/>
-          <a:lstStyle/>
-          <a:p>
-            <a:pPr marL="0" indent="0" algn="ctr">
-              <a:buNone/>
-            </a:pPr>
-            <a:r>
-              <a:rPr lang="en-US" sz="1800" b="1" dirty="0">
-                <a:solidFill>
-                  <a:srgbClr val="FFFFFF"/>
-                </a:solidFill>
-              </a:rPr>
-              <a:t>5</a:t>
-            </a:r>
-            <a:endParaRPr lang="en-US" sz="1800" dirty="0"/>
-          </a:p>
-        </p:txBody>
-      </p:sp>
-      <p:sp>
-        <p:nvSpPr>
-          <p:cNvPr id="15" name="Text 13"/>
-          <p:cNvSpPr/>
-          <p:nvPr/>
-        </p:nvSpPr>
-        <p:spPr>
-          <a:xfrm>
-            <a:off x="6784848" y="1280160"/>
-            <a:ext cx="1828800" cy="457200"/>
-          </a:xfrm>
-          <a:prstGeom prst="rect">
-            <a:avLst/>
-          </a:prstGeom>
-          <a:noFill/>
-          <a:ln/>
-        </p:spPr>
-        <p:txBody>
-          <a:bodyPr wrap="square" rtlCol="0" anchor="ctr"/>
-          <a:lstStyle/>
-          <a:p>
-            <a:pPr marL="0" indent="0">
-              <a:buNone/>
-            </a:pPr>
-            <a:r>
-              <a:rPr lang="en-US" sz="1100" dirty="0">
-                <a:solidFill>
-                  <a:srgbClr val="1F4E79"/>
-                </a:solidFill>
-              </a:rPr>
-              <a:t>Category queries</a:t>
-            </a:r>
-            <a:endParaRPr lang="en-US" sz="1100" dirty="0"/>
-          </a:p>
-        </p:txBody>
-      </p:sp>
-      <p:sp>
-        <p:nvSpPr>
-          <p:cNvPr id="16" name="Shape 14"/>
-          <p:cNvSpPr/>
-          <p:nvPr/>
-        </p:nvSpPr>
-        <p:spPr>
-          <a:xfrm>
-            <a:off x="274320" y="2103120"/>
-            <a:ext cx="2697480" cy="914400"/>
-          </a:xfrm>
-          <a:prstGeom prst="roundRect">
-            <a:avLst>
-              <a:gd name="adj" fmla="val 10000"/>
-            </a:avLst>
-          </a:prstGeom>
-          <a:solidFill>
-            <a:srgbClr val="F2F6FA"/>
-          </a:solidFill>
-          <a:ln/>
-          <a:effectLst>
-            <a:outerShdw blurRad="101600" dist="38100" dir="2700000" algn="bl" rotWithShape="0">
-              <a:srgbClr val="000000">
-                <a:alpha val="12000"/>
-              </a:srgbClr>
-            </a:outerShdw>
-          </a:effectLst>
-        </p:spPr>
-      </p:sp>
-      <p:sp>
-        <p:nvSpPr>
-          <p:cNvPr id="17" name="Shape 15"/>
-          <p:cNvSpPr/>
-          <p:nvPr/>
-        </p:nvSpPr>
-        <p:spPr>
-          <a:xfrm>
-            <a:off x="384048" y="2267712"/>
-            <a:ext cx="548640" cy="548640"/>
-          </a:xfrm>
-          <a:prstGeom prst="ellipse">
-            <a:avLst/>
-          </a:prstGeom>
-          <a:solidFill>
-            <a:srgbClr val="1F4E79"/>
-          </a:solidFill>
-          <a:ln/>
-        </p:spPr>
-      </p:sp>
-      <p:sp>
-        <p:nvSpPr>
-          <p:cNvPr id="18" name="Text 16"/>
-          <p:cNvSpPr/>
-          <p:nvPr/>
-        </p:nvSpPr>
-        <p:spPr>
-          <a:xfrm>
-            <a:off x="384048" y="2267712"/>
-            <a:ext cx="548640" cy="548640"/>
-          </a:xfrm>
-          <a:prstGeom prst="rect">
-            <a:avLst/>
-          </a:prstGeom>
-          <a:noFill/>
-          <a:ln/>
-        </p:spPr>
-        <p:txBody>
-          <a:bodyPr wrap="square" lIns="0" tIns="0" rIns="0" bIns="0" rtlCol="0" anchor="ctr"/>
-          <a:lstStyle/>
-          <a:p>
-            <a:pPr marL="0" indent="0" algn="ctr">
-              <a:buNone/>
-            </a:pPr>
-            <a:r>
-              <a:rPr lang="en-US" sz="1800" b="1" dirty="0">
-                <a:solidFill>
-                  <a:srgbClr val="FFFFFF"/>
-                </a:solidFill>
-              </a:rPr>
-              <a:t>4</a:t>
-            </a:r>
-            <a:endParaRPr lang="en-US" sz="1800" dirty="0"/>
-          </a:p>
-        </p:txBody>
-      </p:sp>
-      <p:sp>
-        <p:nvSpPr>
-          <p:cNvPr id="19" name="Text 17"/>
-          <p:cNvSpPr/>
-          <p:nvPr/>
-        </p:nvSpPr>
-        <p:spPr>
-          <a:xfrm>
-            <a:off x="1024128" y="2331720"/>
-            <a:ext cx="1828800" cy="457200"/>
-          </a:xfrm>
-          <a:prstGeom prst="rect">
-            <a:avLst/>
-          </a:prstGeom>
-          <a:noFill/>
-          <a:ln/>
-        </p:spPr>
-        <p:txBody>
-          <a:bodyPr wrap="square" rtlCol="0" anchor="ctr"/>
-          <a:lstStyle/>
-          <a:p>
-            <a:pPr marL="0" indent="0">
-              <a:buNone/>
-            </a:pPr>
-            <a:r>
-              <a:rPr lang="en-US" sz="1100" dirty="0">
-                <a:solidFill>
-                  <a:srgbClr val="1F4E79"/>
-                </a:solidFill>
-              </a:rPr>
-              <a:t>Venue-based queries</a:t>
-            </a:r>
-            <a:endParaRPr lang="en-US" sz="1100" dirty="0"/>
-          </a:p>
-        </p:txBody>
-      </p:sp>
-      <p:sp>
-        <p:nvSpPr>
-          <p:cNvPr id="20" name="Shape 18"/>
-          <p:cNvSpPr/>
-          <p:nvPr/>
-        </p:nvSpPr>
-        <p:spPr>
-          <a:xfrm>
-            <a:off x="3154680" y="2103120"/>
-            <a:ext cx="2697480" cy="914400"/>
-          </a:xfrm>
-          <a:prstGeom prst="roundRect">
-            <a:avLst>
-              <a:gd name="adj" fmla="val 10000"/>
-            </a:avLst>
-          </a:prstGeom>
-          <a:solidFill>
-            <a:srgbClr val="F2F6FA"/>
-          </a:solidFill>
-          <a:ln/>
-          <a:effectLst>
-            <a:outerShdw blurRad="101600" dist="38100" dir="2700000" algn="bl" rotWithShape="0">
-              <a:srgbClr val="000000">
-                <a:alpha val="12000"/>
-              </a:srgbClr>
-            </a:outerShdw>
-          </a:effectLst>
-        </p:spPr>
-      </p:sp>
-      <p:sp>
-        <p:nvSpPr>
-          <p:cNvPr id="21" name="Shape 19"/>
-          <p:cNvSpPr/>
-          <p:nvPr/>
-        </p:nvSpPr>
-        <p:spPr>
-          <a:xfrm>
-            <a:off x="3264408" y="2267712"/>
-            <a:ext cx="548640" cy="548640"/>
-          </a:xfrm>
-          <a:prstGeom prst="ellipse">
-            <a:avLst/>
-          </a:prstGeom>
-          <a:solidFill>
-            <a:srgbClr val="2E75B6"/>
-          </a:solidFill>
-          <a:ln/>
-        </p:spPr>
-      </p:sp>
-      <p:sp>
-        <p:nvSpPr>
-          <p:cNvPr id="22" name="Text 20"/>
-          <p:cNvSpPr/>
-          <p:nvPr/>
-        </p:nvSpPr>
-        <p:spPr>
-          <a:xfrm>
-            <a:off x="3264408" y="2267712"/>
-            <a:ext cx="548640" cy="548640"/>
-          </a:xfrm>
-          <a:prstGeom prst="rect">
-            <a:avLst/>
-          </a:prstGeom>
-          <a:noFill/>
-          <a:ln/>
-        </p:spPr>
-        <p:txBody>
-          <a:bodyPr wrap="square" lIns="0" tIns="0" rIns="0" bIns="0" rtlCol="0" anchor="ctr"/>
-          <a:lstStyle/>
-          <a:p>
-            <a:pPr marL="0" indent="0" algn="ctr">
-              <a:buNone/>
-            </a:pPr>
-            <a:r>
-              <a:rPr lang="en-US" sz="1800" b="1" dirty="0">
-                <a:solidFill>
-                  <a:srgbClr val="FFFFFF"/>
-                </a:solidFill>
-              </a:rPr>
-              <a:t>5</a:t>
-            </a:r>
-            <a:endParaRPr lang="en-US" sz="1800" dirty="0"/>
-          </a:p>
-        </p:txBody>
-      </p:sp>
-      <p:sp>
-        <p:nvSpPr>
-          <p:cNvPr id="23" name="Text 21"/>
-          <p:cNvSpPr/>
-          <p:nvPr/>
-        </p:nvSpPr>
-        <p:spPr>
-          <a:xfrm>
-            <a:off x="3904488" y="2331720"/>
-            <a:ext cx="1828800" cy="457200"/>
-          </a:xfrm>
-          <a:prstGeom prst="rect">
-            <a:avLst/>
-          </a:prstGeom>
-          <a:noFill/>
-          <a:ln/>
-        </p:spPr>
-        <p:txBody>
-          <a:bodyPr wrap="square" rtlCol="0" anchor="ctr"/>
-          <a:lstStyle/>
-          <a:p>
-            <a:pPr marL="0" indent="0">
-              <a:buNone/>
-            </a:pPr>
-            <a:r>
-              <a:rPr lang="en-US" sz="1100" dirty="0">
-                <a:solidFill>
-                  <a:srgbClr val="1F4E79"/>
-                </a:solidFill>
-              </a:rPr>
-              <a:t>Out of scope</a:t>
-            </a:r>
-            <a:endParaRPr lang="en-US" sz="1100" dirty="0"/>
-          </a:p>
-        </p:txBody>
-      </p:sp>
-      <p:sp>
-        <p:nvSpPr>
-          <p:cNvPr id="24" name="Shape 22"/>
-          <p:cNvSpPr/>
-          <p:nvPr/>
-        </p:nvSpPr>
-        <p:spPr>
-          <a:xfrm>
-            <a:off x="6035040" y="2103120"/>
-            <a:ext cx="2697480" cy="914400"/>
-          </a:xfrm>
-          <a:prstGeom prst="roundRect">
-            <a:avLst>
-              <a:gd name="adj" fmla="val 10000"/>
-            </a:avLst>
-          </a:prstGeom>
-          <a:solidFill>
-            <a:srgbClr val="F2F6FA"/>
-          </a:solidFill>
-          <a:ln/>
-          <a:effectLst>
-            <a:outerShdw blurRad="101600" dist="38100" dir="2700000" algn="bl" rotWithShape="0">
-              <a:srgbClr val="000000">
-                <a:alpha val="12000"/>
-              </a:srgbClr>
-            </a:outerShdw>
-          </a:effectLst>
-        </p:spPr>
-      </p:sp>
-      <p:sp>
-        <p:nvSpPr>
-          <p:cNvPr id="25" name="Shape 23"/>
-          <p:cNvSpPr/>
-          <p:nvPr/>
-        </p:nvSpPr>
-        <p:spPr>
-          <a:xfrm>
-            <a:off x="6144768" y="2267712"/>
-            <a:ext cx="548640" cy="548640"/>
-          </a:xfrm>
-          <a:prstGeom prst="ellipse">
-            <a:avLst/>
-          </a:prstGeom>
-          <a:solidFill>
-            <a:srgbClr val="028090"/>
-          </a:solidFill>
-          <a:ln/>
-        </p:spPr>
-      </p:sp>
-      <p:sp>
-        <p:nvSpPr>
-          <p:cNvPr id="26" name="Text 24"/>
-          <p:cNvSpPr/>
-          <p:nvPr/>
-        </p:nvSpPr>
-        <p:spPr>
-          <a:xfrm>
-            <a:off x="6144768" y="2267712"/>
-            <a:ext cx="548640" cy="548640"/>
-          </a:xfrm>
-          <a:prstGeom prst="rect">
-            <a:avLst/>
-          </a:prstGeom>
-          <a:noFill/>
-          <a:ln/>
-        </p:spPr>
-        <p:txBody>
-          <a:bodyPr wrap="square" lIns="0" tIns="0" rIns="0" bIns="0" rtlCol="0" anchor="ctr"/>
-          <a:lstStyle/>
-          <a:p>
-            <a:pPr marL="0" indent="0" algn="ctr">
-              <a:buNone/>
-            </a:pPr>
-            <a:r>
-              <a:rPr lang="en-US" sz="1800" b="1" dirty="0">
-                <a:solidFill>
-                  <a:srgbClr val="FFFFFF"/>
-                </a:solidFill>
-              </a:rPr>
-              <a:t>5</a:t>
-            </a:r>
-            <a:endParaRPr lang="en-US" sz="1800" dirty="0"/>
-          </a:p>
-        </p:txBody>
-      </p:sp>
-      <p:sp>
-        <p:nvSpPr>
-          <p:cNvPr id="27" name="Text 25"/>
-          <p:cNvSpPr/>
-          <p:nvPr/>
-        </p:nvSpPr>
-        <p:spPr>
-          <a:xfrm>
-            <a:off x="6784848" y="2331720"/>
-            <a:ext cx="1828800" cy="457200"/>
-          </a:xfrm>
-          <a:prstGeom prst="rect">
-            <a:avLst/>
-          </a:prstGeom>
-          <a:noFill/>
-          <a:ln/>
-        </p:spPr>
-        <p:txBody>
-          <a:bodyPr wrap="square" rtlCol="0" anchor="ctr"/>
-          <a:lstStyle/>
-          <a:p>
-            <a:pPr marL="0" indent="0">
-              <a:buNone/>
-            </a:pPr>
-            <a:r>
-              <a:rPr lang="en-US" sz="1100" dirty="0">
-                <a:solidFill>
-                  <a:srgbClr val="1F4E79"/>
-                </a:solidFill>
-              </a:rPr>
-              <a:t>No match</a:t>
-            </a:r>
-            <a:endParaRPr lang="en-US" sz="1100" dirty="0"/>
-          </a:p>
-        </p:txBody>
-      </p:sp>
-      <p:sp>
-        <p:nvSpPr>
-          <p:cNvPr id="28" name="Shape 26"/>
-          <p:cNvSpPr/>
-          <p:nvPr/>
-        </p:nvSpPr>
-        <p:spPr>
-          <a:xfrm>
-            <a:off x="274320" y="3246120"/>
-            <a:ext cx="8595360" cy="1691640"/>
-          </a:xfrm>
-          <a:prstGeom prst="roundRect">
-            <a:avLst>
-              <a:gd name="adj" fmla="val 5405"/>
-            </a:avLst>
-          </a:prstGeom>
-          <a:solidFill>
-            <a:srgbClr val="F2F6FA"/>
-          </a:solidFill>
-          <a:ln/>
-          <a:effectLst>
-            <a:outerShdw blurRad="101600" dist="38100" dir="2700000" algn="bl" rotWithShape="0">
-              <a:srgbClr val="000000">
-                <a:alpha val="12000"/>
-              </a:srgbClr>
-            </a:outerShdw>
-          </a:effectLst>
-        </p:spPr>
-      </p:sp>
-      <p:sp>
-        <p:nvSpPr>
-          <p:cNvPr id="29" name="Text 27"/>
-          <p:cNvSpPr/>
-          <p:nvPr/>
-        </p:nvSpPr>
-        <p:spPr>
-          <a:xfrm>
-            <a:off x="457200" y="3337560"/>
-            <a:ext cx="8229600" cy="320040"/>
-          </a:xfrm>
-          <a:prstGeom prst="rect">
-            <a:avLst/>
-          </a:prstGeom>
-          <a:noFill/>
-          <a:ln/>
-        </p:spPr>
-        <p:txBody>
-          <a:bodyPr wrap="square" rtlCol="0" anchor="ctr"/>
-          <a:lstStyle/>
-          <a:p>
-            <a:pPr marL="0" indent="0">
-              <a:buNone/>
-            </a:pPr>
-            <a:r>
-              <a:rPr lang="en-US" sz="1200" b="1" kern="0" spc="200" dirty="0">
-                <a:solidFill>
-                  <a:srgbClr val="1F4E79"/>
-                </a:solidFill>
-              </a:rPr>
-              <a:t>RAGAS METRICS</a:t>
-            </a:r>
-            <a:endParaRPr lang="en-US" sz="1200" dirty="0"/>
-          </a:p>
-        </p:txBody>
-      </p:sp>
-      <p:sp>
-        <p:nvSpPr>
-          <p:cNvPr id="30" name="Shape 28"/>
-          <p:cNvSpPr/>
-          <p:nvPr/>
-        </p:nvSpPr>
-        <p:spPr>
-          <a:xfrm>
-            <a:off x="457200" y="3703320"/>
-            <a:ext cx="1965960" cy="1097280"/>
-          </a:xfrm>
-          <a:prstGeom prst="roundRect">
-            <a:avLst>
-              <a:gd name="adj" fmla="val 6667"/>
-            </a:avLst>
-          </a:prstGeom>
-          <a:solidFill>
-            <a:srgbClr val="FFFFFF"/>
-          </a:solidFill>
-          <a:ln/>
-        </p:spPr>
-      </p:sp>
-      <p:sp>
-        <p:nvSpPr>
-          <p:cNvPr id="31" name="Text 29"/>
-          <p:cNvSpPr/>
-          <p:nvPr/>
-        </p:nvSpPr>
-        <p:spPr>
-          <a:xfrm>
-            <a:off x="457200" y="3749040"/>
-            <a:ext cx="1965960" cy="320040"/>
-          </a:xfrm>
-          <a:prstGeom prst="rect">
-            <a:avLst/>
-          </a:prstGeom>
-          <a:noFill/>
-          <a:ln/>
-        </p:spPr>
-        <p:txBody>
-          <a:bodyPr wrap="square" rtlCol="0" anchor="ctr"/>
-          <a:lstStyle/>
-          <a:p>
-            <a:pPr marL="0" indent="0" algn="ctr">
-              <a:buNone/>
-            </a:pPr>
-            <a:r>
-              <a:rPr lang="en-US" sz="1000" b="1" dirty="0">
-                <a:solidFill>
-                  <a:srgbClr val="2E75B6"/>
-                </a:solidFill>
-              </a:rPr>
-              <a:t>faithfulness</a:t>
-            </a:r>
-            <a:endParaRPr lang="en-US" sz="1000" dirty="0"/>
-          </a:p>
-        </p:txBody>
-      </p:sp>
-      <p:sp>
-        <p:nvSpPr>
-          <p:cNvPr id="32" name="Text 30"/>
-          <p:cNvSpPr/>
-          <p:nvPr/>
-        </p:nvSpPr>
-        <p:spPr>
-          <a:xfrm>
-            <a:off x="457200" y="4096512"/>
-            <a:ext cx="1965960" cy="411480"/>
-          </a:xfrm>
-          <a:prstGeom prst="rect">
-            <a:avLst/>
-          </a:prstGeom>
-          <a:noFill/>
-          <a:ln/>
-        </p:spPr>
-        <p:txBody>
-          <a:bodyPr wrap="square" rtlCol="0" anchor="ctr"/>
-          <a:lstStyle/>
-          <a:p>
-            <a:pPr marL="0" indent="0" algn="ctr">
-              <a:buNone/>
-            </a:pPr>
-            <a:r>
-              <a:rPr lang="en-US" sz="900" dirty="0">
-                <a:solidFill>
-                  <a:srgbClr val="5D6D7E"/>
-                </a:solidFill>
-              </a:rPr>
-              <a:t>Response grounded in context?</a:t>
-            </a:r>
-            <a:endParaRPr lang="en-US" sz="900" dirty="0"/>
-          </a:p>
-        </p:txBody>
-      </p:sp>
-      <p:sp>
-        <p:nvSpPr>
-          <p:cNvPr id="33" name="Text 31"/>
-          <p:cNvSpPr/>
-          <p:nvPr/>
-        </p:nvSpPr>
-        <p:spPr>
-          <a:xfrm>
-            <a:off x="457200" y="4544568"/>
-            <a:ext cx="1965960" cy="228600"/>
-          </a:xfrm>
-          <a:prstGeom prst="rect">
-            <a:avLst/>
-          </a:prstGeom>
-          <a:noFill/>
-          <a:ln/>
-        </p:spPr>
-        <p:txBody>
-          <a:bodyPr wrap="square" rtlCol="0" anchor="ctr"/>
-          <a:lstStyle/>
-          <a:p>
-            <a:pPr marL="0" indent="0" algn="ctr">
-              <a:buNone/>
-            </a:pPr>
-            <a:r>
-              <a:rPr lang="en-US" sz="1000" b="1" dirty="0">
-                <a:solidFill>
-                  <a:srgbClr val="028090"/>
-                </a:solidFill>
-              </a:rPr>
-              <a:t>&gt; 0.80</a:t>
-            </a:r>
-            <a:endParaRPr lang="en-US" sz="1000" dirty="0"/>
-          </a:p>
-        </p:txBody>
-      </p:sp>
-      <p:sp>
-        <p:nvSpPr>
-          <p:cNvPr id="34" name="Shape 32"/>
-          <p:cNvSpPr/>
-          <p:nvPr/>
-        </p:nvSpPr>
-        <p:spPr>
-          <a:xfrm>
-            <a:off x="2578608" y="3703320"/>
-            <a:ext cx="1965960" cy="1097280"/>
-          </a:xfrm>
-          <a:prstGeom prst="roundRect">
-            <a:avLst>
-              <a:gd name="adj" fmla="val 6667"/>
-            </a:avLst>
-          </a:prstGeom>
-          <a:solidFill>
-            <a:srgbClr val="FFFFFF"/>
-          </a:solidFill>
-          <a:ln/>
-        </p:spPr>
-      </p:sp>
-      <p:sp>
-        <p:nvSpPr>
-          <p:cNvPr id="35" name="Text 33"/>
-          <p:cNvSpPr/>
-          <p:nvPr/>
-        </p:nvSpPr>
-        <p:spPr>
-          <a:xfrm>
-            <a:off x="2578608" y="3749040"/>
-            <a:ext cx="1965960" cy="320040"/>
-          </a:xfrm>
-          <a:prstGeom prst="rect">
-            <a:avLst/>
-          </a:prstGeom>
-          <a:noFill/>
-          <a:ln/>
-        </p:spPr>
-        <p:txBody>
-          <a:bodyPr wrap="square" rtlCol="0" anchor="ctr"/>
-          <a:lstStyle/>
-          <a:p>
-            <a:pPr marL="0" indent="0" algn="ctr">
-              <a:buNone/>
-            </a:pPr>
-            <a:r>
-              <a:rPr lang="en-US" sz="1000" b="1" dirty="0">
-                <a:solidFill>
-                  <a:srgbClr val="2E75B6"/>
-                </a:solidFill>
-              </a:rPr>
-              <a:t>answer_relevancy</a:t>
-            </a:r>
-            <a:endParaRPr lang="en-US" sz="1000" dirty="0"/>
-          </a:p>
-        </p:txBody>
-      </p:sp>
-      <p:sp>
-        <p:nvSpPr>
-          <p:cNvPr id="36" name="Text 34"/>
-          <p:cNvSpPr/>
-          <p:nvPr/>
-        </p:nvSpPr>
-        <p:spPr>
-          <a:xfrm>
-            <a:off x="2578608" y="4096512"/>
-            <a:ext cx="1965960" cy="411480"/>
-          </a:xfrm>
-          <a:prstGeom prst="rect">
-            <a:avLst/>
-          </a:prstGeom>
-          <a:noFill/>
-          <a:ln/>
-        </p:spPr>
-        <p:txBody>
-          <a:bodyPr wrap="square" rtlCol="0" anchor="ctr"/>
-          <a:lstStyle/>
-          <a:p>
-            <a:pPr marL="0" indent="0" algn="ctr">
-              <a:buNone/>
-            </a:pPr>
-            <a:r>
-              <a:rPr lang="en-US" sz="900" dirty="0">
-                <a:solidFill>
-                  <a:srgbClr val="5D6D7E"/>
-                </a:solidFill>
-              </a:rPr>
-              <a:t>Response relevant to the question?</a:t>
-            </a:r>
-            <a:endParaRPr lang="en-US" sz="900" dirty="0"/>
-          </a:p>
-        </p:txBody>
-      </p:sp>
-      <p:sp>
-        <p:nvSpPr>
-          <p:cNvPr id="37" name="Text 35"/>
-          <p:cNvSpPr/>
-          <p:nvPr/>
-        </p:nvSpPr>
-        <p:spPr>
-          <a:xfrm>
-            <a:off x="2578608" y="4544568"/>
-            <a:ext cx="1965960" cy="228600"/>
-          </a:xfrm>
-          <a:prstGeom prst="rect">
-            <a:avLst/>
-          </a:prstGeom>
-          <a:noFill/>
-          <a:ln/>
-        </p:spPr>
-        <p:txBody>
-          <a:bodyPr wrap="square" rtlCol="0" anchor="ctr"/>
-          <a:lstStyle/>
-          <a:p>
-            <a:pPr marL="0" indent="0" algn="ctr">
-              <a:buNone/>
-            </a:pPr>
-            <a:r>
-              <a:rPr lang="en-US" sz="1000" b="1" dirty="0">
-                <a:solidFill>
-                  <a:srgbClr val="028090"/>
-                </a:solidFill>
-              </a:rPr>
-              <a:t>&gt; 0.75</a:t>
-            </a:r>
-            <a:endParaRPr lang="en-US" sz="1000" dirty="0"/>
-          </a:p>
-        </p:txBody>
-      </p:sp>
-      <p:sp>
-        <p:nvSpPr>
-          <p:cNvPr id="38" name="Shape 36"/>
-          <p:cNvSpPr/>
-          <p:nvPr/>
-        </p:nvSpPr>
-        <p:spPr>
-          <a:xfrm>
-            <a:off x="4700016" y="3703320"/>
-            <a:ext cx="1965960" cy="1097280"/>
-          </a:xfrm>
-          <a:prstGeom prst="roundRect">
-            <a:avLst>
-              <a:gd name="adj" fmla="val 6667"/>
-            </a:avLst>
-          </a:prstGeom>
-          <a:solidFill>
-            <a:srgbClr val="FFFFFF"/>
-          </a:solidFill>
-          <a:ln/>
-        </p:spPr>
-      </p:sp>
-      <p:sp>
-        <p:nvSpPr>
-          <p:cNvPr id="39" name="Text 37"/>
-          <p:cNvSpPr/>
-          <p:nvPr/>
-        </p:nvSpPr>
-        <p:spPr>
-          <a:xfrm>
-            <a:off x="4700016" y="3749040"/>
-            <a:ext cx="1965960" cy="320040"/>
-          </a:xfrm>
-          <a:prstGeom prst="rect">
-            <a:avLst/>
-          </a:prstGeom>
-          <a:noFill/>
-          <a:ln/>
-        </p:spPr>
-        <p:txBody>
-          <a:bodyPr wrap="square" rtlCol="0" anchor="ctr"/>
-          <a:lstStyle/>
-          <a:p>
-            <a:pPr marL="0" indent="0" algn="ctr">
-              <a:buNone/>
-            </a:pPr>
-            <a:r>
-              <a:rPr lang="en-US" sz="1000" b="1" dirty="0">
-                <a:solidFill>
-                  <a:srgbClr val="2E75B6"/>
-                </a:solidFill>
-              </a:rPr>
-              <a:t>context_precision</a:t>
-            </a:r>
-            <a:endParaRPr lang="en-US" sz="1000" dirty="0"/>
-          </a:p>
-        </p:txBody>
-      </p:sp>
-      <p:sp>
-        <p:nvSpPr>
-          <p:cNvPr id="40" name="Text 38"/>
-          <p:cNvSpPr/>
-          <p:nvPr/>
-        </p:nvSpPr>
-        <p:spPr>
-          <a:xfrm>
-            <a:off x="4700016" y="4096512"/>
-            <a:ext cx="1965960" cy="411480"/>
-          </a:xfrm>
-          <a:prstGeom prst="rect">
-            <a:avLst/>
-          </a:prstGeom>
-          <a:noFill/>
-          <a:ln/>
-        </p:spPr>
-        <p:txBody>
-          <a:bodyPr wrap="square" rtlCol="0" anchor="ctr"/>
-          <a:lstStyle/>
-          <a:p>
-            <a:pPr marL="0" indent="0" algn="ctr">
-              <a:buNone/>
-            </a:pPr>
-            <a:r>
-              <a:rPr lang="en-US" sz="900" dirty="0">
-                <a:solidFill>
-                  <a:srgbClr val="5D6D7E"/>
-                </a:solidFill>
-              </a:rPr>
-              <a:t>Retrieved chunks noise-free?</a:t>
-            </a:r>
-            <a:endParaRPr lang="en-US" sz="900" dirty="0"/>
-          </a:p>
-        </p:txBody>
-      </p:sp>
-      <p:sp>
-        <p:nvSpPr>
-          <p:cNvPr id="41" name="Text 39"/>
-          <p:cNvSpPr/>
-          <p:nvPr/>
-        </p:nvSpPr>
-        <p:spPr>
-          <a:xfrm>
-            <a:off x="4700016" y="4544568"/>
-            <a:ext cx="1965960" cy="228600"/>
-          </a:xfrm>
-          <a:prstGeom prst="rect">
-            <a:avLst/>
-          </a:prstGeom>
-          <a:noFill/>
-          <a:ln/>
-        </p:spPr>
-        <p:txBody>
-          <a:bodyPr wrap="square" rtlCol="0" anchor="ctr"/>
-          <a:lstStyle/>
-          <a:p>
-            <a:pPr marL="0" indent="0" algn="ctr">
-              <a:buNone/>
-            </a:pPr>
-            <a:r>
-              <a:rPr lang="en-US" sz="1000" b="1" dirty="0">
-                <a:solidFill>
-                  <a:srgbClr val="028090"/>
-                </a:solidFill>
-              </a:rPr>
-              <a:t>&gt; 0.70</a:t>
-            </a:r>
-            <a:endParaRPr lang="en-US" sz="1000" dirty="0"/>
-          </a:p>
-        </p:txBody>
-      </p:sp>
-      <p:sp>
-        <p:nvSpPr>
-          <p:cNvPr id="42" name="Shape 40"/>
-          <p:cNvSpPr/>
-          <p:nvPr/>
-        </p:nvSpPr>
-        <p:spPr>
-          <a:xfrm>
-            <a:off x="6821424" y="3703320"/>
-            <a:ext cx="1965960" cy="1097280"/>
-          </a:xfrm>
-          <a:prstGeom prst="roundRect">
-            <a:avLst>
-              <a:gd name="adj" fmla="val 6667"/>
-            </a:avLst>
-          </a:prstGeom>
-          <a:solidFill>
-            <a:srgbClr val="FFFFFF"/>
-          </a:solidFill>
-          <a:ln/>
-        </p:spPr>
-      </p:sp>
-      <p:sp>
-        <p:nvSpPr>
-          <p:cNvPr id="43" name="Text 41"/>
-          <p:cNvSpPr/>
-          <p:nvPr/>
-        </p:nvSpPr>
-        <p:spPr>
-          <a:xfrm>
-            <a:off x="6821424" y="3749040"/>
-            <a:ext cx="1965960" cy="320040"/>
-          </a:xfrm>
-          <a:prstGeom prst="rect">
-            <a:avLst/>
-          </a:prstGeom>
-          <a:noFill/>
-          <a:ln/>
-        </p:spPr>
-        <p:txBody>
-          <a:bodyPr wrap="square" rtlCol="0" anchor="ctr"/>
-          <a:lstStyle/>
-          <a:p>
-            <a:pPr marL="0" indent="0" algn="ctr">
-              <a:buNone/>
-            </a:pPr>
-            <a:r>
-              <a:rPr lang="en-US" sz="1000" b="1" dirty="0">
-                <a:solidFill>
-                  <a:srgbClr val="2E75B6"/>
-                </a:solidFill>
-              </a:rPr>
-              <a:t>context_recall</a:t>
-            </a:r>
-            <a:endParaRPr lang="en-US" sz="1000" dirty="0"/>
-          </a:p>
-        </p:txBody>
-      </p:sp>
-      <p:sp>
-        <p:nvSpPr>
-          <p:cNvPr id="44" name="Text 42"/>
-          <p:cNvSpPr/>
-          <p:nvPr/>
-        </p:nvSpPr>
-        <p:spPr>
-          <a:xfrm>
-            <a:off x="6821424" y="4096512"/>
-            <a:ext cx="1965960" cy="411480"/>
-          </a:xfrm>
-          <a:prstGeom prst="rect">
-            <a:avLst/>
-          </a:prstGeom>
-          <a:noFill/>
-          <a:ln/>
-        </p:spPr>
-        <p:txBody>
-          <a:bodyPr wrap="square" rtlCol="0" anchor="ctr"/>
-          <a:lstStyle/>
-          <a:p>
-            <a:pPr marL="0" indent="0" algn="ctr">
-              <a:buNone/>
-            </a:pPr>
-            <a:r>
-              <a:rPr lang="en-US" sz="900" dirty="0">
-                <a:solidFill>
-                  <a:srgbClr val="5D6D7E"/>
-                </a:solidFill>
-              </a:rPr>
-              <a:t>All necessary info retrieved?</a:t>
-            </a:r>
-            <a:endParaRPr lang="en-US" sz="900" dirty="0"/>
-          </a:p>
-        </p:txBody>
-      </p:sp>
-      <p:sp>
-        <p:nvSpPr>
-          <p:cNvPr id="45" name="Text 43"/>
-          <p:cNvSpPr/>
-          <p:nvPr/>
-        </p:nvSpPr>
-        <p:spPr>
-          <a:xfrm>
-            <a:off x="6821424" y="4544568"/>
-            <a:ext cx="1965960" cy="228600"/>
-          </a:xfrm>
-          <a:prstGeom prst="rect">
-            <a:avLst/>
-          </a:prstGeom>
-          <a:noFill/>
-          <a:ln/>
-        </p:spPr>
-        <p:txBody>
-          <a:bodyPr wrap="square" rtlCol="0" anchor="ctr"/>
-          <a:lstStyle/>
-          <a:p>
-            <a:pPr marL="0" indent="0" algn="ctr">
-              <a:buNone/>
-            </a:pPr>
-            <a:r>
-              <a:rPr lang="en-US" sz="1000" b="1" dirty="0">
-                <a:solidFill>
-                  <a:srgbClr val="028090"/>
-                </a:solidFill>
-              </a:rPr>
-              <a:t>&gt; 0.70</a:t>
-            </a:r>
-            <a:endParaRPr lang="en-US" sz="1000" dirty="0"/>
           </a:p>
         </p:txBody>
       </p:sp>
